--- a/Day4_Likelihood_BayesI/FW536_Day4_Morning_maximum likelihod_accessible.pptx
+++ b/Day4_Likelihood_BayesI/FW536_Day4_Morning_maximum likelihod_accessible.pptx
@@ -34419,60 +34419,6 @@
           </a:p>
         </p:txBody>
       </p:sp>
-      <p:pic>
-        <p:nvPicPr>
-          <p:cNvPr id="3" name="Picture 2" descr="Equation: L-tilde(p | {X_i}) = product from i=1 to n of f(X_i | p). The likelihood is the product of the per-data-point densities." title="Equation: L-tilde(p | {X_i}) = product from i=1 to n of f(X_i | p). The likeliho"/>
-          <p:cNvPicPr>
-            <a:picLocks noChangeAspect="1"/>
-          </p:cNvPicPr>
-          <p:nvPr/>
-        </p:nvPicPr>
-        <p:blipFill>
-          <a:blip r:embed="rId3">
-            <a:extLst>
-              <a:ext uri="{28A0092B-C50C-407E-A947-70E740481C1C}">
-                <a14:useLocalDpi xmlns:a14="http://schemas.microsoft.com/office/drawing/2010/main" val="0"/>
-              </a:ext>
-            </a:extLst>
-          </a:blip>
-          <a:srcRect/>
-          <a:stretch>
-            <a:fillRect/>
-          </a:stretch>
-        </p:blipFill>
-        <p:spPr bwMode="auto">
-          <a:xfrm>
-            <a:off x="2586758" y="3286047"/>
-            <a:ext cx="6366445" cy="917817"/>
-          </a:xfrm>
-          <a:prstGeom prst="rect">
-            <a:avLst/>
-          </a:prstGeom>
-          <a:noFill/>
-          <a:ln>
-            <a:noFill/>
-          </a:ln>
-          <a:extLst>
-            <a:ext uri="{909E8E84-426E-40DD-AFC4-6F175D3DCCD1}">
-              <a14:hiddenFill xmlns:a14="http://schemas.microsoft.com/office/drawing/2010/main">
-                <a:solidFill>
-                  <a:srgbClr val="FFFFFF"/>
-                </a:solidFill>
-              </a14:hiddenFill>
-            </a:ext>
-            <a:ext uri="{91240B29-F687-4F45-9708-019B960494DF}">
-              <a14:hiddenLine xmlns:a14="http://schemas.microsoft.com/office/drawing/2010/main" w="9525">
-                <a:solidFill>
-                  <a:srgbClr val="000000"/>
-                </a:solidFill>
-                <a:miter lim="800000"/>
-                <a:headEnd/>
-                <a:tailEnd/>
-              </a14:hiddenLine>
-            </a:ext>
-          </a:extLst>
-        </p:spPr>
-      </p:pic>
       <p:sp>
         <p:nvSpPr>
           <p:cNvPr id="11" name="Text Box 8"/>
@@ -35142,6 +35088,79 @@
               <a:defRPr/>
             </a:pPr>
             <a:endParaRPr lang="en-US"/>
+          </a:p>
+        </p:txBody>
+      </p:sp>
+      <p:sp>
+        <p:nvSpPr>
+          <p:cNvPr id="13316" name="TextBox 13315"/>
+          <p:cNvSpPr txBox="1"/>
+          <p:nvPr/>
+        </p:nvSpPr>
+        <p:spPr>
+          <a:xfrm>
+            <a:off x="2586758" y="3286047"/>
+            <a:ext cx="6366445" cy="917817"/>
+          </a:xfrm>
+          <a:prstGeom prst="rect">
+            <a:avLst/>
+          </a:prstGeom>
+          <a:noFill/>
+        </p:spPr>
+        <p:txBody>
+          <a:bodyPr wrap="square" anchor="ctr" lIns="0" rIns="0" tIns="0" bIns="0">
+            <a:spAutoFit/>
+          </a:bodyPr>
+          <a:lstStyle/>
+          <a:p>
+            <a:r>
+              <a:rPr sz="2600" b="0">
+                <a:latin typeface="Cambria"/>
+              </a:rPr>
+              <a:t>L˜(p | {X</a:t>
+            </a:r>
+            <a:r>
+              <a:rPr sz="2600" b="0" baseline="-25000">
+                <a:latin typeface="Cambria"/>
+              </a:rPr>
+              <a:t>i</a:t>
+            </a:r>
+            <a:r>
+              <a:rPr sz="2600" b="0">
+                <a:latin typeface="Cambria"/>
+              </a:rPr>
+              <a:t>}) = ∏</a:t>
+            </a:r>
+            <a:r>
+              <a:rPr sz="2600" b="0" baseline="-25000">
+                <a:latin typeface="Cambria"/>
+              </a:rPr>
+              <a:t>i=1</a:t>
+            </a:r>
+            <a:r>
+              <a:rPr sz="2600" b="0" baseline="30000">
+                <a:latin typeface="Cambria"/>
+              </a:rPr>
+              <a:t>n</a:t>
+            </a:r>
+            <a:r>
+              <a:rPr sz="2600" b="0">
+                <a:latin typeface="Cambria"/>
+              </a:rPr>
+              <a:t> f(X</a:t>
+            </a:r>
+            <a:r>
+              <a:rPr sz="2600" b="0" baseline="-25000">
+                <a:latin typeface="Cambria"/>
+              </a:rPr>
+              <a:t>i</a:t>
+            </a:r>
+            <a:r>
+              <a:rPr sz="2600" b="0">
+                <a:latin typeface="Cambria"/>
+              </a:rPr>
+              <a:t> | p)</a:t>
+            </a:r>
           </a:p>
         </p:txBody>
       </p:sp>
@@ -36242,36 +36261,49 @@
           </a:p>
         </p:txBody>
       </p:sp>
-      <p:pic>
-        <p:nvPicPr>
-          <p:cNvPr id="2" name="Picture 1" descr="Equation: f(x) = 1 / (sigma times square root of 2 pi) times e to the negative one-half times ((x minus mu) over sigma) squared. Normal density." title="Equation: f(x) = 1 / (sigma times square root of 2 pi) times e to the negative o">
-            <a:extLst>
-              <a:ext uri="{FF2B5EF4-FFF2-40B4-BE49-F238E27FC236}">
-                <a16:creationId xmlns:a16="http://schemas.microsoft.com/office/drawing/2014/main" id="{79808509-F1EA-4C7B-0049-595E95C126C1}"/>
-              </a:ext>
-            </a:extLst>
-          </p:cNvPr>
-          <p:cNvPicPr>
-            <a:picLocks noChangeAspect="1"/>
-          </p:cNvPicPr>
+      <p:sp>
+        <p:nvSpPr>
+          <p:cNvPr id="314372" name="TextBox 314371"/>
+          <p:cNvSpPr txBox="1"/>
           <p:nvPr/>
-        </p:nvPicPr>
-        <p:blipFill>
-          <a:blip r:embed="rId7"/>
-          <a:stretch>
-            <a:fillRect/>
-          </a:stretch>
-        </p:blipFill>
+        </p:nvSpPr>
         <p:spPr>
           <a:xfrm>
             <a:off x="8543867" y="5197334"/>
-            <a:ext cx="3423932" cy="944533"/>
+            <a:ext cx="3419533" cy="944533"/>
           </a:xfrm>
           <a:prstGeom prst="rect">
             <a:avLst/>
           </a:prstGeom>
+          <a:noFill/>
         </p:spPr>
-      </p:pic>
+        <p:txBody>
+          <a:bodyPr wrap="square" anchor="ctr" lIns="0" rIns="0" tIns="0" bIns="0">
+            <a:spAutoFit/>
+          </a:bodyPr>
+          <a:lstStyle/>
+          <a:p>
+            <a:r>
+              <a:rPr sz="1200" b="0">
+                <a:latin typeface="Cambria"/>
+              </a:rPr>
+              <a:t>f(x) = 1 / (σ √(2π)) · exp( −½ ((x − μ)/σ)</a:t>
+            </a:r>
+            <a:r>
+              <a:rPr sz="1200" b="0" baseline="30000">
+                <a:latin typeface="Cambria"/>
+              </a:rPr>
+              <a:t>2</a:t>
+            </a:r>
+            <a:r>
+              <a:rPr sz="1200" b="0">
+                <a:latin typeface="Cambria"/>
+              </a:rPr>
+              <a:t> )</a:t>
+            </a:r>
+          </a:p>
+        </p:txBody>
+      </p:sp>
     </p:spTree>
     <p:extLst>
       <p:ext uri="{BB962C8B-B14F-4D97-AF65-F5344CB8AC3E}">

--- a/Day4_Likelihood_BayesI/FW536_Day4_Morning_maximum likelihod_accessible.pptx
+++ b/Day4_Likelihood_BayesI/FW536_Day4_Morning_maximum likelihod_accessible.pptx
@@ -7873,106 +7873,6 @@
           </a:p>
         </p:txBody>
       </p:sp>
-      <p:graphicFrame>
-        <p:nvGraphicFramePr>
-          <p:cNvPr id="324611" name="Object 4"/>
-          <p:cNvGraphicFramePr>
-            <a:graphicFrameLocks noGrp="1" noChangeAspect="1"/>
-          </p:cNvGraphicFramePr>
-          <p:nvPr>
-            <p:ph sz="half" idx="1"/>
-            <p:extLst>
-              <p:ext uri="{D42A27DB-BD31-4B8C-83A1-F6EECF244321}">
-                <p14:modId xmlns:p14="http://schemas.microsoft.com/office/powerpoint/2010/main" val="752975029"/>
-              </p:ext>
-            </p:extLst>
-          </p:nvPr>
-        </p:nvGraphicFramePr>
-        <p:xfrm>
-          <a:off x="3136076" y="3347258"/>
-          <a:ext cx="2987675" cy="571500"/>
-        </p:xfrm>
-        <a:graphic>
-          <a:graphicData uri="http://schemas.openxmlformats.org/presentationml/2006/ole">
-            <mc:AlternateContent xmlns:mc="http://schemas.openxmlformats.org/markup-compatibility/2006">
-              <mc:Choice xmlns:v="urn:schemas-microsoft-com:vml" Requires="v">
-                <p:oleObj name="Equation" r:id="rId3" imgW="1193800" imgH="228600" progId="Equation.DSMT4">
-                  <p:embed/>
-                </p:oleObj>
-              </mc:Choice>
-              <mc:Fallback>
-                <p:oleObj name="Equation" r:id="rId3" imgW="1193800" imgH="228600" progId="Equation.DSMT4">
-                  <p:embed/>
-                  <p:pic>
-                    <p:nvPicPr>
-                      <p:cNvPr id="0" name=""/>
-                      <p:cNvPicPr>
-                        <a:picLocks noChangeAspect="1" noChangeArrowheads="1"/>
-                      </p:cNvPicPr>
-                      <p:nvPr/>
-                    </p:nvPicPr>
-                    <p:blipFill>
-                      <a:blip r:embed="rId4">
-                        <a:extLst>
-                          <a:ext uri="{28A0092B-C50C-407E-A947-70E740481C1C}">
-                            <a14:useLocalDpi xmlns:a14="http://schemas.microsoft.com/office/drawing/2010/main" val="0"/>
-                          </a:ext>
-                        </a:extLst>
-                      </a:blip>
-                      <a:srcRect/>
-                      <a:stretch>
-                        <a:fillRect/>
-                      </a:stretch>
-                    </p:blipFill>
-                    <p:spPr bwMode="auto">
-                      <a:xfrm>
-                        <a:off x="3136076" y="3347258"/>
-                        <a:ext cx="2987675" cy="571500"/>
-                      </a:xfrm>
-                      <a:prstGeom prst="rect">
-                        <a:avLst/>
-                      </a:prstGeom>
-                      <a:noFill/>
-                      <a:ln>
-                        <a:noFill/>
-                      </a:ln>
-                      <a:effectLst/>
-                      <a:extLst>
-                        <a:ext uri="{909E8E84-426E-40DD-AFC4-6F175D3DCCD1}">
-                          <a14:hiddenFill xmlns:a14="http://schemas.microsoft.com/office/drawing/2010/main">
-                            <a:solidFill>
-                              <a:srgbClr val="FFFFFF"/>
-                            </a:solidFill>
-                          </a14:hiddenFill>
-                        </a:ext>
-                        <a:ext uri="{91240B29-F687-4F45-9708-019B960494DF}">
-                          <a14:hiddenLine xmlns:a14="http://schemas.microsoft.com/office/drawing/2010/main" w="9525">
-                            <a:solidFill>
-                              <a:srgbClr val="000000"/>
-                            </a:solidFill>
-                            <a:miter lim="800000"/>
-                            <a:headEnd/>
-                            <a:tailEnd/>
-                          </a14:hiddenLine>
-                        </a:ext>
-                        <a:ext uri="{AF507438-7753-43E0-B8FC-AC1667EBCBE1}">
-                          <a14:hiddenEffects xmlns:a14="http://schemas.microsoft.com/office/drawing/2010/main">
-                            <a:effectLst>
-                              <a:outerShdw dist="35921" dir="2700000" algn="ctr" rotWithShape="0">
-                                <a:srgbClr val="808080"/>
-                              </a:outerShdw>
-                            </a:effectLst>
-                          </a14:hiddenEffects>
-                        </a:ext>
-                      </a:extLst>
-                    </p:spPr>
-                  </p:pic>
-                </p:oleObj>
-              </mc:Fallback>
-            </mc:AlternateContent>
-          </a:graphicData>
-        </a:graphic>
-      </p:graphicFrame>
       <p:sp>
         <p:nvSpPr>
           <p:cNvPr id="19461" name="Rectangle 5"/>
@@ -8149,111 +8049,21 @@
             </a:r>
             <a:r>
               <a:rPr lang="en-AU" altLang="en-US" dirty="0"/>
-              <a:t> and denote it as     .</a:t>
+              <a:t> and denote it as </a:t>
+            </a:r>
+            <a:r>
+              <a:rPr lang="en-AU" altLang="en-US" dirty="0">
+                <a:latin typeface="Cambria"/>
+              </a:rPr>
+              <a:t>p̂</a:t>
+            </a:r>
+            <a:r>
+              <a:rPr lang="en-AU" altLang="en-US" dirty="0"/>
+              <a:t>.</a:t>
             </a:r>
           </a:p>
         </p:txBody>
       </p:sp>
-      <p:graphicFrame>
-        <p:nvGraphicFramePr>
-          <p:cNvPr id="324613" name="Object 6"/>
-          <p:cNvGraphicFramePr>
-            <a:graphicFrameLocks noGrp="1" noChangeAspect="1"/>
-          </p:cNvGraphicFramePr>
-          <p:nvPr>
-            <p:ph sz="half" idx="2"/>
-            <p:extLst>
-              <p:ext uri="{D42A27DB-BD31-4B8C-83A1-F6EECF244321}">
-                <p14:modId xmlns:p14="http://schemas.microsoft.com/office/powerpoint/2010/main" val="2683849734"/>
-              </p:ext>
-            </p:extLst>
-          </p:nvPr>
-        </p:nvGraphicFramePr>
-        <p:xfrm>
-          <a:off x="9726405" y="5164847"/>
-          <a:ext cx="381000" cy="508000"/>
-        </p:xfrm>
-        <a:graphic>
-          <a:graphicData uri="http://schemas.openxmlformats.org/presentationml/2006/ole">
-            <mc:AlternateContent xmlns:mc="http://schemas.openxmlformats.org/markup-compatibility/2006">
-              <mc:Choice xmlns:v="urn:schemas-microsoft-com:vml" Requires="v">
-                <p:oleObj name="Equation" r:id="rId5" imgW="152268" imgH="203024" progId="Equation.DSMT4">
-                  <p:embed/>
-                </p:oleObj>
-              </mc:Choice>
-              <mc:Fallback>
-                <p:oleObj name="Equation" r:id="rId5" imgW="152268" imgH="203024" progId="Equation.DSMT4">
-                  <p:embed/>
-                  <p:pic>
-                    <p:nvPicPr>
-                      <p:cNvPr id="0" name=""/>
-                      <p:cNvPicPr>
-                        <a:picLocks noChangeAspect="1" noChangeArrowheads="1"/>
-                      </p:cNvPicPr>
-                      <p:nvPr/>
-                    </p:nvPicPr>
-                    <p:blipFill>
-                      <a:blip r:embed="rId6">
-                        <a:extLst>
-                          <a:ext uri="{28A0092B-C50C-407E-A947-70E740481C1C}">
-                            <a14:useLocalDpi xmlns:a14="http://schemas.microsoft.com/office/drawing/2010/main" val="0"/>
-                          </a:ext>
-                        </a:extLst>
-                      </a:blip>
-                      <a:srcRect/>
-                      <a:stretch>
-                        <a:fillRect/>
-                      </a:stretch>
-                    </p:blipFill>
-                    <p:spPr bwMode="auto">
-                      <a:xfrm>
-                        <a:off x="9726405" y="5164847"/>
-                        <a:ext cx="381000" cy="508000"/>
-                      </a:xfrm>
-                      <a:prstGeom prst="rect">
-                        <a:avLst/>
-                      </a:prstGeom>
-                      <a:noFill/>
-                      <a:ln>
-                        <a:noFill/>
-                      </a:ln>
-                      <a:effectLst/>
-                      <a:extLst>
-                        <a:ext uri="{909E8E84-426E-40DD-AFC4-6F175D3DCCD1}">
-                          <a14:hiddenFill xmlns:a14="http://schemas.microsoft.com/office/drawing/2010/main">
-                            <a:solidFill>
-                              <a:srgbClr val="FFFFFF"/>
-                            </a:solidFill>
-                          </a14:hiddenFill>
-                        </a:ext>
-                        <a:ext uri="{91240B29-F687-4F45-9708-019B960494DF}">
-                          <a14:hiddenLine xmlns:a14="http://schemas.microsoft.com/office/drawing/2010/main" w="9525">
-                            <a:solidFill>
-                              <a:srgbClr val="000000"/>
-                            </a:solidFill>
-                            <a:miter lim="800000"/>
-                            <a:headEnd/>
-                            <a:tailEnd/>
-                          </a14:hiddenLine>
-                        </a:ext>
-                        <a:ext uri="{AF507438-7753-43E0-B8FC-AC1667EBCBE1}">
-                          <a14:hiddenEffects xmlns:a14="http://schemas.microsoft.com/office/drawing/2010/main">
-                            <a:effectLst>
-                              <a:outerShdw dist="35921" dir="2700000" algn="ctr" rotWithShape="0">
-                                <a:srgbClr val="808080"/>
-                              </a:outerShdw>
-                            </a:effectLst>
-                          </a14:hiddenEffects>
-                        </a:ext>
-                      </a:extLst>
-                    </p:spPr>
-                  </p:pic>
-                </p:oleObj>
-              </mc:Fallback>
-            </mc:AlternateContent>
-          </a:graphicData>
-        </a:graphic>
-      </p:graphicFrame>
       <p:sp>
         <p:nvSpPr>
           <p:cNvPr id="2" name="TextBox 1"/>
@@ -8279,6 +8089,55 @@
             <a:r>
               <a:rPr lang="en-US" dirty="0"/>
               <a:t>Is something missing? Why is this ok?</a:t>
+            </a:r>
+          </a:p>
+        </p:txBody>
+      </p:sp>
+      <p:sp>
+        <p:nvSpPr>
+          <p:cNvPr id="324614" name="TextBox 324613"/>
+          <p:cNvSpPr txBox="1"/>
+          <p:nvPr/>
+        </p:nvSpPr>
+        <p:spPr>
+          <a:xfrm>
+            <a:off x="3136076" y="3347258"/>
+            <a:ext cx="2987675" cy="571500"/>
+          </a:xfrm>
+          <a:prstGeom prst="rect">
+            <a:avLst/>
+          </a:prstGeom>
+          <a:noFill/>
+        </p:spPr>
+        <p:txBody>
+          <a:bodyPr wrap="square" anchor="ctr" lIns="0" rIns="0" tIns="0" bIns="0">
+            <a:spAutoFit/>
+          </a:bodyPr>
+          <a:lstStyle/>
+          <a:p>
+            <a:r>
+              <a:rPr sz="2100">
+                <a:latin typeface="Cambria"/>
+              </a:rPr>
+              <a:t>L(p) = p</a:t>
+            </a:r>
+            <a:r>
+              <a:rPr sz="2100" baseline="30000">
+                <a:latin typeface="Cambria"/>
+              </a:rPr>
+              <a:t>30</a:t>
+            </a:r>
+            <a:r>
+              <a:rPr sz="2100">
+                <a:latin typeface="Cambria"/>
+              </a:rPr>
+              <a:t> (1 − p)</a:t>
+            </a:r>
+            <a:r>
+              <a:rPr sz="2100" baseline="30000">
+                <a:latin typeface="Cambria"/>
+              </a:rPr>
+              <a:t>20</a:t>
             </a:r>
           </a:p>
         </p:txBody>
@@ -9163,106 +9022,6 @@
           </a:p>
         </p:txBody>
       </p:sp>
-      <p:graphicFrame>
-        <p:nvGraphicFramePr>
-          <p:cNvPr id="328706" name="Object 5"/>
-          <p:cNvGraphicFramePr>
-            <a:graphicFrameLocks noGrp="1" noChangeAspect="1"/>
-          </p:cNvGraphicFramePr>
-          <p:nvPr>
-            <p:ph sz="half" idx="1"/>
-            <p:extLst>
-              <p:ext uri="{D42A27DB-BD31-4B8C-83A1-F6EECF244321}">
-                <p14:modId xmlns:p14="http://schemas.microsoft.com/office/powerpoint/2010/main" val="3220316714"/>
-              </p:ext>
-            </p:extLst>
-          </p:nvPr>
-        </p:nvGraphicFramePr>
-        <p:xfrm>
-          <a:off x="1626825" y="3523796"/>
-          <a:ext cx="3433763" cy="406400"/>
-        </p:xfrm>
-        <a:graphic>
-          <a:graphicData uri="http://schemas.openxmlformats.org/presentationml/2006/ole">
-            <mc:AlternateContent xmlns:mc="http://schemas.openxmlformats.org/markup-compatibility/2006">
-              <mc:Choice xmlns:v="urn:schemas-microsoft-com:vml" Requires="v">
-                <p:oleObj name="Equation" r:id="rId3" imgW="1714500" imgH="203200" progId="Equation.DSMT4">
-                  <p:embed/>
-                </p:oleObj>
-              </mc:Choice>
-              <mc:Fallback>
-                <p:oleObj name="Equation" r:id="rId3" imgW="1714500" imgH="203200" progId="Equation.DSMT4">
-                  <p:embed/>
-                  <p:pic>
-                    <p:nvPicPr>
-                      <p:cNvPr id="0" name=""/>
-                      <p:cNvPicPr>
-                        <a:picLocks noChangeAspect="1" noChangeArrowheads="1"/>
-                      </p:cNvPicPr>
-                      <p:nvPr/>
-                    </p:nvPicPr>
-                    <p:blipFill>
-                      <a:blip r:embed="rId4">
-                        <a:extLst>
-                          <a:ext uri="{28A0092B-C50C-407E-A947-70E740481C1C}">
-                            <a14:useLocalDpi xmlns:a14="http://schemas.microsoft.com/office/drawing/2010/main" val="0"/>
-                          </a:ext>
-                        </a:extLst>
-                      </a:blip>
-                      <a:srcRect/>
-                      <a:stretch>
-                        <a:fillRect/>
-                      </a:stretch>
-                    </p:blipFill>
-                    <p:spPr bwMode="auto">
-                      <a:xfrm>
-                        <a:off x="1626825" y="3523796"/>
-                        <a:ext cx="3433763" cy="406400"/>
-                      </a:xfrm>
-                      <a:prstGeom prst="rect">
-                        <a:avLst/>
-                      </a:prstGeom>
-                      <a:noFill/>
-                      <a:ln>
-                        <a:noFill/>
-                      </a:ln>
-                      <a:effectLst/>
-                      <a:extLst>
-                        <a:ext uri="{909E8E84-426E-40DD-AFC4-6F175D3DCCD1}">
-                          <a14:hiddenFill xmlns:a14="http://schemas.microsoft.com/office/drawing/2010/main">
-                            <a:solidFill>
-                              <a:srgbClr val="FFFFFF"/>
-                            </a:solidFill>
-                          </a14:hiddenFill>
-                        </a:ext>
-                        <a:ext uri="{91240B29-F687-4F45-9708-019B960494DF}">
-                          <a14:hiddenLine xmlns:a14="http://schemas.microsoft.com/office/drawing/2010/main" w="9525">
-                            <a:solidFill>
-                              <a:srgbClr val="000000"/>
-                            </a:solidFill>
-                            <a:miter lim="800000"/>
-                            <a:headEnd/>
-                            <a:tailEnd/>
-                          </a14:hiddenLine>
-                        </a:ext>
-                        <a:ext uri="{AF507438-7753-43E0-B8FC-AC1667EBCBE1}">
-                          <a14:hiddenEffects xmlns:a14="http://schemas.microsoft.com/office/drawing/2010/main">
-                            <a:effectLst>
-                              <a:outerShdw dist="35921" dir="2700000" algn="ctr" rotWithShape="0">
-                                <a:srgbClr val="808080"/>
-                              </a:outerShdw>
-                            </a:effectLst>
-                          </a14:hiddenEffects>
-                        </a:ext>
-                      </a:extLst>
-                    </p:spPr>
-                  </p:pic>
-                </p:oleObj>
-              </mc:Fallback>
-            </mc:AlternateContent>
-          </a:graphicData>
-        </a:graphic>
-      </p:graphicFrame>
       <p:sp>
         <p:nvSpPr>
           <p:cNvPr id="22532" name="Text Box 4"/>
@@ -9662,111 +9421,21 @@
             </a:r>
             <a:r>
               <a:rPr lang="en-AU" altLang="en-US"/>
-              <a:t>,    , is again 0.6.</a:t>
+              <a:t>, </a:t>
+            </a:r>
+            <a:r>
+              <a:rPr lang="en-AU" altLang="en-US">
+                <a:latin typeface="Cambria"/>
+              </a:rPr>
+              <a:t>p̂</a:t>
+            </a:r>
+            <a:r>
+              <a:rPr lang="en-AU" altLang="en-US"/>
+              <a:t>, is again 0.6.</a:t>
             </a:r>
           </a:p>
         </p:txBody>
       </p:sp>
-      <p:graphicFrame>
-        <p:nvGraphicFramePr>
-          <p:cNvPr id="328710" name="Object 10"/>
-          <p:cNvGraphicFramePr>
-            <a:graphicFrameLocks noGrp="1" noChangeAspect="1"/>
-          </p:cNvGraphicFramePr>
-          <p:nvPr>
-            <p:ph sz="half" idx="2"/>
-            <p:extLst>
-              <p:ext uri="{D42A27DB-BD31-4B8C-83A1-F6EECF244321}">
-                <p14:modId xmlns:p14="http://schemas.microsoft.com/office/powerpoint/2010/main" val="4287000441"/>
-              </p:ext>
-            </p:extLst>
-          </p:nvPr>
-        </p:nvGraphicFramePr>
-        <p:xfrm>
-          <a:off x="3566993" y="4590596"/>
-          <a:ext cx="381000" cy="508000"/>
-        </p:xfrm>
-        <a:graphic>
-          <a:graphicData uri="http://schemas.openxmlformats.org/presentationml/2006/ole">
-            <mc:AlternateContent xmlns:mc="http://schemas.openxmlformats.org/markup-compatibility/2006">
-              <mc:Choice xmlns:v="urn:schemas-microsoft-com:vml" Requires="v">
-                <p:oleObj name="Equation" r:id="rId6" imgW="152268" imgH="203024" progId="Equation.DSMT4">
-                  <p:embed/>
-                </p:oleObj>
-              </mc:Choice>
-              <mc:Fallback>
-                <p:oleObj name="Equation" r:id="rId6" imgW="152268" imgH="203024" progId="Equation.DSMT4">
-                  <p:embed/>
-                  <p:pic>
-                    <p:nvPicPr>
-                      <p:cNvPr id="0" name=""/>
-                      <p:cNvPicPr>
-                        <a:picLocks noChangeAspect="1" noChangeArrowheads="1"/>
-                      </p:cNvPicPr>
-                      <p:nvPr/>
-                    </p:nvPicPr>
-                    <p:blipFill>
-                      <a:blip r:embed="rId7">
-                        <a:extLst>
-                          <a:ext uri="{28A0092B-C50C-407E-A947-70E740481C1C}">
-                            <a14:useLocalDpi xmlns:a14="http://schemas.microsoft.com/office/drawing/2010/main" val="0"/>
-                          </a:ext>
-                        </a:extLst>
-                      </a:blip>
-                      <a:srcRect/>
-                      <a:stretch>
-                        <a:fillRect/>
-                      </a:stretch>
-                    </p:blipFill>
-                    <p:spPr bwMode="auto">
-                      <a:xfrm>
-                        <a:off x="3566993" y="4590596"/>
-                        <a:ext cx="381000" cy="508000"/>
-                      </a:xfrm>
-                      <a:prstGeom prst="rect">
-                        <a:avLst/>
-                      </a:prstGeom>
-                      <a:noFill/>
-                      <a:ln>
-                        <a:noFill/>
-                      </a:ln>
-                      <a:effectLst/>
-                      <a:extLst>
-                        <a:ext uri="{909E8E84-426E-40DD-AFC4-6F175D3DCCD1}">
-                          <a14:hiddenFill xmlns:a14="http://schemas.microsoft.com/office/drawing/2010/main">
-                            <a:solidFill>
-                              <a:srgbClr val="FFFFFF"/>
-                            </a:solidFill>
-                          </a14:hiddenFill>
-                        </a:ext>
-                        <a:ext uri="{91240B29-F687-4F45-9708-019B960494DF}">
-                          <a14:hiddenLine xmlns:a14="http://schemas.microsoft.com/office/drawing/2010/main" w="9525">
-                            <a:solidFill>
-                              <a:srgbClr val="000000"/>
-                            </a:solidFill>
-                            <a:miter lim="800000"/>
-                            <a:headEnd/>
-                            <a:tailEnd/>
-                          </a14:hiddenLine>
-                        </a:ext>
-                        <a:ext uri="{AF507438-7753-43E0-B8FC-AC1667EBCBE1}">
-                          <a14:hiddenEffects xmlns:a14="http://schemas.microsoft.com/office/drawing/2010/main">
-                            <a:effectLst>
-                              <a:outerShdw dist="35921" dir="2700000" algn="ctr" rotWithShape="0">
-                                <a:srgbClr val="808080"/>
-                              </a:outerShdw>
-                            </a:effectLst>
-                          </a14:hiddenEffects>
-                        </a:ext>
-                      </a:extLst>
-                    </p:spPr>
-                  </p:pic>
-                </p:oleObj>
-              </mc:Fallback>
-            </mc:AlternateContent>
-          </a:graphicData>
-        </a:graphic>
-      </p:graphicFrame>
       <p:sp>
         <p:nvSpPr>
           <p:cNvPr id="9" name="Text Box 4"/>
@@ -9934,6 +9603,37 @@
               <a:t>for numerical optimizers</a:t>
             </a:r>
             <a:endParaRPr lang="en-AU" altLang="en-US" dirty="0"/>
+          </a:p>
+        </p:txBody>
+      </p:sp>
+      <p:sp>
+        <p:nvSpPr>
+          <p:cNvPr id="328711" name="TextBox 328710"/>
+          <p:cNvSpPr txBox="1"/>
+          <p:nvPr/>
+        </p:nvSpPr>
+        <p:spPr>
+          <a:xfrm>
+            <a:off x="1626825" y="3523796"/>
+            <a:ext cx="4360984" cy="406400"/>
+          </a:xfrm>
+          <a:prstGeom prst="rect">
+            <a:avLst/>
+          </a:prstGeom>
+          <a:noFill/>
+        </p:spPr>
+        <p:txBody>
+          <a:bodyPr wrap="square" anchor="ctr" lIns="0" rIns="0" tIns="0" bIns="0">
+            <a:spAutoFit/>
+          </a:bodyPr>
+          <a:lstStyle/>
+          <a:p>
+            <a:r>
+              <a:rPr sz="1900">
+                <a:latin typeface="Cambria"/>
+              </a:rPr>
+              <a:t>−ln L = −30 ln p − 20 ln(1 − p)</a:t>
+            </a:r>
           </a:p>
         </p:txBody>
       </p:sp>
@@ -10777,10 +10477,8 @@
               <a:t>mean blow rate for males be </a:t>
             </a:r>
             <a:r>
-              <a:rPr lang="en-AU" altLang="en-US" dirty="0">
-                <a:sym typeface="Symbol" charset="2"/>
-              </a:rPr>
-              <a:t></a:t>
+              <a:rPr lang="en-AU" altLang="en-US" dirty="0"/>
+              <a:t> λ</a:t>
             </a:r>
             <a:r>
               <a:rPr lang="en-AU" altLang="en-US" baseline="-25000" dirty="0">
@@ -10793,10 +10491,8 @@
               <a:t> and that for females be </a:t>
             </a:r>
             <a:r>
-              <a:rPr lang="en-AU" altLang="en-US" dirty="0">
-                <a:sym typeface="Symbol" charset="2"/>
-              </a:rPr>
-              <a:t></a:t>
+              <a:rPr lang="en-AU" altLang="en-US" dirty="0"/>
+              <a:t>λ</a:t>
             </a:r>
             <a:r>
               <a:rPr lang="en-AU" altLang="en-US" baseline="-25000" dirty="0">
@@ -10836,106 +10532,6 @@
           </a:p>
         </p:txBody>
       </p:sp>
-      <p:graphicFrame>
-        <p:nvGraphicFramePr>
-          <p:cNvPr id="338947" name="Object 5"/>
-          <p:cNvGraphicFramePr>
-            <a:graphicFrameLocks noGrp="1" noChangeAspect="1"/>
-          </p:cNvGraphicFramePr>
-          <p:nvPr>
-            <p:ph sz="half" idx="1"/>
-            <p:extLst>
-              <p:ext uri="{D42A27DB-BD31-4B8C-83A1-F6EECF244321}">
-                <p14:modId xmlns:p14="http://schemas.microsoft.com/office/powerpoint/2010/main" val="723641395"/>
-              </p:ext>
-            </p:extLst>
-          </p:nvPr>
-        </p:nvGraphicFramePr>
-        <p:xfrm>
-          <a:off x="4666861" y="2415074"/>
-          <a:ext cx="2058988" cy="838200"/>
-        </p:xfrm>
-        <a:graphic>
-          <a:graphicData uri="http://schemas.openxmlformats.org/presentationml/2006/ole">
-            <mc:AlternateContent xmlns:mc="http://schemas.openxmlformats.org/markup-compatibility/2006">
-              <mc:Choice xmlns:v="urn:schemas-microsoft-com:vml" Requires="v">
-                <p:oleObj name="Equation" r:id="rId3" imgW="1028700" imgH="419100" progId="Equation.DSMT4">
-                  <p:embed/>
-                </p:oleObj>
-              </mc:Choice>
-              <mc:Fallback>
-                <p:oleObj name="Equation" r:id="rId3" imgW="1028700" imgH="419100" progId="Equation.DSMT4">
-                  <p:embed/>
-                  <p:pic>
-                    <p:nvPicPr>
-                      <p:cNvPr id="0" name=""/>
-                      <p:cNvPicPr>
-                        <a:picLocks noChangeAspect="1" noChangeArrowheads="1"/>
-                      </p:cNvPicPr>
-                      <p:nvPr/>
-                    </p:nvPicPr>
-                    <p:blipFill>
-                      <a:blip r:embed="rId4">
-                        <a:extLst>
-                          <a:ext uri="{28A0092B-C50C-407E-A947-70E740481C1C}">
-                            <a14:useLocalDpi xmlns:a14="http://schemas.microsoft.com/office/drawing/2010/main" val="0"/>
-                          </a:ext>
-                        </a:extLst>
-                      </a:blip>
-                      <a:srcRect/>
-                      <a:stretch>
-                        <a:fillRect/>
-                      </a:stretch>
-                    </p:blipFill>
-                    <p:spPr bwMode="auto">
-                      <a:xfrm>
-                        <a:off x="4666861" y="2415074"/>
-                        <a:ext cx="2058988" cy="838200"/>
-                      </a:xfrm>
-                      <a:prstGeom prst="rect">
-                        <a:avLst/>
-                      </a:prstGeom>
-                      <a:noFill/>
-                      <a:ln>
-                        <a:noFill/>
-                      </a:ln>
-                      <a:effectLst/>
-                      <a:extLst>
-                        <a:ext uri="{909E8E84-426E-40DD-AFC4-6F175D3DCCD1}">
-                          <a14:hiddenFill xmlns:a14="http://schemas.microsoft.com/office/drawing/2010/main">
-                            <a:solidFill>
-                              <a:srgbClr val="FFFFFF"/>
-                            </a:solidFill>
-                          </a14:hiddenFill>
-                        </a:ext>
-                        <a:ext uri="{91240B29-F687-4F45-9708-019B960494DF}">
-                          <a14:hiddenLine xmlns:a14="http://schemas.microsoft.com/office/drawing/2010/main" w="9525">
-                            <a:solidFill>
-                              <a:srgbClr val="000000"/>
-                            </a:solidFill>
-                            <a:miter lim="800000"/>
-                            <a:headEnd/>
-                            <a:tailEnd/>
-                          </a14:hiddenLine>
-                        </a:ext>
-                        <a:ext uri="{AF507438-7753-43E0-B8FC-AC1667EBCBE1}">
-                          <a14:hiddenEffects xmlns:a14="http://schemas.microsoft.com/office/drawing/2010/main">
-                            <a:effectLst>
-                              <a:outerShdw dist="35921" dir="2700000" algn="ctr" rotWithShape="0">
-                                <a:srgbClr val="808080"/>
-                              </a:outerShdw>
-                            </a:effectLst>
-                          </a14:hiddenEffects>
-                        </a:ext>
-                      </a:extLst>
-                    </p:spPr>
-                  </p:pic>
-                </p:oleObj>
-              </mc:Fallback>
-            </mc:AlternateContent>
-          </a:graphicData>
-        </a:graphic>
-      </p:graphicFrame>
       <p:sp>
         <p:nvSpPr>
           <p:cNvPr id="7173" name="Text Box 4"/>
@@ -11101,106 +10697,6 @@
           </a:p>
         </p:txBody>
       </p:sp>
-      <p:graphicFrame>
-        <p:nvGraphicFramePr>
-          <p:cNvPr id="338949" name="Object 8"/>
-          <p:cNvGraphicFramePr>
-            <a:graphicFrameLocks noGrp="1" noChangeAspect="1"/>
-          </p:cNvGraphicFramePr>
-          <p:nvPr>
-            <p:ph sz="half" idx="2"/>
-            <p:extLst>
-              <p:ext uri="{D42A27DB-BD31-4B8C-83A1-F6EECF244321}">
-                <p14:modId xmlns:p14="http://schemas.microsoft.com/office/powerpoint/2010/main" val="1041032804"/>
-              </p:ext>
-            </p:extLst>
-          </p:nvPr>
-        </p:nvGraphicFramePr>
-        <p:xfrm>
-          <a:off x="3174611" y="4701075"/>
-          <a:ext cx="4984750" cy="835025"/>
-        </p:xfrm>
-        <a:graphic>
-          <a:graphicData uri="http://schemas.openxmlformats.org/presentationml/2006/ole">
-            <mc:AlternateContent xmlns:mc="http://schemas.openxmlformats.org/markup-compatibility/2006">
-              <mc:Choice xmlns:v="urn:schemas-microsoft-com:vml" Requires="v">
-                <p:oleObj name="Equation" r:id="rId5" imgW="2501900" imgH="419100" progId="Equation.DSMT4">
-                  <p:embed/>
-                </p:oleObj>
-              </mc:Choice>
-              <mc:Fallback>
-                <p:oleObj name="Equation" r:id="rId5" imgW="2501900" imgH="419100" progId="Equation.DSMT4">
-                  <p:embed/>
-                  <p:pic>
-                    <p:nvPicPr>
-                      <p:cNvPr id="0" name=""/>
-                      <p:cNvPicPr>
-                        <a:picLocks noChangeAspect="1" noChangeArrowheads="1"/>
-                      </p:cNvPicPr>
-                      <p:nvPr/>
-                    </p:nvPicPr>
-                    <p:blipFill>
-                      <a:blip r:embed="rId6">
-                        <a:extLst>
-                          <a:ext uri="{28A0092B-C50C-407E-A947-70E740481C1C}">
-                            <a14:useLocalDpi xmlns:a14="http://schemas.microsoft.com/office/drawing/2010/main" val="0"/>
-                          </a:ext>
-                        </a:extLst>
-                      </a:blip>
-                      <a:srcRect/>
-                      <a:stretch>
-                        <a:fillRect/>
-                      </a:stretch>
-                    </p:blipFill>
-                    <p:spPr bwMode="auto">
-                      <a:xfrm>
-                        <a:off x="3174611" y="4701075"/>
-                        <a:ext cx="4984750" cy="835025"/>
-                      </a:xfrm>
-                      <a:prstGeom prst="rect">
-                        <a:avLst/>
-                      </a:prstGeom>
-                      <a:noFill/>
-                      <a:ln>
-                        <a:noFill/>
-                      </a:ln>
-                      <a:effectLst/>
-                      <a:extLst>
-                        <a:ext uri="{909E8E84-426E-40DD-AFC4-6F175D3DCCD1}">
-                          <a14:hiddenFill xmlns:a14="http://schemas.microsoft.com/office/drawing/2010/main">
-                            <a:solidFill>
-                              <a:srgbClr val="FFFFFF"/>
-                            </a:solidFill>
-                          </a14:hiddenFill>
-                        </a:ext>
-                        <a:ext uri="{91240B29-F687-4F45-9708-019B960494DF}">
-                          <a14:hiddenLine xmlns:a14="http://schemas.microsoft.com/office/drawing/2010/main" w="9525">
-                            <a:solidFill>
-                              <a:srgbClr val="000000"/>
-                            </a:solidFill>
-                            <a:miter lim="800000"/>
-                            <a:headEnd/>
-                            <a:tailEnd/>
-                          </a14:hiddenLine>
-                        </a:ext>
-                        <a:ext uri="{AF507438-7753-43E0-B8FC-AC1667EBCBE1}">
-                          <a14:hiddenEffects xmlns:a14="http://schemas.microsoft.com/office/drawing/2010/main">
-                            <a:effectLst>
-                              <a:outerShdw dist="35921" dir="2700000" algn="ctr" rotWithShape="0">
-                                <a:srgbClr val="808080"/>
-                              </a:outerShdw>
-                            </a:effectLst>
-                          </a14:hiddenEffects>
-                        </a:ext>
-                      </a:extLst>
-                    </p:spPr>
-                  </p:pic>
-                </p:oleObj>
-              </mc:Fallback>
-            </mc:AlternateContent>
-          </a:graphicData>
-        </a:graphic>
-      </p:graphicFrame>
       <p:sp>
         <p:nvSpPr>
           <p:cNvPr id="7175" name="Slide Number Placeholder 1"/>
@@ -11628,6 +11124,164 @@
             <a:r>
               <a:rPr lang="en-AU" altLang="en-US" dirty="0"/>
               <a:t>How would you do this with linear models?</a:t>
+            </a:r>
+          </a:p>
+        </p:txBody>
+      </p:sp>
+      <p:sp>
+        <p:nvSpPr>
+          <p:cNvPr id="338950" name="TextBox 338949"/>
+          <p:cNvSpPr txBox="1"/>
+          <p:nvPr/>
+        </p:nvSpPr>
+        <p:spPr>
+          <a:xfrm>
+            <a:off x="4666861" y="2415074"/>
+            <a:ext cx="3657600" cy="838200"/>
+          </a:xfrm>
+          <a:prstGeom prst="rect">
+            <a:avLst/>
+          </a:prstGeom>
+          <a:noFill/>
+        </p:spPr>
+        <p:txBody>
+          <a:bodyPr wrap="square" anchor="ctr" lIns="0" rIns="0" tIns="0" bIns="0">
+            <a:spAutoFit/>
+          </a:bodyPr>
+          <a:lstStyle/>
+          <a:p>
+            <a:r>
+              <a:rPr sz="2000">
+                <a:latin typeface="Cambria"/>
+              </a:rPr>
+              <a:t>P(x | λ) = λ</a:t>
+            </a:r>
+            <a:r>
+              <a:rPr sz="2000" baseline="30000">
+                <a:latin typeface="Cambria"/>
+              </a:rPr>
+              <a:t>x</a:t>
+            </a:r>
+            <a:r>
+              <a:rPr sz="2000">
+                <a:latin typeface="Cambria"/>
+              </a:rPr>
+              <a:t> exp(−λ) / x!</a:t>
+            </a:r>
+          </a:p>
+        </p:txBody>
+      </p:sp>
+      <p:sp>
+        <p:nvSpPr>
+          <p:cNvPr id="338951" name="TextBox 338950"/>
+          <p:cNvSpPr txBox="1"/>
+          <p:nvPr/>
+        </p:nvSpPr>
+        <p:spPr>
+          <a:xfrm>
+            <a:off x="3174611" y="4701075"/>
+            <a:ext cx="8834509" cy="835025"/>
+          </a:xfrm>
+          <a:prstGeom prst="rect">
+            <a:avLst/>
+          </a:prstGeom>
+          <a:noFill/>
+        </p:spPr>
+        <p:txBody>
+          <a:bodyPr wrap="square" anchor="ctr" lIns="0" rIns="0" tIns="0" bIns="0">
+            <a:spAutoFit/>
+          </a:bodyPr>
+          <a:lstStyle/>
+          <a:p>
+            <a:r>
+              <a:rPr sz="1900">
+                <a:latin typeface="Cambria"/>
+              </a:rPr>
+              <a:t>P(x | p, λ</a:t>
+            </a:r>
+            <a:r>
+              <a:rPr sz="1900" baseline="-25000">
+                <a:latin typeface="Cambria"/>
+              </a:rPr>
+              <a:t>1</a:t>
+            </a:r>
+            <a:r>
+              <a:rPr sz="1900">
+                <a:latin typeface="Cambria"/>
+              </a:rPr>
+              <a:t>, λ</a:t>
+            </a:r>
+            <a:r>
+              <a:rPr sz="1900" baseline="-25000">
+                <a:latin typeface="Cambria"/>
+              </a:rPr>
+              <a:t>2</a:t>
+            </a:r>
+            <a:r>
+              <a:rPr sz="1900">
+                <a:latin typeface="Cambria"/>
+              </a:rPr>
+              <a:t>) = p λ</a:t>
+            </a:r>
+            <a:r>
+              <a:rPr sz="1900" baseline="-25000">
+                <a:latin typeface="Cambria"/>
+              </a:rPr>
+              <a:t>1</a:t>
+            </a:r>
+            <a:r>
+              <a:rPr sz="1900" baseline="30000">
+                <a:latin typeface="Cambria"/>
+              </a:rPr>
+              <a:t>x</a:t>
+            </a:r>
+            <a:r>
+              <a:rPr sz="1900">
+                <a:latin typeface="Cambria"/>
+              </a:rPr>
+              <a:t> exp(−λ</a:t>
+            </a:r>
+            <a:r>
+              <a:rPr sz="1900" baseline="-25000">
+                <a:latin typeface="Cambria"/>
+              </a:rPr>
+              <a:t>1</a:t>
+            </a:r>
+            <a:r>
+              <a:rPr sz="1900">
+                <a:latin typeface="Cambria"/>
+              </a:rPr>
+              <a:t>) / x! + (1 − p) λ</a:t>
+            </a:r>
+            <a:r>
+              <a:rPr sz="1900" baseline="-25000">
+                <a:latin typeface="Cambria"/>
+              </a:rPr>
+              <a:t>2</a:t>
+            </a:r>
+            <a:r>
+              <a:rPr sz="1900" baseline="30000">
+                <a:latin typeface="Cambria"/>
+              </a:rPr>
+              <a:t>x</a:t>
+            </a:r>
+            <a:r>
+              <a:rPr sz="1900">
+                <a:latin typeface="Cambria"/>
+              </a:rPr>
+              <a:t> exp(−λ</a:t>
+            </a:r>
+            <a:r>
+              <a:rPr sz="1900" baseline="-25000">
+                <a:latin typeface="Cambria"/>
+              </a:rPr>
+              <a:t>2</a:t>
+            </a:r>
+            <a:r>
+              <a:rPr sz="1900">
+                <a:latin typeface="Cambria"/>
+              </a:rPr>
+              <a:t>) / x!</a:t>
             </a:r>
           </a:p>
         </p:txBody>
@@ -11701,10 +11355,8 @@
               <a:t>is</a:t>
             </a:r>
             <a:r>
-              <a:rPr lang="en-AU" dirty="0" err="1">
-                <a:sym typeface="Symbol"/>
-              </a:rPr>
-              <a:t></a:t>
+              <a:rPr lang="en-AU" dirty="0" err="1"/>
+              <a:t> </a:t>
             </a:r>
             <a:r>
               <a:rPr lang="en-AU" i="1" dirty="0" err="1">
@@ -11940,106 +11592,6 @@
           <a:chExt cx="0" cy="0"/>
         </a:xfrm>
       </p:grpSpPr>
-      <p:graphicFrame>
-        <p:nvGraphicFramePr>
-          <p:cNvPr id="343042" name="Object 5"/>
-          <p:cNvGraphicFramePr>
-            <a:graphicFrameLocks noGrp="1" noChangeAspect="1"/>
-          </p:cNvGraphicFramePr>
-          <p:nvPr>
-            <p:ph sz="half" idx="1"/>
-            <p:extLst>
-              <p:ext uri="{D42A27DB-BD31-4B8C-83A1-F6EECF244321}">
-                <p14:modId xmlns:p14="http://schemas.microsoft.com/office/powerpoint/2010/main" val="1375761377"/>
-              </p:ext>
-            </p:extLst>
-          </p:nvPr>
-        </p:nvGraphicFramePr>
-        <p:xfrm>
-          <a:off x="3161717" y="2354425"/>
-          <a:ext cx="5816600" cy="965200"/>
-        </p:xfrm>
-        <a:graphic>
-          <a:graphicData uri="http://schemas.openxmlformats.org/presentationml/2006/ole">
-            <mc:AlternateContent xmlns:mc="http://schemas.openxmlformats.org/markup-compatibility/2006">
-              <mc:Choice xmlns:v="urn:schemas-microsoft-com:vml" Requires="v">
-                <p:oleObj name="Equation" r:id="rId3" imgW="2908300" imgH="482600" progId="Equation.DSMT4">
-                  <p:embed/>
-                </p:oleObj>
-              </mc:Choice>
-              <mc:Fallback>
-                <p:oleObj name="Equation" r:id="rId3" imgW="2908300" imgH="482600" progId="Equation.DSMT4">
-                  <p:embed/>
-                  <p:pic>
-                    <p:nvPicPr>
-                      <p:cNvPr id="0" name=""/>
-                      <p:cNvPicPr>
-                        <a:picLocks noChangeAspect="1" noChangeArrowheads="1"/>
-                      </p:cNvPicPr>
-                      <p:nvPr/>
-                    </p:nvPicPr>
-                    <p:blipFill>
-                      <a:blip r:embed="rId4">
-                        <a:extLst>
-                          <a:ext uri="{28A0092B-C50C-407E-A947-70E740481C1C}">
-                            <a14:useLocalDpi xmlns:a14="http://schemas.microsoft.com/office/drawing/2010/main" val="0"/>
-                          </a:ext>
-                        </a:extLst>
-                      </a:blip>
-                      <a:srcRect/>
-                      <a:stretch>
-                        <a:fillRect/>
-                      </a:stretch>
-                    </p:blipFill>
-                    <p:spPr bwMode="auto">
-                      <a:xfrm>
-                        <a:off x="3161717" y="2354425"/>
-                        <a:ext cx="5816600" cy="965200"/>
-                      </a:xfrm>
-                      <a:prstGeom prst="rect">
-                        <a:avLst/>
-                      </a:prstGeom>
-                      <a:noFill/>
-                      <a:ln>
-                        <a:noFill/>
-                      </a:ln>
-                      <a:effectLst/>
-                      <a:extLst>
-                        <a:ext uri="{909E8E84-426E-40DD-AFC4-6F175D3DCCD1}">
-                          <a14:hiddenFill xmlns:a14="http://schemas.microsoft.com/office/drawing/2010/main">
-                            <a:solidFill>
-                              <a:srgbClr val="FFFFFF"/>
-                            </a:solidFill>
-                          </a14:hiddenFill>
-                        </a:ext>
-                        <a:ext uri="{91240B29-F687-4F45-9708-019B960494DF}">
-                          <a14:hiddenLine xmlns:a14="http://schemas.microsoft.com/office/drawing/2010/main" w="9525">
-                            <a:solidFill>
-                              <a:srgbClr val="000000"/>
-                            </a:solidFill>
-                            <a:miter lim="800000"/>
-                            <a:headEnd/>
-                            <a:tailEnd/>
-                          </a14:hiddenLine>
-                        </a:ext>
-                        <a:ext uri="{AF507438-7753-43E0-B8FC-AC1667EBCBE1}">
-                          <a14:hiddenEffects xmlns:a14="http://schemas.microsoft.com/office/drawing/2010/main">
-                            <a:effectLst>
-                              <a:outerShdw dist="35921" dir="2700000" algn="ctr" rotWithShape="0">
-                                <a:srgbClr val="808080"/>
-                              </a:outerShdw>
-                            </a:effectLst>
-                          </a14:hiddenEffects>
-                        </a:ext>
-                      </a:extLst>
-                    </p:spPr>
-                  </p:pic>
-                </p:oleObj>
-              </mc:Fallback>
-            </mc:AlternateContent>
-          </a:graphicData>
-        </a:graphic>
-      </p:graphicFrame>
       <p:sp>
         <p:nvSpPr>
           <p:cNvPr id="9220" name="Text Box 4"/>
@@ -12395,106 +11947,6 @@
           </a:p>
         </p:txBody>
       </p:sp>
-      <p:graphicFrame>
-        <p:nvGraphicFramePr>
-          <p:cNvPr id="343045" name="Object 8"/>
-          <p:cNvGraphicFramePr>
-            <a:graphicFrameLocks noGrp="1" noChangeAspect="1"/>
-          </p:cNvGraphicFramePr>
-          <p:nvPr>
-            <p:ph sz="half" idx="2"/>
-            <p:extLst>
-              <p:ext uri="{D42A27DB-BD31-4B8C-83A1-F6EECF244321}">
-                <p14:modId xmlns:p14="http://schemas.microsoft.com/office/powerpoint/2010/main" val="465035990"/>
-              </p:ext>
-            </p:extLst>
-          </p:nvPr>
-        </p:nvGraphicFramePr>
-        <p:xfrm>
-          <a:off x="4904792" y="4259425"/>
-          <a:ext cx="2058988" cy="838200"/>
-        </p:xfrm>
-        <a:graphic>
-          <a:graphicData uri="http://schemas.openxmlformats.org/presentationml/2006/ole">
-            <mc:AlternateContent xmlns:mc="http://schemas.openxmlformats.org/markup-compatibility/2006">
-              <mc:Choice xmlns:v="urn:schemas-microsoft-com:vml" Requires="v">
-                <p:oleObj name="Equation" r:id="rId5" imgW="1028700" imgH="419100" progId="Equation.DSMT4">
-                  <p:embed/>
-                </p:oleObj>
-              </mc:Choice>
-              <mc:Fallback>
-                <p:oleObj name="Equation" r:id="rId5" imgW="1028700" imgH="419100" progId="Equation.DSMT4">
-                  <p:embed/>
-                  <p:pic>
-                    <p:nvPicPr>
-                      <p:cNvPr id="0" name=""/>
-                      <p:cNvPicPr>
-                        <a:picLocks noChangeAspect="1" noChangeArrowheads="1"/>
-                      </p:cNvPicPr>
-                      <p:nvPr/>
-                    </p:nvPicPr>
-                    <p:blipFill>
-                      <a:blip r:embed="rId6">
-                        <a:extLst>
-                          <a:ext uri="{28A0092B-C50C-407E-A947-70E740481C1C}">
-                            <a14:useLocalDpi xmlns:a14="http://schemas.microsoft.com/office/drawing/2010/main" val="0"/>
-                          </a:ext>
-                        </a:extLst>
-                      </a:blip>
-                      <a:srcRect/>
-                      <a:stretch>
-                        <a:fillRect/>
-                      </a:stretch>
-                    </p:blipFill>
-                    <p:spPr bwMode="auto">
-                      <a:xfrm>
-                        <a:off x="4904792" y="4259425"/>
-                        <a:ext cx="2058988" cy="838200"/>
-                      </a:xfrm>
-                      <a:prstGeom prst="rect">
-                        <a:avLst/>
-                      </a:prstGeom>
-                      <a:noFill/>
-                      <a:ln>
-                        <a:noFill/>
-                      </a:ln>
-                      <a:effectLst/>
-                      <a:extLst>
-                        <a:ext uri="{909E8E84-426E-40DD-AFC4-6F175D3DCCD1}">
-                          <a14:hiddenFill xmlns:a14="http://schemas.microsoft.com/office/drawing/2010/main">
-                            <a:solidFill>
-                              <a:srgbClr val="FFFFFF"/>
-                            </a:solidFill>
-                          </a14:hiddenFill>
-                        </a:ext>
-                        <a:ext uri="{91240B29-F687-4F45-9708-019B960494DF}">
-                          <a14:hiddenLine xmlns:a14="http://schemas.microsoft.com/office/drawing/2010/main" w="9525">
-                            <a:solidFill>
-                              <a:srgbClr val="000000"/>
-                            </a:solidFill>
-                            <a:miter lim="800000"/>
-                            <a:headEnd/>
-                            <a:tailEnd/>
-                          </a14:hiddenLine>
-                        </a:ext>
-                        <a:ext uri="{AF507438-7753-43E0-B8FC-AC1667EBCBE1}">
-                          <a14:hiddenEffects xmlns:a14="http://schemas.microsoft.com/office/drawing/2010/main">
-                            <a:effectLst>
-                              <a:outerShdw dist="35921" dir="2700000" algn="ctr" rotWithShape="0">
-                                <a:srgbClr val="808080"/>
-                              </a:outerShdw>
-                            </a:effectLst>
-                          </a14:hiddenEffects>
-                        </a:ext>
-                      </a:extLst>
-                    </p:spPr>
-                  </p:pic>
-                </p:oleObj>
-              </mc:Fallback>
-            </mc:AlternateContent>
-          </a:graphicData>
-        </a:graphic>
-      </p:graphicFrame>
       <p:sp>
         <p:nvSpPr>
           <p:cNvPr id="9223" name="Slide Number Placeholder 1"/>
@@ -12632,6 +12084,200 @@
               <a:t>18</a:t>
             </a:fld>
             <a:endParaRPr lang="en-US" altLang="en-US" sz="1400"/>
+          </a:p>
+        </p:txBody>
+      </p:sp>
+      <p:sp>
+        <p:nvSpPr>
+          <p:cNvPr id="343046" name="TextBox 343045"/>
+          <p:cNvSpPr txBox="1"/>
+          <p:nvPr/>
+        </p:nvSpPr>
+        <p:spPr>
+          <a:xfrm>
+            <a:off x="3161717" y="2354425"/>
+            <a:ext cx="8847403" cy="965200"/>
+          </a:xfrm>
+          <a:prstGeom prst="rect">
+            <a:avLst/>
+          </a:prstGeom>
+          <a:noFill/>
+        </p:spPr>
+        <p:txBody>
+          <a:bodyPr wrap="square" anchor="ctr" lIns="0" rIns="0" tIns="0" bIns="0">
+            <a:spAutoFit/>
+          </a:bodyPr>
+          <a:lstStyle/>
+          <a:p>
+            <a:r>
+              <a:rPr sz="1600">
+                <a:latin typeface="Cambria"/>
+              </a:rPr>
+              <a:t>P(x | p, λ</a:t>
+            </a:r>
+            <a:r>
+              <a:rPr sz="1600" baseline="-25000">
+                <a:latin typeface="Cambria"/>
+              </a:rPr>
+              <a:t>1</a:t>
+            </a:r>
+            <a:r>
+              <a:rPr sz="1600">
+                <a:latin typeface="Cambria"/>
+              </a:rPr>
+              <a:t>, λ</a:t>
+            </a:r>
+            <a:r>
+              <a:rPr sz="1600" baseline="-25000">
+                <a:latin typeface="Cambria"/>
+              </a:rPr>
+              <a:t>2</a:t>
+            </a:r>
+            <a:r>
+              <a:rPr sz="1600">
+                <a:latin typeface="Cambria"/>
+              </a:rPr>
+              <a:t>) = ∏</a:t>
+            </a:r>
+            <a:r>
+              <a:rPr sz="1600" baseline="-25000">
+                <a:latin typeface="Cambria"/>
+              </a:rPr>
+              <a:t>i</a:t>
+            </a:r>
+            <a:r>
+              <a:rPr sz="1600">
+                <a:latin typeface="Cambria"/>
+              </a:rPr>
+              <a:t> ( p λ</a:t>
+            </a:r>
+            <a:r>
+              <a:rPr sz="1600" baseline="-25000">
+                <a:latin typeface="Cambria"/>
+              </a:rPr>
+              <a:t>1</a:t>
+            </a:r>
+            <a:r>
+              <a:rPr sz="1600" baseline="30000">
+                <a:latin typeface="Cambria"/>
+              </a:rPr>
+              <a:t>xᵢ</a:t>
+            </a:r>
+            <a:r>
+              <a:rPr sz="1600">
+                <a:latin typeface="Cambria"/>
+              </a:rPr>
+              <a:t> exp(−λ</a:t>
+            </a:r>
+            <a:r>
+              <a:rPr sz="1600" baseline="-25000">
+                <a:latin typeface="Cambria"/>
+              </a:rPr>
+              <a:t>1</a:t>
+            </a:r>
+            <a:r>
+              <a:rPr sz="1600">
+                <a:latin typeface="Cambria"/>
+              </a:rPr>
+              <a:t>) / x</a:t>
+            </a:r>
+            <a:r>
+              <a:rPr sz="1600" baseline="-25000">
+                <a:latin typeface="Cambria"/>
+              </a:rPr>
+              <a:t>i</a:t>
+            </a:r>
+            <a:r>
+              <a:rPr sz="1600">
+                <a:latin typeface="Cambria"/>
+              </a:rPr>
+              <a:t>! + (1 − p) λ</a:t>
+            </a:r>
+            <a:r>
+              <a:rPr sz="1600" baseline="-25000">
+                <a:latin typeface="Cambria"/>
+              </a:rPr>
+              <a:t>2</a:t>
+            </a:r>
+            <a:r>
+              <a:rPr sz="1600" baseline="30000">
+                <a:latin typeface="Cambria"/>
+              </a:rPr>
+              <a:t>xᵢ</a:t>
+            </a:r>
+            <a:r>
+              <a:rPr sz="1600">
+                <a:latin typeface="Cambria"/>
+              </a:rPr>
+              <a:t> exp(−λ</a:t>
+            </a:r>
+            <a:r>
+              <a:rPr sz="1600" baseline="-25000">
+                <a:latin typeface="Cambria"/>
+              </a:rPr>
+              <a:t>2</a:t>
+            </a:r>
+            <a:r>
+              <a:rPr sz="1600">
+                <a:latin typeface="Cambria"/>
+              </a:rPr>
+              <a:t>) / x</a:t>
+            </a:r>
+            <a:r>
+              <a:rPr sz="1600" baseline="-25000">
+                <a:latin typeface="Cambria"/>
+              </a:rPr>
+              <a:t>i</a:t>
+            </a:r>
+            <a:r>
+              <a:rPr sz="1600">
+                <a:latin typeface="Cambria"/>
+              </a:rPr>
+              <a:t>! )</a:t>
+            </a:r>
+          </a:p>
+        </p:txBody>
+      </p:sp>
+      <p:sp>
+        <p:nvSpPr>
+          <p:cNvPr id="343047" name="TextBox 343046"/>
+          <p:cNvSpPr txBox="1"/>
+          <p:nvPr/>
+        </p:nvSpPr>
+        <p:spPr>
+          <a:xfrm>
+            <a:off x="4904792" y="4259425"/>
+            <a:ext cx="3657600" cy="838200"/>
+          </a:xfrm>
+          <a:prstGeom prst="rect">
+            <a:avLst/>
+          </a:prstGeom>
+          <a:noFill/>
+        </p:spPr>
+        <p:txBody>
+          <a:bodyPr wrap="square" anchor="ctr" lIns="0" rIns="0" tIns="0" bIns="0">
+            <a:spAutoFit/>
+          </a:bodyPr>
+          <a:lstStyle/>
+          <a:p>
+            <a:r>
+              <a:rPr sz="2000">
+                <a:latin typeface="Cambria"/>
+              </a:rPr>
+              <a:t>P(x | λ) = λ</a:t>
+            </a:r>
+            <a:r>
+              <a:rPr sz="2000" baseline="30000">
+                <a:latin typeface="Cambria"/>
+              </a:rPr>
+              <a:t>x</a:t>
+            </a:r>
+            <a:r>
+              <a:rPr sz="2000">
+                <a:latin typeface="Cambria"/>
+              </a:rPr>
+              <a:t> exp(−λ) / x!</a:t>
+            </a:r>
           </a:p>
         </p:txBody>
       </p:sp>
@@ -19025,9 +18671,8 @@
                 <a:solidFill>
                   <a:srgbClr val="000000"/>
                 </a:solidFill>
-                <a:sym typeface="Symbol" charset="2"/>
               </a:rPr>
-              <a:t></a:t>
+              <a:t> λ</a:t>
             </a:r>
             <a:r>
               <a:rPr lang="en-AU" altLang="en-US" baseline="-25000" dirty="0">
@@ -19051,9 +18696,8 @@
                 <a:solidFill>
                   <a:srgbClr val="000000"/>
                 </a:solidFill>
-                <a:sym typeface="Symbol" charset="2"/>
               </a:rPr>
-              <a:t></a:t>
+              <a:t>λ</a:t>
             </a:r>
             <a:r>
               <a:rPr lang="en-AU" altLang="en-US" baseline="-25000" dirty="0">
@@ -19108,101 +18752,6 @@
           </a:p>
         </p:txBody>
       </p:sp>
-      <p:graphicFrame>
-        <p:nvGraphicFramePr>
-          <p:cNvPr id="32770" name="Object 5"/>
-          <p:cNvGraphicFramePr>
-            <a:graphicFrameLocks noGrp="1" noChangeAspect="1"/>
-          </p:cNvGraphicFramePr>
-          <p:nvPr>
-            <p:ph sz="half" idx="1"/>
-          </p:nvPr>
-        </p:nvGraphicFramePr>
-        <p:xfrm>
-          <a:off x="5105400" y="1752600"/>
-          <a:ext cx="2058988" cy="838200"/>
-        </p:xfrm>
-        <a:graphic>
-          <a:graphicData uri="http://schemas.openxmlformats.org/presentationml/2006/ole">
-            <mc:AlternateContent xmlns:mc="http://schemas.openxmlformats.org/markup-compatibility/2006">
-              <mc:Choice xmlns:v="urn:schemas-microsoft-com:vml" Requires="v">
-                <p:oleObj name="Equation" r:id="rId3" imgW="1028700" imgH="419100" progId="Equation.DSMT4">
-                  <p:embed/>
-                </p:oleObj>
-              </mc:Choice>
-              <mc:Fallback>
-                <p:oleObj name="Equation" r:id="rId3" imgW="1028700" imgH="419100" progId="Equation.DSMT4">
-                  <p:embed/>
-                  <p:pic>
-                    <p:nvPicPr>
-                      <p:cNvPr id="0" name=""/>
-                      <p:cNvPicPr>
-                        <a:picLocks noChangeAspect="1" noChangeArrowheads="1"/>
-                      </p:cNvPicPr>
-                      <p:nvPr/>
-                    </p:nvPicPr>
-                    <p:blipFill>
-                      <a:blip r:embed="rId4">
-                        <a:extLst>
-                          <a:ext uri="{28A0092B-C50C-407E-A947-70E740481C1C}">
-                            <a14:useLocalDpi xmlns:a14="http://schemas.microsoft.com/office/drawing/2010/main" val="0"/>
-                          </a:ext>
-                        </a:extLst>
-                      </a:blip>
-                      <a:srcRect/>
-                      <a:stretch>
-                        <a:fillRect/>
-                      </a:stretch>
-                    </p:blipFill>
-                    <p:spPr bwMode="auto">
-                      <a:xfrm>
-                        <a:off x="5105400" y="1752600"/>
-                        <a:ext cx="2058988" cy="838200"/>
-                      </a:xfrm>
-                      <a:prstGeom prst="rect">
-                        <a:avLst/>
-                      </a:prstGeom>
-                      <a:noFill/>
-                      <a:ln>
-                        <a:noFill/>
-                      </a:ln>
-                      <a:effectLst/>
-                      <a:extLst>
-                        <a:ext uri="{909E8E84-426E-40DD-AFC4-6F175D3DCCD1}">
-                          <a14:hiddenFill xmlns:a14="http://schemas.microsoft.com/office/drawing/2010/main">
-                            <a:solidFill>
-                              <a:srgbClr val="FFFFFF"/>
-                            </a:solidFill>
-                          </a14:hiddenFill>
-                        </a:ext>
-                        <a:ext uri="{91240B29-F687-4F45-9708-019B960494DF}">
-                          <a14:hiddenLine xmlns:a14="http://schemas.microsoft.com/office/drawing/2010/main" w="9525">
-                            <a:solidFill>
-                              <a:srgbClr val="000000"/>
-                            </a:solidFill>
-                            <a:miter lim="800000"/>
-                            <a:headEnd/>
-                            <a:tailEnd/>
-                          </a14:hiddenLine>
-                        </a:ext>
-                        <a:ext uri="{AF507438-7753-43E0-B8FC-AC1667EBCBE1}">
-                          <a14:hiddenEffects xmlns:a14="http://schemas.microsoft.com/office/drawing/2010/main">
-                            <a:effectLst>
-                              <a:outerShdw dist="35921" dir="2700000" algn="ctr" rotWithShape="0">
-                                <a:srgbClr val="808080"/>
-                              </a:outerShdw>
-                            </a:effectLst>
-                          </a14:hiddenEffects>
-                        </a:ext>
-                      </a:extLst>
-                    </p:spPr>
-                  </p:pic>
-                </p:oleObj>
-              </mc:Fallback>
-            </mc:AlternateContent>
-          </a:graphicData>
-        </a:graphic>
-      </p:graphicFrame>
       <p:sp>
         <p:nvSpPr>
           <p:cNvPr id="7173" name="Text Box 4"/>
@@ -19372,101 +18921,6 @@
           </a:p>
         </p:txBody>
       </p:sp>
-      <p:graphicFrame>
-        <p:nvGraphicFramePr>
-          <p:cNvPr id="32772" name="Object 8"/>
-          <p:cNvGraphicFramePr>
-            <a:graphicFrameLocks noGrp="1" noChangeAspect="1"/>
-          </p:cNvGraphicFramePr>
-          <p:nvPr>
-            <p:ph sz="half" idx="2"/>
-          </p:nvPr>
-        </p:nvGraphicFramePr>
-        <p:xfrm>
-          <a:off x="3613150" y="4038601"/>
-          <a:ext cx="4984750" cy="835025"/>
-        </p:xfrm>
-        <a:graphic>
-          <a:graphicData uri="http://schemas.openxmlformats.org/presentationml/2006/ole">
-            <mc:AlternateContent xmlns:mc="http://schemas.openxmlformats.org/markup-compatibility/2006">
-              <mc:Choice xmlns:v="urn:schemas-microsoft-com:vml" Requires="v">
-                <p:oleObj name="Equation" r:id="rId5" imgW="2501900" imgH="419100" progId="Equation.DSMT4">
-                  <p:embed/>
-                </p:oleObj>
-              </mc:Choice>
-              <mc:Fallback>
-                <p:oleObj name="Equation" r:id="rId5" imgW="2501900" imgH="419100" progId="Equation.DSMT4">
-                  <p:embed/>
-                  <p:pic>
-                    <p:nvPicPr>
-                      <p:cNvPr id="0" name=""/>
-                      <p:cNvPicPr>
-                        <a:picLocks noChangeAspect="1" noChangeArrowheads="1"/>
-                      </p:cNvPicPr>
-                      <p:nvPr/>
-                    </p:nvPicPr>
-                    <p:blipFill>
-                      <a:blip r:embed="rId6">
-                        <a:extLst>
-                          <a:ext uri="{28A0092B-C50C-407E-A947-70E740481C1C}">
-                            <a14:useLocalDpi xmlns:a14="http://schemas.microsoft.com/office/drawing/2010/main" val="0"/>
-                          </a:ext>
-                        </a:extLst>
-                      </a:blip>
-                      <a:srcRect/>
-                      <a:stretch>
-                        <a:fillRect/>
-                      </a:stretch>
-                    </p:blipFill>
-                    <p:spPr bwMode="auto">
-                      <a:xfrm>
-                        <a:off x="3613150" y="4038601"/>
-                        <a:ext cx="4984750" cy="835025"/>
-                      </a:xfrm>
-                      <a:prstGeom prst="rect">
-                        <a:avLst/>
-                      </a:prstGeom>
-                      <a:noFill/>
-                      <a:ln>
-                        <a:noFill/>
-                      </a:ln>
-                      <a:effectLst/>
-                      <a:extLst>
-                        <a:ext uri="{909E8E84-426E-40DD-AFC4-6F175D3DCCD1}">
-                          <a14:hiddenFill xmlns:a14="http://schemas.microsoft.com/office/drawing/2010/main">
-                            <a:solidFill>
-                              <a:srgbClr val="FFFFFF"/>
-                            </a:solidFill>
-                          </a14:hiddenFill>
-                        </a:ext>
-                        <a:ext uri="{91240B29-F687-4F45-9708-019B960494DF}">
-                          <a14:hiddenLine xmlns:a14="http://schemas.microsoft.com/office/drawing/2010/main" w="9525">
-                            <a:solidFill>
-                              <a:srgbClr val="000000"/>
-                            </a:solidFill>
-                            <a:miter lim="800000"/>
-                            <a:headEnd/>
-                            <a:tailEnd/>
-                          </a14:hiddenLine>
-                        </a:ext>
-                        <a:ext uri="{AF507438-7753-43E0-B8FC-AC1667EBCBE1}">
-                          <a14:hiddenEffects xmlns:a14="http://schemas.microsoft.com/office/drawing/2010/main">
-                            <a:effectLst>
-                              <a:outerShdw dist="35921" dir="2700000" algn="ctr" rotWithShape="0">
-                                <a:srgbClr val="808080"/>
-                              </a:outerShdw>
-                            </a:effectLst>
-                          </a14:hiddenEffects>
-                        </a:ext>
-                      </a:extLst>
-                    </p:spPr>
-                  </p:pic>
-                </p:oleObj>
-              </mc:Fallback>
-            </mc:AlternateContent>
-          </a:graphicData>
-        </a:graphic>
-      </p:graphicFrame>
       <p:sp>
         <p:nvSpPr>
           <p:cNvPr id="7175" name="Slide Number Placeholder 1"/>
@@ -19818,99 +19272,6 @@
           </a:p>
         </p:txBody>
       </p:sp>
-      <p:graphicFrame>
-        <p:nvGraphicFramePr>
-          <p:cNvPr id="32775" name="Object 5"/>
-          <p:cNvGraphicFramePr>
-            <a:graphicFrameLocks noChangeAspect="1"/>
-          </p:cNvGraphicFramePr>
-          <p:nvPr/>
-        </p:nvGraphicFramePr>
-        <p:xfrm>
-          <a:off x="2362200" y="5659438"/>
-          <a:ext cx="5816600" cy="965200"/>
-        </p:xfrm>
-        <a:graphic>
-          <a:graphicData uri="http://schemas.openxmlformats.org/presentationml/2006/ole">
-            <mc:AlternateContent xmlns:mc="http://schemas.openxmlformats.org/markup-compatibility/2006">
-              <mc:Choice xmlns:v="urn:schemas-microsoft-com:vml" Requires="v">
-                <p:oleObj name="Equation" r:id="rId7" imgW="2908300" imgH="482600" progId="Equation.DSMT4">
-                  <p:embed/>
-                </p:oleObj>
-              </mc:Choice>
-              <mc:Fallback>
-                <p:oleObj name="Equation" r:id="rId7" imgW="2908300" imgH="482600" progId="Equation.DSMT4">
-                  <p:embed/>
-                  <p:pic>
-                    <p:nvPicPr>
-                      <p:cNvPr id="0" name=""/>
-                      <p:cNvPicPr>
-                        <a:picLocks noChangeAspect="1" noChangeArrowheads="1"/>
-                      </p:cNvPicPr>
-                      <p:nvPr/>
-                    </p:nvPicPr>
-                    <p:blipFill>
-                      <a:blip r:embed="rId8">
-                        <a:extLst>
-                          <a:ext uri="{28A0092B-C50C-407E-A947-70E740481C1C}">
-                            <a14:useLocalDpi xmlns:a14="http://schemas.microsoft.com/office/drawing/2010/main" val="0"/>
-                          </a:ext>
-                        </a:extLst>
-                      </a:blip>
-                      <a:srcRect/>
-                      <a:stretch>
-                        <a:fillRect/>
-                      </a:stretch>
-                    </p:blipFill>
-                    <p:spPr bwMode="auto">
-                      <a:xfrm>
-                        <a:off x="2362200" y="5659438"/>
-                        <a:ext cx="5816600" cy="965200"/>
-                      </a:xfrm>
-                      <a:prstGeom prst="rect">
-                        <a:avLst/>
-                      </a:prstGeom>
-                      <a:noFill/>
-                      <a:ln>
-                        <a:noFill/>
-                      </a:ln>
-                      <a:effectLst/>
-                      <a:extLst>
-                        <a:ext uri="{909E8E84-426E-40DD-AFC4-6F175D3DCCD1}">
-                          <a14:hiddenFill xmlns:a14="http://schemas.microsoft.com/office/drawing/2010/main">
-                            <a:solidFill>
-                              <a:srgbClr val="FFFFFF"/>
-                            </a:solidFill>
-                          </a14:hiddenFill>
-                        </a:ext>
-                        <a:ext uri="{91240B29-F687-4F45-9708-019B960494DF}">
-                          <a14:hiddenLine xmlns:a14="http://schemas.microsoft.com/office/drawing/2010/main" w="9525">
-                            <a:solidFill>
-                              <a:srgbClr val="000000"/>
-                            </a:solidFill>
-                            <a:miter lim="800000"/>
-                            <a:headEnd/>
-                            <a:tailEnd/>
-                          </a14:hiddenLine>
-                        </a:ext>
-                        <a:ext uri="{AF507438-7753-43E0-B8FC-AC1667EBCBE1}">
-                          <a14:hiddenEffects xmlns:a14="http://schemas.microsoft.com/office/drawing/2010/main">
-                            <a:effectLst>
-                              <a:outerShdw dist="35921" dir="2700000" algn="ctr" rotWithShape="0">
-                                <a:srgbClr val="808080"/>
-                              </a:outerShdw>
-                            </a:effectLst>
-                          </a14:hiddenEffects>
-                        </a:ext>
-                      </a:extLst>
-                    </p:spPr>
-                  </p:pic>
-                </p:oleObj>
-              </mc:Fallback>
-            </mc:AlternateContent>
-          </a:graphicData>
-        </a:graphic>
-      </p:graphicFrame>
       <p:sp>
         <p:nvSpPr>
           <p:cNvPr id="11" name="Text Box 4"/>
@@ -20090,6 +19451,315 @@
                 <a:srgbClr val="000000"/>
               </a:solidFill>
             </a:endParaRPr>
+          </a:p>
+        </p:txBody>
+      </p:sp>
+      <p:sp>
+        <p:nvSpPr>
+          <p:cNvPr id="32776" name="TextBox 32775"/>
+          <p:cNvSpPr txBox="1"/>
+          <p:nvPr/>
+        </p:nvSpPr>
+        <p:spPr>
+          <a:xfrm>
+            <a:off x="5105400" y="1752600"/>
+            <a:ext cx="3657600" cy="838200"/>
+          </a:xfrm>
+          <a:prstGeom prst="rect">
+            <a:avLst/>
+          </a:prstGeom>
+          <a:noFill/>
+        </p:spPr>
+        <p:txBody>
+          <a:bodyPr wrap="square" anchor="ctr" lIns="0" rIns="0" tIns="0" bIns="0">
+            <a:spAutoFit/>
+          </a:bodyPr>
+          <a:lstStyle/>
+          <a:p>
+            <a:r>
+              <a:rPr sz="2000">
+                <a:latin typeface="Cambria"/>
+              </a:rPr>
+              <a:t>P(x | λ) = λ</a:t>
+            </a:r>
+            <a:r>
+              <a:rPr sz="2000" baseline="30000">
+                <a:latin typeface="Cambria"/>
+              </a:rPr>
+              <a:t>x</a:t>
+            </a:r>
+            <a:r>
+              <a:rPr sz="2000">
+                <a:latin typeface="Cambria"/>
+              </a:rPr>
+              <a:t> exp(−λ) / x!</a:t>
+            </a:r>
+          </a:p>
+        </p:txBody>
+      </p:sp>
+      <p:sp>
+        <p:nvSpPr>
+          <p:cNvPr id="32777" name="TextBox 32776"/>
+          <p:cNvSpPr txBox="1"/>
+          <p:nvPr/>
+        </p:nvSpPr>
+        <p:spPr>
+          <a:xfrm>
+            <a:off x="3613150" y="4038601"/>
+            <a:ext cx="8395970" cy="835025"/>
+          </a:xfrm>
+          <a:prstGeom prst="rect">
+            <a:avLst/>
+          </a:prstGeom>
+          <a:noFill/>
+        </p:spPr>
+        <p:txBody>
+          <a:bodyPr wrap="square" anchor="ctr" lIns="0" rIns="0" tIns="0" bIns="0">
+            <a:spAutoFit/>
+          </a:bodyPr>
+          <a:lstStyle/>
+          <a:p>
+            <a:r>
+              <a:rPr sz="1800">
+                <a:latin typeface="Cambria"/>
+              </a:rPr>
+              <a:t>P(x | p, λ</a:t>
+            </a:r>
+            <a:r>
+              <a:rPr sz="1800" baseline="-25000">
+                <a:latin typeface="Cambria"/>
+              </a:rPr>
+              <a:t>1</a:t>
+            </a:r>
+            <a:r>
+              <a:rPr sz="1800">
+                <a:latin typeface="Cambria"/>
+              </a:rPr>
+              <a:t>, λ</a:t>
+            </a:r>
+            <a:r>
+              <a:rPr sz="1800" baseline="-25000">
+                <a:latin typeface="Cambria"/>
+              </a:rPr>
+              <a:t>2</a:t>
+            </a:r>
+            <a:r>
+              <a:rPr sz="1800">
+                <a:latin typeface="Cambria"/>
+              </a:rPr>
+              <a:t>) = p λ</a:t>
+            </a:r>
+            <a:r>
+              <a:rPr sz="1800" baseline="-25000">
+                <a:latin typeface="Cambria"/>
+              </a:rPr>
+              <a:t>1</a:t>
+            </a:r>
+            <a:r>
+              <a:rPr sz="1800" baseline="30000">
+                <a:latin typeface="Cambria"/>
+              </a:rPr>
+              <a:t>x</a:t>
+            </a:r>
+            <a:r>
+              <a:rPr sz="1800">
+                <a:latin typeface="Cambria"/>
+              </a:rPr>
+              <a:t> exp(−λ</a:t>
+            </a:r>
+            <a:r>
+              <a:rPr sz="1800" baseline="-25000">
+                <a:latin typeface="Cambria"/>
+              </a:rPr>
+              <a:t>1</a:t>
+            </a:r>
+            <a:r>
+              <a:rPr sz="1800">
+                <a:latin typeface="Cambria"/>
+              </a:rPr>
+              <a:t>) / x! + (1 − p) λ</a:t>
+            </a:r>
+            <a:r>
+              <a:rPr sz="1800" baseline="-25000">
+                <a:latin typeface="Cambria"/>
+              </a:rPr>
+              <a:t>2</a:t>
+            </a:r>
+            <a:r>
+              <a:rPr sz="1800" baseline="30000">
+                <a:latin typeface="Cambria"/>
+              </a:rPr>
+              <a:t>x</a:t>
+            </a:r>
+            <a:r>
+              <a:rPr sz="1800">
+                <a:latin typeface="Cambria"/>
+              </a:rPr>
+              <a:t> exp(−λ</a:t>
+            </a:r>
+            <a:r>
+              <a:rPr sz="1800" baseline="-25000">
+                <a:latin typeface="Cambria"/>
+              </a:rPr>
+              <a:t>2</a:t>
+            </a:r>
+            <a:r>
+              <a:rPr sz="1800">
+                <a:latin typeface="Cambria"/>
+              </a:rPr>
+              <a:t>) / x!</a:t>
+            </a:r>
+          </a:p>
+        </p:txBody>
+      </p:sp>
+      <p:sp>
+        <p:nvSpPr>
+          <p:cNvPr id="32778" name="TextBox 32777"/>
+          <p:cNvSpPr txBox="1"/>
+          <p:nvPr/>
+        </p:nvSpPr>
+        <p:spPr>
+          <a:xfrm>
+            <a:off x="2362200" y="5659438"/>
+            <a:ext cx="9646920" cy="965200"/>
+          </a:xfrm>
+          <a:prstGeom prst="rect">
+            <a:avLst/>
+          </a:prstGeom>
+          <a:noFill/>
+        </p:spPr>
+        <p:txBody>
+          <a:bodyPr wrap="square" anchor="ctr" lIns="0" rIns="0" tIns="0" bIns="0">
+            <a:spAutoFit/>
+          </a:bodyPr>
+          <a:lstStyle/>
+          <a:p>
+            <a:r>
+              <a:rPr sz="1700">
+                <a:latin typeface="Cambria"/>
+              </a:rPr>
+              <a:t>P(x | p, λ</a:t>
+            </a:r>
+            <a:r>
+              <a:rPr sz="1700" baseline="-25000">
+                <a:latin typeface="Cambria"/>
+              </a:rPr>
+              <a:t>1</a:t>
+            </a:r>
+            <a:r>
+              <a:rPr sz="1700">
+                <a:latin typeface="Cambria"/>
+              </a:rPr>
+              <a:t>, λ</a:t>
+            </a:r>
+            <a:r>
+              <a:rPr sz="1700" baseline="-25000">
+                <a:latin typeface="Cambria"/>
+              </a:rPr>
+              <a:t>2</a:t>
+            </a:r>
+            <a:r>
+              <a:rPr sz="1700">
+                <a:latin typeface="Cambria"/>
+              </a:rPr>
+              <a:t>) = ∏</a:t>
+            </a:r>
+            <a:r>
+              <a:rPr sz="1700" baseline="-25000">
+                <a:latin typeface="Cambria"/>
+              </a:rPr>
+              <a:t>i</a:t>
+            </a:r>
+            <a:r>
+              <a:rPr sz="1700">
+                <a:latin typeface="Cambria"/>
+              </a:rPr>
+              <a:t> ( p λ</a:t>
+            </a:r>
+            <a:r>
+              <a:rPr sz="1700" baseline="-25000">
+                <a:latin typeface="Cambria"/>
+              </a:rPr>
+              <a:t>1</a:t>
+            </a:r>
+            <a:r>
+              <a:rPr sz="1700" baseline="30000">
+                <a:latin typeface="Cambria"/>
+              </a:rPr>
+              <a:t>xᵢ</a:t>
+            </a:r>
+            <a:r>
+              <a:rPr sz="1700">
+                <a:latin typeface="Cambria"/>
+              </a:rPr>
+              <a:t> exp(−λ</a:t>
+            </a:r>
+            <a:r>
+              <a:rPr sz="1700" baseline="-25000">
+                <a:latin typeface="Cambria"/>
+              </a:rPr>
+              <a:t>1</a:t>
+            </a:r>
+            <a:r>
+              <a:rPr sz="1700">
+                <a:latin typeface="Cambria"/>
+              </a:rPr>
+              <a:t>) / x</a:t>
+            </a:r>
+            <a:r>
+              <a:rPr sz="1700" baseline="-25000">
+                <a:latin typeface="Cambria"/>
+              </a:rPr>
+              <a:t>i</a:t>
+            </a:r>
+            <a:r>
+              <a:rPr sz="1700">
+                <a:latin typeface="Cambria"/>
+              </a:rPr>
+              <a:t>! + (1 − p) λ</a:t>
+            </a:r>
+            <a:r>
+              <a:rPr sz="1700" baseline="-25000">
+                <a:latin typeface="Cambria"/>
+              </a:rPr>
+              <a:t>2</a:t>
+            </a:r>
+            <a:r>
+              <a:rPr sz="1700" baseline="30000">
+                <a:latin typeface="Cambria"/>
+              </a:rPr>
+              <a:t>xᵢ</a:t>
+            </a:r>
+            <a:r>
+              <a:rPr sz="1700">
+                <a:latin typeface="Cambria"/>
+              </a:rPr>
+              <a:t> exp(−λ</a:t>
+            </a:r>
+            <a:r>
+              <a:rPr sz="1700" baseline="-25000">
+                <a:latin typeface="Cambria"/>
+              </a:rPr>
+              <a:t>2</a:t>
+            </a:r>
+            <a:r>
+              <a:rPr sz="1700">
+                <a:latin typeface="Cambria"/>
+              </a:rPr>
+              <a:t>) / x</a:t>
+            </a:r>
+            <a:r>
+              <a:rPr sz="1700" baseline="-25000">
+                <a:latin typeface="Cambria"/>
+              </a:rPr>
+              <a:t>i</a:t>
+            </a:r>
+            <a:r>
+              <a:rPr sz="1700">
+                <a:latin typeface="Cambria"/>
+              </a:rPr>
+              <a:t>! )</a:t>
+            </a:r>
           </a:p>
         </p:txBody>
       </p:sp>
@@ -20482,99 +20152,6 @@
           </a:p>
         </p:txBody>
       </p:sp>
-      <p:graphicFrame>
-        <p:nvGraphicFramePr>
-          <p:cNvPr id="34819" name="Object 5"/>
-          <p:cNvGraphicFramePr>
-            <a:graphicFrameLocks noChangeAspect="1"/>
-          </p:cNvGraphicFramePr>
-          <p:nvPr/>
-        </p:nvGraphicFramePr>
-        <p:xfrm>
-          <a:off x="2667000" y="2090738"/>
-          <a:ext cx="5816600" cy="965200"/>
-        </p:xfrm>
-        <a:graphic>
-          <a:graphicData uri="http://schemas.openxmlformats.org/presentationml/2006/ole">
-            <mc:AlternateContent xmlns:mc="http://schemas.openxmlformats.org/markup-compatibility/2006">
-              <mc:Choice xmlns:v="urn:schemas-microsoft-com:vml" Requires="v">
-                <p:oleObj name="Equation" r:id="rId3" imgW="2908300" imgH="482600" progId="Equation.DSMT4">
-                  <p:embed/>
-                </p:oleObj>
-              </mc:Choice>
-              <mc:Fallback>
-                <p:oleObj name="Equation" r:id="rId3" imgW="2908300" imgH="482600" progId="Equation.DSMT4">
-                  <p:embed/>
-                  <p:pic>
-                    <p:nvPicPr>
-                      <p:cNvPr id="0" name=""/>
-                      <p:cNvPicPr>
-                        <a:picLocks noChangeAspect="1" noChangeArrowheads="1"/>
-                      </p:cNvPicPr>
-                      <p:nvPr/>
-                    </p:nvPicPr>
-                    <p:blipFill>
-                      <a:blip r:embed="rId4">
-                        <a:extLst>
-                          <a:ext uri="{28A0092B-C50C-407E-A947-70E740481C1C}">
-                            <a14:useLocalDpi xmlns:a14="http://schemas.microsoft.com/office/drawing/2010/main" val="0"/>
-                          </a:ext>
-                        </a:extLst>
-                      </a:blip>
-                      <a:srcRect/>
-                      <a:stretch>
-                        <a:fillRect/>
-                      </a:stretch>
-                    </p:blipFill>
-                    <p:spPr bwMode="auto">
-                      <a:xfrm>
-                        <a:off x="2667000" y="2090738"/>
-                        <a:ext cx="5816600" cy="965200"/>
-                      </a:xfrm>
-                      <a:prstGeom prst="rect">
-                        <a:avLst/>
-                      </a:prstGeom>
-                      <a:noFill/>
-                      <a:ln>
-                        <a:noFill/>
-                      </a:ln>
-                      <a:effectLst/>
-                      <a:extLst>
-                        <a:ext uri="{909E8E84-426E-40DD-AFC4-6F175D3DCCD1}">
-                          <a14:hiddenFill xmlns:a14="http://schemas.microsoft.com/office/drawing/2010/main">
-                            <a:solidFill>
-                              <a:srgbClr val="FFFFFF"/>
-                            </a:solidFill>
-                          </a14:hiddenFill>
-                        </a:ext>
-                        <a:ext uri="{91240B29-F687-4F45-9708-019B960494DF}">
-                          <a14:hiddenLine xmlns:a14="http://schemas.microsoft.com/office/drawing/2010/main" w="9525">
-                            <a:solidFill>
-                              <a:srgbClr val="000000"/>
-                            </a:solidFill>
-                            <a:miter lim="800000"/>
-                            <a:headEnd/>
-                            <a:tailEnd/>
-                          </a14:hiddenLine>
-                        </a:ext>
-                        <a:ext uri="{AF507438-7753-43E0-B8FC-AC1667EBCBE1}">
-                          <a14:hiddenEffects xmlns:a14="http://schemas.microsoft.com/office/drawing/2010/main">
-                            <a:effectLst>
-                              <a:outerShdw dist="35921" dir="2700000" algn="ctr" rotWithShape="0">
-                                <a:srgbClr val="808080"/>
-                              </a:outerShdw>
-                            </a:effectLst>
-                          </a14:hiddenEffects>
-                        </a:ext>
-                      </a:extLst>
-                    </p:spPr>
-                  </p:pic>
-                </p:oleObj>
-              </mc:Fallback>
-            </mc:AlternateContent>
-          </a:graphicData>
-        </a:graphic>
-      </p:graphicFrame>
       <p:sp>
         <p:nvSpPr>
           <p:cNvPr id="11" name="Text Box 4"/>
@@ -20930,6 +20507,157 @@
                 </a:solidFill>
               </a:rPr>
               <a:t>are we solving for here with optimization?</a:t>
+            </a:r>
+          </a:p>
+        </p:txBody>
+      </p:sp>
+      <p:sp>
+        <p:nvSpPr>
+          <p:cNvPr id="7176" name="TextBox 7175"/>
+          <p:cNvSpPr txBox="1"/>
+          <p:nvPr/>
+        </p:nvSpPr>
+        <p:spPr>
+          <a:xfrm>
+            <a:off x="2667000" y="2090738"/>
+            <a:ext cx="9342120" cy="965200"/>
+          </a:xfrm>
+          <a:prstGeom prst="rect">
+            <a:avLst/>
+          </a:prstGeom>
+          <a:noFill/>
+        </p:spPr>
+        <p:txBody>
+          <a:bodyPr wrap="square" anchor="ctr" lIns="0" rIns="0" tIns="0" bIns="0">
+            <a:spAutoFit/>
+          </a:bodyPr>
+          <a:lstStyle/>
+          <a:p>
+            <a:r>
+              <a:rPr sz="1700">
+                <a:latin typeface="Cambria"/>
+              </a:rPr>
+              <a:t>P(x | p, λ</a:t>
+            </a:r>
+            <a:r>
+              <a:rPr sz="1700" baseline="-25000">
+                <a:latin typeface="Cambria"/>
+              </a:rPr>
+              <a:t>1</a:t>
+            </a:r>
+            <a:r>
+              <a:rPr sz="1700">
+                <a:latin typeface="Cambria"/>
+              </a:rPr>
+              <a:t>, λ</a:t>
+            </a:r>
+            <a:r>
+              <a:rPr sz="1700" baseline="-25000">
+                <a:latin typeface="Cambria"/>
+              </a:rPr>
+              <a:t>2</a:t>
+            </a:r>
+            <a:r>
+              <a:rPr sz="1700">
+                <a:latin typeface="Cambria"/>
+              </a:rPr>
+              <a:t>) = ∏</a:t>
+            </a:r>
+            <a:r>
+              <a:rPr sz="1700" baseline="-25000">
+                <a:latin typeface="Cambria"/>
+              </a:rPr>
+              <a:t>i</a:t>
+            </a:r>
+            <a:r>
+              <a:rPr sz="1700">
+                <a:latin typeface="Cambria"/>
+              </a:rPr>
+              <a:t> ( p λ</a:t>
+            </a:r>
+            <a:r>
+              <a:rPr sz="1700" baseline="-25000">
+                <a:latin typeface="Cambria"/>
+              </a:rPr>
+              <a:t>1</a:t>
+            </a:r>
+            <a:r>
+              <a:rPr sz="1700" baseline="30000">
+                <a:latin typeface="Cambria"/>
+              </a:rPr>
+              <a:t>xᵢ</a:t>
+            </a:r>
+            <a:r>
+              <a:rPr sz="1700">
+                <a:latin typeface="Cambria"/>
+              </a:rPr>
+              <a:t> exp(−λ</a:t>
+            </a:r>
+            <a:r>
+              <a:rPr sz="1700" baseline="-25000">
+                <a:latin typeface="Cambria"/>
+              </a:rPr>
+              <a:t>1</a:t>
+            </a:r>
+            <a:r>
+              <a:rPr sz="1700">
+                <a:latin typeface="Cambria"/>
+              </a:rPr>
+              <a:t>) / x</a:t>
+            </a:r>
+            <a:r>
+              <a:rPr sz="1700" baseline="-25000">
+                <a:latin typeface="Cambria"/>
+              </a:rPr>
+              <a:t>i</a:t>
+            </a:r>
+            <a:r>
+              <a:rPr sz="1700">
+                <a:latin typeface="Cambria"/>
+              </a:rPr>
+              <a:t>! + (1 − p) λ</a:t>
+            </a:r>
+            <a:r>
+              <a:rPr sz="1700" baseline="-25000">
+                <a:latin typeface="Cambria"/>
+              </a:rPr>
+              <a:t>2</a:t>
+            </a:r>
+            <a:r>
+              <a:rPr sz="1700" baseline="30000">
+                <a:latin typeface="Cambria"/>
+              </a:rPr>
+              <a:t>xᵢ</a:t>
+            </a:r>
+            <a:r>
+              <a:rPr sz="1700">
+                <a:latin typeface="Cambria"/>
+              </a:rPr>
+              <a:t> exp(−λ</a:t>
+            </a:r>
+            <a:r>
+              <a:rPr sz="1700" baseline="-25000">
+                <a:latin typeface="Cambria"/>
+              </a:rPr>
+              <a:t>2</a:t>
+            </a:r>
+            <a:r>
+              <a:rPr sz="1700">
+                <a:latin typeface="Cambria"/>
+              </a:rPr>
+              <a:t>) / x</a:t>
+            </a:r>
+            <a:r>
+              <a:rPr sz="1700" baseline="-25000">
+                <a:latin typeface="Cambria"/>
+              </a:rPr>
+              <a:t>i</a:t>
+            </a:r>
+            <a:r>
+              <a:rPr sz="1700">
+                <a:latin typeface="Cambria"/>
+              </a:rPr>
+              <a:t>! )</a:t>
             </a:r>
           </a:p>
         </p:txBody>
@@ -25200,196 +24928,6 @@
           </a:p>
         </p:txBody>
       </p:sp>
-      <p:graphicFrame>
-        <p:nvGraphicFramePr>
-          <p:cNvPr id="49155" name="Object 5"/>
-          <p:cNvGraphicFramePr>
-            <a:graphicFrameLocks noGrp="1" noChangeAspect="1"/>
-          </p:cNvGraphicFramePr>
-          <p:nvPr>
-            <p:ph sz="half" idx="1"/>
-          </p:nvPr>
-        </p:nvGraphicFramePr>
-        <p:xfrm>
-          <a:off x="2692401" y="2354263"/>
-          <a:ext cx="2511425" cy="482600"/>
-        </p:xfrm>
-        <a:graphic>
-          <a:graphicData uri="http://schemas.openxmlformats.org/presentationml/2006/ole">
-            <mc:AlternateContent xmlns:mc="http://schemas.openxmlformats.org/markup-compatibility/2006">
-              <mc:Choice xmlns:v="urn:schemas-microsoft-com:vml" Requires="v">
-                <p:oleObj name="Equation" r:id="rId3" imgW="1257300" imgH="241300" progId="Equation.DSMT4">
-                  <p:embed/>
-                </p:oleObj>
-              </mc:Choice>
-              <mc:Fallback>
-                <p:oleObj name="Equation" r:id="rId3" imgW="1257300" imgH="241300" progId="Equation.DSMT4">
-                  <p:embed/>
-                  <p:pic>
-                    <p:nvPicPr>
-                      <p:cNvPr id="0" name=""/>
-                      <p:cNvPicPr>
-                        <a:picLocks noChangeAspect="1" noChangeArrowheads="1"/>
-                      </p:cNvPicPr>
-                      <p:nvPr/>
-                    </p:nvPicPr>
-                    <p:blipFill>
-                      <a:blip r:embed="rId4">
-                        <a:extLst>
-                          <a:ext uri="{28A0092B-C50C-407E-A947-70E740481C1C}">
-                            <a14:useLocalDpi xmlns:a14="http://schemas.microsoft.com/office/drawing/2010/main" val="0"/>
-                          </a:ext>
-                        </a:extLst>
-                      </a:blip>
-                      <a:srcRect/>
-                      <a:stretch>
-                        <a:fillRect/>
-                      </a:stretch>
-                    </p:blipFill>
-                    <p:spPr bwMode="auto">
-                      <a:xfrm>
-                        <a:off x="2692401" y="2354263"/>
-                        <a:ext cx="2511425" cy="482600"/>
-                      </a:xfrm>
-                      <a:prstGeom prst="rect">
-                        <a:avLst/>
-                      </a:prstGeom>
-                      <a:noFill/>
-                      <a:ln>
-                        <a:noFill/>
-                      </a:ln>
-                      <a:effectLst/>
-                      <a:extLst>
-                        <a:ext uri="{909E8E84-426E-40DD-AFC4-6F175D3DCCD1}">
-                          <a14:hiddenFill xmlns:a14="http://schemas.microsoft.com/office/drawing/2010/main">
-                            <a:solidFill>
-                              <a:srgbClr val="FFFFFF"/>
-                            </a:solidFill>
-                          </a14:hiddenFill>
-                        </a:ext>
-                        <a:ext uri="{91240B29-F687-4F45-9708-019B960494DF}">
-                          <a14:hiddenLine xmlns:a14="http://schemas.microsoft.com/office/drawing/2010/main" w="9525">
-                            <a:solidFill>
-                              <a:srgbClr val="000000"/>
-                            </a:solidFill>
-                            <a:miter lim="800000"/>
-                            <a:headEnd/>
-                            <a:tailEnd/>
-                          </a14:hiddenLine>
-                        </a:ext>
-                        <a:ext uri="{AF507438-7753-43E0-B8FC-AC1667EBCBE1}">
-                          <a14:hiddenEffects xmlns:a14="http://schemas.microsoft.com/office/drawing/2010/main">
-                            <a:effectLst>
-                              <a:outerShdw dist="35921" dir="2700000" algn="ctr" rotWithShape="0">
-                                <a:srgbClr val="808080"/>
-                              </a:outerShdw>
-                            </a:effectLst>
-                          </a14:hiddenEffects>
-                        </a:ext>
-                      </a:extLst>
-                    </p:spPr>
-                  </p:pic>
-                </p:oleObj>
-              </mc:Fallback>
-            </mc:AlternateContent>
-          </a:graphicData>
-        </a:graphic>
-      </p:graphicFrame>
-      <p:graphicFrame>
-        <p:nvGraphicFramePr>
-          <p:cNvPr id="49156" name="Object 6"/>
-          <p:cNvGraphicFramePr>
-            <a:graphicFrameLocks noGrp="1" noChangeAspect="1"/>
-          </p:cNvGraphicFramePr>
-          <p:nvPr>
-            <p:ph sz="half" idx="2"/>
-          </p:nvPr>
-        </p:nvGraphicFramePr>
-        <p:xfrm>
-          <a:off x="6780214" y="2354263"/>
-          <a:ext cx="1627187" cy="457200"/>
-        </p:xfrm>
-        <a:graphic>
-          <a:graphicData uri="http://schemas.openxmlformats.org/presentationml/2006/ole">
-            <mc:AlternateContent xmlns:mc="http://schemas.openxmlformats.org/markup-compatibility/2006">
-              <mc:Choice xmlns:v="urn:schemas-microsoft-com:vml" Requires="v">
-                <p:oleObj name="Equation" r:id="rId5" imgW="812447" imgH="228501" progId="Equation.DSMT4">
-                  <p:embed/>
-                </p:oleObj>
-              </mc:Choice>
-              <mc:Fallback>
-                <p:oleObj name="Equation" r:id="rId5" imgW="812447" imgH="228501" progId="Equation.DSMT4">
-                  <p:embed/>
-                  <p:pic>
-                    <p:nvPicPr>
-                      <p:cNvPr id="0" name=""/>
-                      <p:cNvPicPr>
-                        <a:picLocks noChangeAspect="1" noChangeArrowheads="1"/>
-                      </p:cNvPicPr>
-                      <p:nvPr/>
-                    </p:nvPicPr>
-                    <p:blipFill>
-                      <a:blip r:embed="rId6">
-                        <a:extLst>
-                          <a:ext uri="{28A0092B-C50C-407E-A947-70E740481C1C}">
-                            <a14:useLocalDpi xmlns:a14="http://schemas.microsoft.com/office/drawing/2010/main" val="0"/>
-                          </a:ext>
-                        </a:extLst>
-                      </a:blip>
-                      <a:srcRect/>
-                      <a:stretch>
-                        <a:fillRect/>
-                      </a:stretch>
-                    </p:blipFill>
-                    <p:spPr bwMode="auto">
-                      <a:xfrm>
-                        <a:off x="6780214" y="2354263"/>
-                        <a:ext cx="1627187" cy="457200"/>
-                      </a:xfrm>
-                      <a:prstGeom prst="rect">
-                        <a:avLst/>
-                      </a:prstGeom>
-                      <a:noFill/>
-                      <a:ln>
-                        <a:noFill/>
-                      </a:ln>
-                      <a:effectLst/>
-                      <a:extLst>
-                        <a:ext uri="{909E8E84-426E-40DD-AFC4-6F175D3DCCD1}">
-                          <a14:hiddenFill xmlns:a14="http://schemas.microsoft.com/office/drawing/2010/main">
-                            <a:solidFill>
-                              <a:srgbClr val="FFFFFF"/>
-                            </a:solidFill>
-                          </a14:hiddenFill>
-                        </a:ext>
-                        <a:ext uri="{91240B29-F687-4F45-9708-019B960494DF}">
-                          <a14:hiddenLine xmlns:a14="http://schemas.microsoft.com/office/drawing/2010/main" w="9525">
-                            <a:solidFill>
-                              <a:srgbClr val="000000"/>
-                            </a:solidFill>
-                            <a:miter lim="800000"/>
-                            <a:headEnd/>
-                            <a:tailEnd/>
-                          </a14:hiddenLine>
-                        </a:ext>
-                        <a:ext uri="{AF507438-7753-43E0-B8FC-AC1667EBCBE1}">
-                          <a14:hiddenEffects xmlns:a14="http://schemas.microsoft.com/office/drawing/2010/main">
-                            <a:effectLst>
-                              <a:outerShdw dist="35921" dir="2700000" algn="ctr" rotWithShape="0">
-                                <a:srgbClr val="808080"/>
-                              </a:outerShdw>
-                            </a:effectLst>
-                          </a14:hiddenEffects>
-                        </a:ext>
-                      </a:extLst>
-                    </p:spPr>
-                  </p:pic>
-                </p:oleObj>
-              </mc:Fallback>
-            </mc:AlternateContent>
-          </a:graphicData>
-        </a:graphic>
-      </p:graphicFrame>
       <p:sp>
         <p:nvSpPr>
           <p:cNvPr id="8198" name="Text Box 7"/>
@@ -25635,6 +25173,116 @@
                 <a:srgbClr val="000000"/>
               </a:solidFill>
             </a:endParaRPr>
+          </a:p>
+        </p:txBody>
+      </p:sp>
+      <p:sp>
+        <p:nvSpPr>
+          <p:cNvPr id="49157" name="TextBox 49156"/>
+          <p:cNvSpPr txBox="1"/>
+          <p:nvPr/>
+        </p:nvSpPr>
+        <p:spPr>
+          <a:xfrm>
+            <a:off x="2692401" y="2354263"/>
+            <a:ext cx="2954215" cy="482600"/>
+          </a:xfrm>
+          <a:prstGeom prst="rect">
+            <a:avLst/>
+          </a:prstGeom>
+          <a:noFill/>
+        </p:spPr>
+        <p:txBody>
+          <a:bodyPr wrap="square" anchor="ctr" lIns="0" rIns="0" tIns="0" bIns="0">
+            <a:spAutoFit/>
+          </a:bodyPr>
+          <a:lstStyle/>
+          <a:p>
+            <a:r>
+              <a:rPr sz="1900">
+                <a:latin typeface="Cambria"/>
+              </a:rPr>
+              <a:t>L</a:t>
+            </a:r>
+            <a:r>
+              <a:rPr sz="1900" baseline="-25000">
+                <a:latin typeface="Cambria"/>
+              </a:rPr>
+              <a:t>a</a:t>
+            </a:r>
+            <a:r>
+              <a:rPr sz="1900">
+                <a:latin typeface="Cambria"/>
+              </a:rPr>
+              <a:t> = ℓ</a:t>
+            </a:r>
+            <a:r>
+              <a:rPr sz="1900" baseline="-25000">
+                <a:latin typeface="Cambria"/>
+              </a:rPr>
+              <a:t>∞</a:t>
+            </a:r>
+            <a:r>
+              <a:rPr sz="1900">
+                <a:latin typeface="Cambria"/>
+              </a:rPr>
+              <a:t>(1 − e</a:t>
+            </a:r>
+            <a:r>
+              <a:rPr sz="1900" baseline="30000">
+                <a:latin typeface="Cambria"/>
+              </a:rPr>
+              <a:t>−κa</a:t>
+            </a:r>
+            <a:r>
+              <a:rPr sz="1900">
+                <a:latin typeface="Cambria"/>
+              </a:rPr>
+              <a:t>) + ε</a:t>
+            </a:r>
+          </a:p>
+        </p:txBody>
+      </p:sp>
+      <p:sp>
+        <p:nvSpPr>
+          <p:cNvPr id="49158" name="TextBox 49157"/>
+          <p:cNvSpPr txBox="1"/>
+          <p:nvPr/>
+        </p:nvSpPr>
+        <p:spPr>
+          <a:xfrm>
+            <a:off x="6780214" y="2354263"/>
+            <a:ext cx="1688123" cy="457200"/>
+          </a:xfrm>
+          <a:prstGeom prst="rect">
+            <a:avLst/>
+          </a:prstGeom>
+          <a:noFill/>
+        </p:spPr>
+        <p:txBody>
+          <a:bodyPr wrap="square" anchor="ctr" lIns="0" rIns="0" tIns="0" bIns="0">
+            <a:spAutoFit/>
+          </a:bodyPr>
+          <a:lstStyle/>
+          <a:p>
+            <a:r>
+              <a:rPr sz="1900">
+                <a:latin typeface="Cambria"/>
+              </a:rPr>
+              <a:t>ε ~ N(0, σ</a:t>
+            </a:r>
+            <a:r>
+              <a:rPr sz="1900" baseline="30000">
+                <a:latin typeface="Cambria"/>
+              </a:rPr>
+              <a:t>2</a:t>
+            </a:r>
+            <a:r>
+              <a:rPr sz="1900">
+                <a:latin typeface="Cambria"/>
+              </a:rPr>
+              <a:t>)</a:t>
+            </a:r>
           </a:p>
         </p:txBody>
       </p:sp>
@@ -25982,196 +25630,6 @@
           </a:p>
         </p:txBody>
       </p:sp>
-      <p:graphicFrame>
-        <p:nvGraphicFramePr>
-          <p:cNvPr id="51204" name="Object 5"/>
-          <p:cNvGraphicFramePr>
-            <a:graphicFrameLocks noGrp="1" noChangeAspect="1"/>
-          </p:cNvGraphicFramePr>
-          <p:nvPr>
-            <p:ph sz="half" idx="1"/>
-          </p:nvPr>
-        </p:nvGraphicFramePr>
-        <p:xfrm>
-          <a:off x="2898776" y="2298700"/>
-          <a:ext cx="2511425" cy="482600"/>
-        </p:xfrm>
-        <a:graphic>
-          <a:graphicData uri="http://schemas.openxmlformats.org/presentationml/2006/ole">
-            <mc:AlternateContent xmlns:mc="http://schemas.openxmlformats.org/markup-compatibility/2006">
-              <mc:Choice xmlns:v="urn:schemas-microsoft-com:vml" Requires="v">
-                <p:oleObj name="Equation" r:id="rId4" imgW="1257300" imgH="241300" progId="Equation.DSMT4">
-                  <p:embed/>
-                </p:oleObj>
-              </mc:Choice>
-              <mc:Fallback>
-                <p:oleObj name="Equation" r:id="rId4" imgW="1257300" imgH="241300" progId="Equation.DSMT4">
-                  <p:embed/>
-                  <p:pic>
-                    <p:nvPicPr>
-                      <p:cNvPr id="0" name=""/>
-                      <p:cNvPicPr>
-                        <a:picLocks noChangeAspect="1" noChangeArrowheads="1"/>
-                      </p:cNvPicPr>
-                      <p:nvPr/>
-                    </p:nvPicPr>
-                    <p:blipFill>
-                      <a:blip r:embed="rId5">
-                        <a:extLst>
-                          <a:ext uri="{28A0092B-C50C-407E-A947-70E740481C1C}">
-                            <a14:useLocalDpi xmlns:a14="http://schemas.microsoft.com/office/drawing/2010/main" val="0"/>
-                          </a:ext>
-                        </a:extLst>
-                      </a:blip>
-                      <a:srcRect/>
-                      <a:stretch>
-                        <a:fillRect/>
-                      </a:stretch>
-                    </p:blipFill>
-                    <p:spPr bwMode="auto">
-                      <a:xfrm>
-                        <a:off x="2898776" y="2298700"/>
-                        <a:ext cx="2511425" cy="482600"/>
-                      </a:xfrm>
-                      <a:prstGeom prst="rect">
-                        <a:avLst/>
-                      </a:prstGeom>
-                      <a:noFill/>
-                      <a:ln>
-                        <a:noFill/>
-                      </a:ln>
-                      <a:effectLst/>
-                      <a:extLst>
-                        <a:ext uri="{909E8E84-426E-40DD-AFC4-6F175D3DCCD1}">
-                          <a14:hiddenFill xmlns:a14="http://schemas.microsoft.com/office/drawing/2010/main">
-                            <a:solidFill>
-                              <a:srgbClr val="FFFFFF"/>
-                            </a:solidFill>
-                          </a14:hiddenFill>
-                        </a:ext>
-                        <a:ext uri="{91240B29-F687-4F45-9708-019B960494DF}">
-                          <a14:hiddenLine xmlns:a14="http://schemas.microsoft.com/office/drawing/2010/main" w="9525">
-                            <a:solidFill>
-                              <a:srgbClr val="000000"/>
-                            </a:solidFill>
-                            <a:miter lim="800000"/>
-                            <a:headEnd/>
-                            <a:tailEnd/>
-                          </a14:hiddenLine>
-                        </a:ext>
-                        <a:ext uri="{AF507438-7753-43E0-B8FC-AC1667EBCBE1}">
-                          <a14:hiddenEffects xmlns:a14="http://schemas.microsoft.com/office/drawing/2010/main">
-                            <a:effectLst>
-                              <a:outerShdw dist="35921" dir="2700000" algn="ctr" rotWithShape="0">
-                                <a:srgbClr val="808080"/>
-                              </a:outerShdw>
-                            </a:effectLst>
-                          </a14:hiddenEffects>
-                        </a:ext>
-                      </a:extLst>
-                    </p:spPr>
-                  </p:pic>
-                </p:oleObj>
-              </mc:Fallback>
-            </mc:AlternateContent>
-          </a:graphicData>
-        </a:graphic>
-      </p:graphicFrame>
-      <p:graphicFrame>
-        <p:nvGraphicFramePr>
-          <p:cNvPr id="51205" name="Object 6"/>
-          <p:cNvGraphicFramePr>
-            <a:graphicFrameLocks noGrp="1" noChangeAspect="1"/>
-          </p:cNvGraphicFramePr>
-          <p:nvPr>
-            <p:ph sz="half" idx="2"/>
-          </p:nvPr>
-        </p:nvGraphicFramePr>
-        <p:xfrm>
-          <a:off x="7059614" y="2298700"/>
-          <a:ext cx="1627187" cy="457200"/>
-        </p:xfrm>
-        <a:graphic>
-          <a:graphicData uri="http://schemas.openxmlformats.org/presentationml/2006/ole">
-            <mc:AlternateContent xmlns:mc="http://schemas.openxmlformats.org/markup-compatibility/2006">
-              <mc:Choice xmlns:v="urn:schemas-microsoft-com:vml" Requires="v">
-                <p:oleObj name="Equation" r:id="rId6" imgW="812447" imgH="228501" progId="Equation.DSMT4">
-                  <p:embed/>
-                </p:oleObj>
-              </mc:Choice>
-              <mc:Fallback>
-                <p:oleObj name="Equation" r:id="rId6" imgW="812447" imgH="228501" progId="Equation.DSMT4">
-                  <p:embed/>
-                  <p:pic>
-                    <p:nvPicPr>
-                      <p:cNvPr id="0" name=""/>
-                      <p:cNvPicPr>
-                        <a:picLocks noChangeAspect="1" noChangeArrowheads="1"/>
-                      </p:cNvPicPr>
-                      <p:nvPr/>
-                    </p:nvPicPr>
-                    <p:blipFill>
-                      <a:blip r:embed="rId7">
-                        <a:extLst>
-                          <a:ext uri="{28A0092B-C50C-407E-A947-70E740481C1C}">
-                            <a14:useLocalDpi xmlns:a14="http://schemas.microsoft.com/office/drawing/2010/main" val="0"/>
-                          </a:ext>
-                        </a:extLst>
-                      </a:blip>
-                      <a:srcRect/>
-                      <a:stretch>
-                        <a:fillRect/>
-                      </a:stretch>
-                    </p:blipFill>
-                    <p:spPr bwMode="auto">
-                      <a:xfrm>
-                        <a:off x="7059614" y="2298700"/>
-                        <a:ext cx="1627187" cy="457200"/>
-                      </a:xfrm>
-                      <a:prstGeom prst="rect">
-                        <a:avLst/>
-                      </a:prstGeom>
-                      <a:noFill/>
-                      <a:ln>
-                        <a:noFill/>
-                      </a:ln>
-                      <a:effectLst/>
-                      <a:extLst>
-                        <a:ext uri="{909E8E84-426E-40DD-AFC4-6F175D3DCCD1}">
-                          <a14:hiddenFill xmlns:a14="http://schemas.microsoft.com/office/drawing/2010/main">
-                            <a:solidFill>
-                              <a:srgbClr val="FFFFFF"/>
-                            </a:solidFill>
-                          </a14:hiddenFill>
-                        </a:ext>
-                        <a:ext uri="{91240B29-F687-4F45-9708-019B960494DF}">
-                          <a14:hiddenLine xmlns:a14="http://schemas.microsoft.com/office/drawing/2010/main" w="9525">
-                            <a:solidFill>
-                              <a:srgbClr val="000000"/>
-                            </a:solidFill>
-                            <a:miter lim="800000"/>
-                            <a:headEnd/>
-                            <a:tailEnd/>
-                          </a14:hiddenLine>
-                        </a:ext>
-                        <a:ext uri="{AF507438-7753-43E0-B8FC-AC1667EBCBE1}">
-                          <a14:hiddenEffects xmlns:a14="http://schemas.microsoft.com/office/drawing/2010/main">
-                            <a:effectLst>
-                              <a:outerShdw dist="35921" dir="2700000" algn="ctr" rotWithShape="0">
-                                <a:srgbClr val="808080"/>
-                              </a:outerShdw>
-                            </a:effectLst>
-                          </a14:hiddenEffects>
-                        </a:ext>
-                      </a:extLst>
-                    </p:spPr>
-                  </p:pic>
-                </p:oleObj>
-              </mc:Fallback>
-            </mc:AlternateContent>
-          </a:graphicData>
-        </a:graphic>
-      </p:graphicFrame>
       <p:sp>
         <p:nvSpPr>
           <p:cNvPr id="15367" name="Slide Number Placeholder 1"/>
@@ -26317,6 +25775,116 @@
                 <a:srgbClr val="000000"/>
               </a:solidFill>
             </a:endParaRPr>
+          </a:p>
+        </p:txBody>
+      </p:sp>
+      <p:sp>
+        <p:nvSpPr>
+          <p:cNvPr id="51206" name="TextBox 51205"/>
+          <p:cNvSpPr txBox="1"/>
+          <p:nvPr/>
+        </p:nvSpPr>
+        <p:spPr>
+          <a:xfrm>
+            <a:off x="2898776" y="2298700"/>
+            <a:ext cx="2954215" cy="482600"/>
+          </a:xfrm>
+          <a:prstGeom prst="rect">
+            <a:avLst/>
+          </a:prstGeom>
+          <a:noFill/>
+        </p:spPr>
+        <p:txBody>
+          <a:bodyPr wrap="square" anchor="ctr" lIns="0" rIns="0" tIns="0" bIns="0">
+            <a:spAutoFit/>
+          </a:bodyPr>
+          <a:lstStyle/>
+          <a:p>
+            <a:r>
+              <a:rPr sz="1900">
+                <a:latin typeface="Cambria"/>
+              </a:rPr>
+              <a:t>L</a:t>
+            </a:r>
+            <a:r>
+              <a:rPr sz="1900" baseline="-25000">
+                <a:latin typeface="Cambria"/>
+              </a:rPr>
+              <a:t>a</a:t>
+            </a:r>
+            <a:r>
+              <a:rPr sz="1900">
+                <a:latin typeface="Cambria"/>
+              </a:rPr>
+              <a:t> = ℓ</a:t>
+            </a:r>
+            <a:r>
+              <a:rPr sz="1900" baseline="-25000">
+                <a:latin typeface="Cambria"/>
+              </a:rPr>
+              <a:t>∞</a:t>
+            </a:r>
+            <a:r>
+              <a:rPr sz="1900">
+                <a:latin typeface="Cambria"/>
+              </a:rPr>
+              <a:t>(1 − e</a:t>
+            </a:r>
+            <a:r>
+              <a:rPr sz="1900" baseline="30000">
+                <a:latin typeface="Cambria"/>
+              </a:rPr>
+              <a:t>−κa</a:t>
+            </a:r>
+            <a:r>
+              <a:rPr sz="1900">
+                <a:latin typeface="Cambria"/>
+              </a:rPr>
+              <a:t>) + ε</a:t>
+            </a:r>
+          </a:p>
+        </p:txBody>
+      </p:sp>
+      <p:sp>
+        <p:nvSpPr>
+          <p:cNvPr id="51207" name="TextBox 51206"/>
+          <p:cNvSpPr txBox="1"/>
+          <p:nvPr/>
+        </p:nvSpPr>
+        <p:spPr>
+          <a:xfrm>
+            <a:off x="7059614" y="2298700"/>
+            <a:ext cx="1688123" cy="457200"/>
+          </a:xfrm>
+          <a:prstGeom prst="rect">
+            <a:avLst/>
+          </a:prstGeom>
+          <a:noFill/>
+        </p:spPr>
+        <p:txBody>
+          <a:bodyPr wrap="square" anchor="ctr" lIns="0" rIns="0" tIns="0" bIns="0">
+            <a:spAutoFit/>
+          </a:bodyPr>
+          <a:lstStyle/>
+          <a:p>
+            <a:r>
+              <a:rPr sz="1900">
+                <a:latin typeface="Cambria"/>
+              </a:rPr>
+              <a:t>ε ~ N(0, σ</a:t>
+            </a:r>
+            <a:r>
+              <a:rPr sz="1900" baseline="30000">
+                <a:latin typeface="Cambria"/>
+              </a:rPr>
+              <a:t>2</a:t>
+            </a:r>
+            <a:r>
+              <a:rPr sz="1900">
+                <a:latin typeface="Cambria"/>
+              </a:rPr>
+              <a:t>)</a:t>
+            </a:r>
           </a:p>
         </p:txBody>
       </p:sp>
@@ -26540,13 +26108,27 @@
             </a:pPr>
             <a:r>
               <a:rPr lang="en-AU" altLang="en-US" dirty="0"/>
-              <a:t>Estimate the values for    , </a:t>
+              <a:t>Estimate the values for </a:t>
             </a:r>
             <a:r>
               <a:rPr lang="en-AU" altLang="en-US" dirty="0">
-                <a:sym typeface="Symbol" charset="2"/>
+                <a:latin typeface="Cambria"/>
               </a:rPr>
-              <a:t>, and  from the age and </a:t>
+              <a:t>ℓ</a:t>
+            </a:r>
+            <a:r>
+              <a:rPr lang="en-AU" altLang="en-US" dirty="0" baseline="-25000">
+                <a:latin typeface="Cambria"/>
+              </a:rPr>
+              <a:t>∞</a:t>
+            </a:r>
+            <a:r>
+              <a:rPr lang="en-AU" altLang="en-US" dirty="0"/>
+              <a:t>, </a:t>
+            </a:r>
+            <a:r>
+              <a:rPr lang="en-AU" altLang="en-US" dirty="0"/>
+              <a:t>κ, and σ from the age and </a:t>
             </a:r>
           </a:p>
           <a:p>
@@ -26697,101 +26279,6 @@
           </a:p>
         </p:txBody>
       </p:sp>
-      <p:graphicFrame>
-        <p:nvGraphicFramePr>
-          <p:cNvPr id="53251" name="Object 5"/>
-          <p:cNvGraphicFramePr>
-            <a:graphicFrameLocks noGrp="1" noChangeAspect="1"/>
-          </p:cNvGraphicFramePr>
-          <p:nvPr>
-            <p:ph idx="1"/>
-          </p:nvPr>
-        </p:nvGraphicFramePr>
-        <p:xfrm>
-          <a:off x="5105400" y="1676400"/>
-          <a:ext cx="338138" cy="406400"/>
-        </p:xfrm>
-        <a:graphic>
-          <a:graphicData uri="http://schemas.openxmlformats.org/presentationml/2006/ole">
-            <mc:AlternateContent xmlns:mc="http://schemas.openxmlformats.org/markup-compatibility/2006">
-              <mc:Choice xmlns:v="urn:schemas-microsoft-com:vml" Requires="v">
-                <p:oleObj name="Equation" r:id="rId3" imgW="190500" imgH="228600" progId="Equation.DSMT4">
-                  <p:embed/>
-                </p:oleObj>
-              </mc:Choice>
-              <mc:Fallback>
-                <p:oleObj name="Equation" r:id="rId3" imgW="190500" imgH="228600" progId="Equation.DSMT4">
-                  <p:embed/>
-                  <p:pic>
-                    <p:nvPicPr>
-                      <p:cNvPr id="0" name=""/>
-                      <p:cNvPicPr>
-                        <a:picLocks noChangeAspect="1" noChangeArrowheads="1"/>
-                      </p:cNvPicPr>
-                      <p:nvPr/>
-                    </p:nvPicPr>
-                    <p:blipFill>
-                      <a:blip r:embed="rId4">
-                        <a:extLst>
-                          <a:ext uri="{28A0092B-C50C-407E-A947-70E740481C1C}">
-                            <a14:useLocalDpi xmlns:a14="http://schemas.microsoft.com/office/drawing/2010/main" val="0"/>
-                          </a:ext>
-                        </a:extLst>
-                      </a:blip>
-                      <a:srcRect/>
-                      <a:stretch>
-                        <a:fillRect/>
-                      </a:stretch>
-                    </p:blipFill>
-                    <p:spPr bwMode="auto">
-                      <a:xfrm>
-                        <a:off x="5105400" y="1676400"/>
-                        <a:ext cx="338138" cy="406400"/>
-                      </a:xfrm>
-                      <a:prstGeom prst="rect">
-                        <a:avLst/>
-                      </a:prstGeom>
-                      <a:noFill/>
-                      <a:ln>
-                        <a:noFill/>
-                      </a:ln>
-                      <a:effectLst/>
-                      <a:extLst>
-                        <a:ext uri="{909E8E84-426E-40DD-AFC4-6F175D3DCCD1}">
-                          <a14:hiddenFill xmlns:a14="http://schemas.microsoft.com/office/drawing/2010/main">
-                            <a:solidFill>
-                              <a:srgbClr val="FFFFFF"/>
-                            </a:solidFill>
-                          </a14:hiddenFill>
-                        </a:ext>
-                        <a:ext uri="{91240B29-F687-4F45-9708-019B960494DF}">
-                          <a14:hiddenLine xmlns:a14="http://schemas.microsoft.com/office/drawing/2010/main" w="9525">
-                            <a:solidFill>
-                              <a:srgbClr val="000000"/>
-                            </a:solidFill>
-                            <a:miter lim="800000"/>
-                            <a:headEnd/>
-                            <a:tailEnd/>
-                          </a14:hiddenLine>
-                        </a:ext>
-                        <a:ext uri="{AF507438-7753-43E0-B8FC-AC1667EBCBE1}">
-                          <a14:hiddenEffects xmlns:a14="http://schemas.microsoft.com/office/drawing/2010/main">
-                            <a:effectLst>
-                              <a:outerShdw dist="35921" dir="2700000" algn="ctr" rotWithShape="0">
-                                <a:srgbClr val="808080"/>
-                              </a:outerShdw>
-                            </a:effectLst>
-                          </a14:hiddenEffects>
-                        </a:ext>
-                      </a:extLst>
-                    </p:spPr>
-                  </p:pic>
-                </p:oleObj>
-              </mc:Fallback>
-            </mc:AlternateContent>
-          </a:graphicData>
-        </a:graphic>
-      </p:graphicFrame>
       <p:sp>
         <p:nvSpPr>
           <p:cNvPr id="12293" name="Slide Number Placeholder 1"/>
@@ -27989,9 +27476,8 @@
                 <a:solidFill>
                   <a:schemeClr val="hlink"/>
                 </a:solidFill>
-                <a:sym typeface="Symbol" charset="2"/>
               </a:rPr>
-              <a:t></a:t>
+              <a:t>•</a:t>
             </a:r>
           </a:p>
         </p:txBody>
@@ -28159,9 +27645,8 @@
                 <a:solidFill>
                   <a:schemeClr val="hlink"/>
                 </a:solidFill>
-                <a:sym typeface="Symbol" charset="2"/>
               </a:rPr>
-              <a:t></a:t>
+              <a:t>•</a:t>
             </a:r>
           </a:p>
         </p:txBody>
@@ -28329,9 +27814,8 @@
                 <a:solidFill>
                   <a:schemeClr val="hlink"/>
                 </a:solidFill>
-                <a:sym typeface="Symbol" charset="2"/>
               </a:rPr>
-              <a:t></a:t>
+              <a:t>•</a:t>
             </a:r>
           </a:p>
         </p:txBody>
@@ -28499,9 +27983,8 @@
                 <a:solidFill>
                   <a:schemeClr val="hlink"/>
                 </a:solidFill>
-                <a:sym typeface="Symbol" charset="2"/>
               </a:rPr>
-              <a:t></a:t>
+              <a:t>•</a:t>
             </a:r>
           </a:p>
         </p:txBody>
@@ -28669,9 +28152,8 @@
                 <a:solidFill>
                   <a:schemeClr val="hlink"/>
                 </a:solidFill>
-                <a:sym typeface="Symbol" charset="2"/>
               </a:rPr>
-              <a:t></a:t>
+              <a:t>•</a:t>
             </a:r>
           </a:p>
         </p:txBody>
@@ -28839,9 +28321,8 @@
                 <a:solidFill>
                   <a:schemeClr val="hlink"/>
                 </a:solidFill>
-                <a:sym typeface="Symbol" charset="2"/>
               </a:rPr>
-              <a:t></a:t>
+              <a:t>•</a:t>
             </a:r>
           </a:p>
         </p:txBody>
@@ -29009,9 +28490,8 @@
                 <a:solidFill>
                   <a:schemeClr val="hlink"/>
                 </a:solidFill>
-                <a:sym typeface="Symbol" charset="2"/>
               </a:rPr>
-              <a:t></a:t>
+              <a:t>•</a:t>
             </a:r>
           </a:p>
         </p:txBody>
@@ -31784,106 +31264,6 @@
           </a:p>
         </p:txBody>
       </p:sp>
-      <p:graphicFrame>
-        <p:nvGraphicFramePr>
-          <p:cNvPr id="304130" name="Object 5"/>
-          <p:cNvGraphicFramePr>
-            <a:graphicFrameLocks noGrp="1" noChangeAspect="1"/>
-          </p:cNvGraphicFramePr>
-          <p:nvPr>
-            <p:ph sz="half" idx="1"/>
-            <p:extLst>
-              <p:ext uri="{D42A27DB-BD31-4B8C-83A1-F6EECF244321}">
-                <p14:modId xmlns:p14="http://schemas.microsoft.com/office/powerpoint/2010/main" val="3137149165"/>
-              </p:ext>
-            </p:extLst>
-          </p:nvPr>
-        </p:nvGraphicFramePr>
-        <p:xfrm>
-          <a:off x="2590800" y="2772509"/>
-          <a:ext cx="2511425" cy="482600"/>
-        </p:xfrm>
-        <a:graphic>
-          <a:graphicData uri="http://schemas.openxmlformats.org/presentationml/2006/ole">
-            <mc:AlternateContent xmlns:mc="http://schemas.openxmlformats.org/markup-compatibility/2006">
-              <mc:Choice xmlns:v="urn:schemas-microsoft-com:vml" Requires="v">
-                <p:oleObj name="Equation" r:id="rId3" imgW="1257300" imgH="241300" progId="Equation.DSMT4">
-                  <p:embed/>
-                </p:oleObj>
-              </mc:Choice>
-              <mc:Fallback>
-                <p:oleObj name="Equation" r:id="rId3" imgW="1257300" imgH="241300" progId="Equation.DSMT4">
-                  <p:embed/>
-                  <p:pic>
-                    <p:nvPicPr>
-                      <p:cNvPr id="0" name=""/>
-                      <p:cNvPicPr>
-                        <a:picLocks noChangeAspect="1" noChangeArrowheads="1"/>
-                      </p:cNvPicPr>
-                      <p:nvPr/>
-                    </p:nvPicPr>
-                    <p:blipFill>
-                      <a:blip r:embed="rId4">
-                        <a:extLst>
-                          <a:ext uri="{28A0092B-C50C-407E-A947-70E740481C1C}">
-                            <a14:useLocalDpi xmlns:a14="http://schemas.microsoft.com/office/drawing/2010/main" val="0"/>
-                          </a:ext>
-                        </a:extLst>
-                      </a:blip>
-                      <a:srcRect/>
-                      <a:stretch>
-                        <a:fillRect/>
-                      </a:stretch>
-                    </p:blipFill>
-                    <p:spPr bwMode="auto">
-                      <a:xfrm>
-                        <a:off x="2590800" y="2772509"/>
-                        <a:ext cx="2511425" cy="482600"/>
-                      </a:xfrm>
-                      <a:prstGeom prst="rect">
-                        <a:avLst/>
-                      </a:prstGeom>
-                      <a:noFill/>
-                      <a:ln>
-                        <a:noFill/>
-                      </a:ln>
-                      <a:effectLst/>
-                      <a:extLst>
-                        <a:ext uri="{909E8E84-426E-40DD-AFC4-6F175D3DCCD1}">
-                          <a14:hiddenFill xmlns:a14="http://schemas.microsoft.com/office/drawing/2010/main">
-                            <a:solidFill>
-                              <a:srgbClr val="FFFFFF"/>
-                            </a:solidFill>
-                          </a14:hiddenFill>
-                        </a:ext>
-                        <a:ext uri="{91240B29-F687-4F45-9708-019B960494DF}">
-                          <a14:hiddenLine xmlns:a14="http://schemas.microsoft.com/office/drawing/2010/main" w="9525">
-                            <a:solidFill>
-                              <a:srgbClr val="000000"/>
-                            </a:solidFill>
-                            <a:miter lim="800000"/>
-                            <a:headEnd/>
-                            <a:tailEnd/>
-                          </a14:hiddenLine>
-                        </a:ext>
-                        <a:ext uri="{AF507438-7753-43E0-B8FC-AC1667EBCBE1}">
-                          <a14:hiddenEffects xmlns:a14="http://schemas.microsoft.com/office/drawing/2010/main">
-                            <a:effectLst>
-                              <a:outerShdw dist="35921" dir="2700000" algn="ctr" rotWithShape="0">
-                                <a:srgbClr val="808080"/>
-                              </a:outerShdw>
-                            </a:effectLst>
-                          </a14:hiddenEffects>
-                        </a:ext>
-                      </a:extLst>
-                    </p:spPr>
-                  </p:pic>
-                </p:oleObj>
-              </mc:Fallback>
-            </mc:AlternateContent>
-          </a:graphicData>
-        </a:graphic>
-      </p:graphicFrame>
       <p:sp>
         <p:nvSpPr>
           <p:cNvPr id="10244" name="Text Box 4"/>
@@ -32049,106 +31429,6 @@
           </a:p>
         </p:txBody>
       </p:sp>
-      <p:graphicFrame>
-        <p:nvGraphicFramePr>
-          <p:cNvPr id="304132" name="Object 7"/>
-          <p:cNvGraphicFramePr>
-            <a:graphicFrameLocks noGrp="1" noChangeAspect="1"/>
-          </p:cNvGraphicFramePr>
-          <p:nvPr>
-            <p:ph sz="half" idx="2"/>
-            <p:extLst>
-              <p:ext uri="{D42A27DB-BD31-4B8C-83A1-F6EECF244321}">
-                <p14:modId xmlns:p14="http://schemas.microsoft.com/office/powerpoint/2010/main" val="2164039034"/>
-              </p:ext>
-            </p:extLst>
-          </p:nvPr>
-        </p:nvGraphicFramePr>
-        <p:xfrm>
-          <a:off x="7162799" y="2696309"/>
-          <a:ext cx="1627188" cy="457200"/>
-        </p:xfrm>
-        <a:graphic>
-          <a:graphicData uri="http://schemas.openxmlformats.org/presentationml/2006/ole">
-            <mc:AlternateContent xmlns:mc="http://schemas.openxmlformats.org/markup-compatibility/2006">
-              <mc:Choice xmlns:v="urn:schemas-microsoft-com:vml" Requires="v">
-                <p:oleObj name="Equation" r:id="rId5" imgW="812447" imgH="228501" progId="Equation.DSMT4">
-                  <p:embed/>
-                </p:oleObj>
-              </mc:Choice>
-              <mc:Fallback>
-                <p:oleObj name="Equation" r:id="rId5" imgW="812447" imgH="228501" progId="Equation.DSMT4">
-                  <p:embed/>
-                  <p:pic>
-                    <p:nvPicPr>
-                      <p:cNvPr id="0" name=""/>
-                      <p:cNvPicPr>
-                        <a:picLocks noChangeAspect="1" noChangeArrowheads="1"/>
-                      </p:cNvPicPr>
-                      <p:nvPr/>
-                    </p:nvPicPr>
-                    <p:blipFill>
-                      <a:blip r:embed="rId6">
-                        <a:extLst>
-                          <a:ext uri="{28A0092B-C50C-407E-A947-70E740481C1C}">
-                            <a14:useLocalDpi xmlns:a14="http://schemas.microsoft.com/office/drawing/2010/main" val="0"/>
-                          </a:ext>
-                        </a:extLst>
-                      </a:blip>
-                      <a:srcRect/>
-                      <a:stretch>
-                        <a:fillRect/>
-                      </a:stretch>
-                    </p:blipFill>
-                    <p:spPr bwMode="auto">
-                      <a:xfrm>
-                        <a:off x="7162799" y="2696309"/>
-                        <a:ext cx="1627188" cy="457200"/>
-                      </a:xfrm>
-                      <a:prstGeom prst="rect">
-                        <a:avLst/>
-                      </a:prstGeom>
-                      <a:noFill/>
-                      <a:ln>
-                        <a:noFill/>
-                      </a:ln>
-                      <a:effectLst/>
-                      <a:extLst>
-                        <a:ext uri="{909E8E84-426E-40DD-AFC4-6F175D3DCCD1}">
-                          <a14:hiddenFill xmlns:a14="http://schemas.microsoft.com/office/drawing/2010/main">
-                            <a:solidFill>
-                              <a:srgbClr val="FFFFFF"/>
-                            </a:solidFill>
-                          </a14:hiddenFill>
-                        </a:ext>
-                        <a:ext uri="{91240B29-F687-4F45-9708-019B960494DF}">
-                          <a14:hiddenLine xmlns:a14="http://schemas.microsoft.com/office/drawing/2010/main" w="9525">
-                            <a:solidFill>
-                              <a:srgbClr val="000000"/>
-                            </a:solidFill>
-                            <a:miter lim="800000"/>
-                            <a:headEnd/>
-                            <a:tailEnd/>
-                          </a14:hiddenLine>
-                        </a:ext>
-                        <a:ext uri="{AF507438-7753-43E0-B8FC-AC1667EBCBE1}">
-                          <a14:hiddenEffects xmlns:a14="http://schemas.microsoft.com/office/drawing/2010/main">
-                            <a:effectLst>
-                              <a:outerShdw dist="35921" dir="2700000" algn="ctr" rotWithShape="0">
-                                <a:srgbClr val="808080"/>
-                              </a:outerShdw>
-                            </a:effectLst>
-                          </a14:hiddenEffects>
-                        </a:ext>
-                      </a:extLst>
-                    </p:spPr>
-                  </p:pic>
-                </p:oleObj>
-              </mc:Fallback>
-            </mc:AlternateContent>
-          </a:graphicData>
-        </a:graphic>
-      </p:graphicFrame>
       <p:sp>
         <p:nvSpPr>
           <p:cNvPr id="10246" name="Text Box 9"/>
@@ -33205,6 +32485,116 @@
               <a:t>of error?</a:t>
             </a:r>
             <a:endParaRPr lang="en-AU" altLang="en-US" dirty="0"/>
+          </a:p>
+        </p:txBody>
+      </p:sp>
+      <p:sp>
+        <p:nvSpPr>
+          <p:cNvPr id="304133" name="TextBox 304132"/>
+          <p:cNvSpPr txBox="1"/>
+          <p:nvPr/>
+        </p:nvSpPr>
+        <p:spPr>
+          <a:xfrm>
+            <a:off x="2590800" y="2772509"/>
+            <a:ext cx="2954215" cy="482600"/>
+          </a:xfrm>
+          <a:prstGeom prst="rect">
+            <a:avLst/>
+          </a:prstGeom>
+          <a:noFill/>
+        </p:spPr>
+        <p:txBody>
+          <a:bodyPr wrap="square" anchor="ctr" lIns="0" rIns="0" tIns="0" bIns="0">
+            <a:spAutoFit/>
+          </a:bodyPr>
+          <a:lstStyle/>
+          <a:p>
+            <a:r>
+              <a:rPr sz="1900">
+                <a:latin typeface="Cambria"/>
+              </a:rPr>
+              <a:t>L</a:t>
+            </a:r>
+            <a:r>
+              <a:rPr sz="1900" baseline="-25000">
+                <a:latin typeface="Cambria"/>
+              </a:rPr>
+              <a:t>a</a:t>
+            </a:r>
+            <a:r>
+              <a:rPr sz="1900">
+                <a:latin typeface="Cambria"/>
+              </a:rPr>
+              <a:t> = ℓ</a:t>
+            </a:r>
+            <a:r>
+              <a:rPr sz="1900" baseline="-25000">
+                <a:latin typeface="Cambria"/>
+              </a:rPr>
+              <a:t>∞</a:t>
+            </a:r>
+            <a:r>
+              <a:rPr sz="1900">
+                <a:latin typeface="Cambria"/>
+              </a:rPr>
+              <a:t>(1 − e</a:t>
+            </a:r>
+            <a:r>
+              <a:rPr sz="1900" baseline="30000">
+                <a:latin typeface="Cambria"/>
+              </a:rPr>
+              <a:t>−κa</a:t>
+            </a:r>
+            <a:r>
+              <a:rPr sz="1900">
+                <a:latin typeface="Cambria"/>
+              </a:rPr>
+              <a:t>) + ε</a:t>
+            </a:r>
+          </a:p>
+        </p:txBody>
+      </p:sp>
+      <p:sp>
+        <p:nvSpPr>
+          <p:cNvPr id="304134" name="TextBox 304133"/>
+          <p:cNvSpPr txBox="1"/>
+          <p:nvPr/>
+        </p:nvSpPr>
+        <p:spPr>
+          <a:xfrm>
+            <a:off x="7162799" y="2696309"/>
+            <a:ext cx="1688123" cy="457200"/>
+          </a:xfrm>
+          <a:prstGeom prst="rect">
+            <a:avLst/>
+          </a:prstGeom>
+          <a:noFill/>
+        </p:spPr>
+        <p:txBody>
+          <a:bodyPr wrap="square" anchor="ctr" lIns="0" rIns="0" tIns="0" bIns="0">
+            <a:spAutoFit/>
+          </a:bodyPr>
+          <a:lstStyle/>
+          <a:p>
+            <a:r>
+              <a:rPr sz="1900">
+                <a:latin typeface="Cambria"/>
+              </a:rPr>
+              <a:t>ε ~ N(0, σ</a:t>
+            </a:r>
+            <a:r>
+              <a:rPr sz="1900" baseline="30000">
+                <a:latin typeface="Cambria"/>
+              </a:rPr>
+              <a:t>2</a:t>
+            </a:r>
+            <a:r>
+              <a:rPr sz="1900">
+                <a:latin typeface="Cambria"/>
+              </a:rPr>
+              <a:t>)</a:t>
+            </a:r>
           </a:p>
         </p:txBody>
       </p:sp>
@@ -35445,106 +34835,6 @@
           </a:p>
         </p:txBody>
       </p:sp>
-      <p:graphicFrame>
-        <p:nvGraphicFramePr>
-          <p:cNvPr id="314371" name="Object 6"/>
-          <p:cNvGraphicFramePr>
-            <a:graphicFrameLocks noGrp="1" noChangeAspect="1"/>
-          </p:cNvGraphicFramePr>
-          <p:nvPr>
-            <p:ph sz="half" idx="1"/>
-            <p:extLst>
-              <p:ext uri="{D42A27DB-BD31-4B8C-83A1-F6EECF244321}">
-                <p14:modId xmlns:p14="http://schemas.microsoft.com/office/powerpoint/2010/main" val="350454184"/>
-              </p:ext>
-            </p:extLst>
-          </p:nvPr>
-        </p:nvGraphicFramePr>
-        <p:xfrm>
-          <a:off x="4572001" y="3225679"/>
-          <a:ext cx="2335213" cy="482600"/>
-        </p:xfrm>
-        <a:graphic>
-          <a:graphicData uri="http://schemas.openxmlformats.org/presentationml/2006/ole">
-            <mc:AlternateContent xmlns:mc="http://schemas.openxmlformats.org/markup-compatibility/2006">
-              <mc:Choice xmlns:v="urn:schemas-microsoft-com:vml" Requires="v">
-                <p:oleObj name="Equation" r:id="rId3" imgW="1168400" imgH="241300" progId="Equation.DSMT4">
-                  <p:embed/>
-                </p:oleObj>
-              </mc:Choice>
-              <mc:Fallback>
-                <p:oleObj name="Equation" r:id="rId3" imgW="1168400" imgH="241300" progId="Equation.DSMT4">
-                  <p:embed/>
-                  <p:pic>
-                    <p:nvPicPr>
-                      <p:cNvPr id="0" name=""/>
-                      <p:cNvPicPr>
-                        <a:picLocks noChangeAspect="1" noChangeArrowheads="1"/>
-                      </p:cNvPicPr>
-                      <p:nvPr/>
-                    </p:nvPicPr>
-                    <p:blipFill>
-                      <a:blip r:embed="rId4">
-                        <a:extLst>
-                          <a:ext uri="{28A0092B-C50C-407E-A947-70E740481C1C}">
-                            <a14:useLocalDpi xmlns:a14="http://schemas.microsoft.com/office/drawing/2010/main" val="0"/>
-                          </a:ext>
-                        </a:extLst>
-                      </a:blip>
-                      <a:srcRect/>
-                      <a:stretch>
-                        <a:fillRect/>
-                      </a:stretch>
-                    </p:blipFill>
-                    <p:spPr bwMode="auto">
-                      <a:xfrm>
-                        <a:off x="4572001" y="3225679"/>
-                        <a:ext cx="2335213" cy="482600"/>
-                      </a:xfrm>
-                      <a:prstGeom prst="rect">
-                        <a:avLst/>
-                      </a:prstGeom>
-                      <a:noFill/>
-                      <a:ln>
-                        <a:noFill/>
-                      </a:ln>
-                      <a:effectLst/>
-                      <a:extLst>
-                        <a:ext uri="{909E8E84-426E-40DD-AFC4-6F175D3DCCD1}">
-                          <a14:hiddenFill xmlns:a14="http://schemas.microsoft.com/office/drawing/2010/main">
-                            <a:solidFill>
-                              <a:srgbClr val="FFFFFF"/>
-                            </a:solidFill>
-                          </a14:hiddenFill>
-                        </a:ext>
-                        <a:ext uri="{91240B29-F687-4F45-9708-019B960494DF}">
-                          <a14:hiddenLine xmlns:a14="http://schemas.microsoft.com/office/drawing/2010/main" w="9525">
-                            <a:solidFill>
-                              <a:srgbClr val="000000"/>
-                            </a:solidFill>
-                            <a:miter lim="800000"/>
-                            <a:headEnd/>
-                            <a:tailEnd/>
-                          </a14:hiddenLine>
-                        </a:ext>
-                        <a:ext uri="{AF507438-7753-43E0-B8FC-AC1667EBCBE1}">
-                          <a14:hiddenEffects xmlns:a14="http://schemas.microsoft.com/office/drawing/2010/main">
-                            <a:effectLst>
-                              <a:outerShdw dist="35921" dir="2700000" algn="ctr" rotWithShape="0">
-                                <a:srgbClr val="808080"/>
-                              </a:outerShdw>
-                            </a:effectLst>
-                          </a14:hiddenEffects>
-                        </a:ext>
-                      </a:extLst>
-                    </p:spPr>
-                  </p:pic>
-                </p:oleObj>
-              </mc:Fallback>
-            </mc:AlternateContent>
-          </a:graphicData>
-        </a:graphic>
-      </p:graphicFrame>
       <p:sp>
         <p:nvSpPr>
           <p:cNvPr id="14341" name="Text Box 4"/>
@@ -35710,106 +35000,6 @@
           </a:p>
         </p:txBody>
       </p:sp>
-      <p:graphicFrame>
-        <p:nvGraphicFramePr>
-          <p:cNvPr id="14342" name="Object 8"/>
-          <p:cNvGraphicFramePr>
-            <a:graphicFrameLocks noGrp="1" noChangeAspect="1"/>
-          </p:cNvGraphicFramePr>
-          <p:nvPr>
-            <p:ph sz="half" idx="2"/>
-            <p:extLst>
-              <p:ext uri="{D42A27DB-BD31-4B8C-83A1-F6EECF244321}">
-                <p14:modId xmlns:p14="http://schemas.microsoft.com/office/powerpoint/2010/main" val="2580099472"/>
-              </p:ext>
-            </p:extLst>
-          </p:nvPr>
-        </p:nvGraphicFramePr>
-        <p:xfrm>
-          <a:off x="3610347" y="5045175"/>
-          <a:ext cx="2663825" cy="582612"/>
-        </p:xfrm>
-        <a:graphic>
-          <a:graphicData uri="http://schemas.openxmlformats.org/presentationml/2006/ole">
-            <mc:AlternateContent xmlns:mc="http://schemas.openxmlformats.org/markup-compatibility/2006">
-              <mc:Choice xmlns:v="urn:schemas-microsoft-com:vml" Requires="v">
-                <p:oleObj name="Equation" r:id="rId5" imgW="1333500" imgH="292100" progId="Equation.DSMT4">
-                  <p:embed/>
-                </p:oleObj>
-              </mc:Choice>
-              <mc:Fallback>
-                <p:oleObj name="Equation" r:id="rId5" imgW="1333500" imgH="292100" progId="Equation.DSMT4">
-                  <p:embed/>
-                  <p:pic>
-                    <p:nvPicPr>
-                      <p:cNvPr id="0" name=""/>
-                      <p:cNvPicPr>
-                        <a:picLocks noChangeAspect="1" noChangeArrowheads="1"/>
-                      </p:cNvPicPr>
-                      <p:nvPr/>
-                    </p:nvPicPr>
-                    <p:blipFill>
-                      <a:blip r:embed="rId6">
-                        <a:extLst>
-                          <a:ext uri="{28A0092B-C50C-407E-A947-70E740481C1C}">
-                            <a14:useLocalDpi xmlns:a14="http://schemas.microsoft.com/office/drawing/2010/main" val="0"/>
-                          </a:ext>
-                        </a:extLst>
-                      </a:blip>
-                      <a:srcRect/>
-                      <a:stretch>
-                        <a:fillRect/>
-                      </a:stretch>
-                    </p:blipFill>
-                    <p:spPr bwMode="auto">
-                      <a:xfrm>
-                        <a:off x="3610347" y="5045175"/>
-                        <a:ext cx="2663825" cy="582612"/>
-                      </a:xfrm>
-                      <a:prstGeom prst="rect">
-                        <a:avLst/>
-                      </a:prstGeom>
-                      <a:noFill/>
-                      <a:ln>
-                        <a:noFill/>
-                      </a:ln>
-                      <a:effectLst/>
-                      <a:extLst>
-                        <a:ext uri="{909E8E84-426E-40DD-AFC4-6F175D3DCCD1}">
-                          <a14:hiddenFill xmlns:a14="http://schemas.microsoft.com/office/drawing/2010/main">
-                            <a:solidFill>
-                              <a:srgbClr val="FFFFFF"/>
-                            </a:solidFill>
-                          </a14:hiddenFill>
-                        </a:ext>
-                        <a:ext uri="{91240B29-F687-4F45-9708-019B960494DF}">
-                          <a14:hiddenLine xmlns:a14="http://schemas.microsoft.com/office/drawing/2010/main" w="9525">
-                            <a:solidFill>
-                              <a:srgbClr val="000000"/>
-                            </a:solidFill>
-                            <a:miter lim="800000"/>
-                            <a:headEnd/>
-                            <a:tailEnd/>
-                          </a14:hiddenLine>
-                        </a:ext>
-                        <a:ext uri="{AF507438-7753-43E0-B8FC-AC1667EBCBE1}">
-                          <a14:hiddenEffects xmlns:a14="http://schemas.microsoft.com/office/drawing/2010/main">
-                            <a:effectLst>
-                              <a:outerShdw dist="35921" dir="2700000" algn="ctr" rotWithShape="0">
-                                <a:srgbClr val="808080"/>
-                              </a:outerShdw>
-                            </a:effectLst>
-                          </a14:hiddenEffects>
-                        </a:ext>
-                      </a:extLst>
-                    </p:spPr>
-                  </p:pic>
-                </p:oleObj>
-              </mc:Fallback>
-            </mc:AlternateContent>
-          </a:graphicData>
-        </a:graphic>
-      </p:graphicFrame>
       <p:sp>
         <p:nvSpPr>
           <p:cNvPr id="14343" name="Text Box 10"/>
@@ -36300,6 +35490,128 @@
                 <a:latin typeface="Cambria"/>
               </a:rPr>
               <a:t> )</a:t>
+            </a:r>
+          </a:p>
+        </p:txBody>
+      </p:sp>
+      <p:sp>
+        <p:nvSpPr>
+          <p:cNvPr id="314373" name="TextBox 314372"/>
+          <p:cNvSpPr txBox="1"/>
+          <p:nvPr/>
+        </p:nvSpPr>
+        <p:spPr>
+          <a:xfrm>
+            <a:off x="4572001" y="3225679"/>
+            <a:ext cx="2672861" cy="482600"/>
+          </a:xfrm>
+          <a:prstGeom prst="rect">
+            <a:avLst/>
+          </a:prstGeom>
+          <a:noFill/>
+        </p:spPr>
+        <p:txBody>
+          <a:bodyPr wrap="square" anchor="ctr" lIns="0" rIns="0" tIns="0" bIns="0">
+            <a:spAutoFit/>
+          </a:bodyPr>
+          <a:lstStyle/>
+          <a:p>
+            <a:r>
+              <a:rPr sz="1900">
+                <a:latin typeface="Cambria"/>
+              </a:rPr>
+              <a:t>L(a) = ℓ</a:t>
+            </a:r>
+            <a:r>
+              <a:rPr sz="1900" baseline="-25000">
+                <a:latin typeface="Cambria"/>
+              </a:rPr>
+              <a:t>∞</a:t>
+            </a:r>
+            <a:r>
+              <a:rPr sz="1900">
+                <a:latin typeface="Cambria"/>
+              </a:rPr>
+              <a:t>(1 − e</a:t>
+            </a:r>
+            <a:r>
+              <a:rPr sz="1900" baseline="30000">
+                <a:latin typeface="Cambria"/>
+              </a:rPr>
+              <a:t>−κa</a:t>
+            </a:r>
+            <a:r>
+              <a:rPr sz="1900">
+                <a:latin typeface="Cambria"/>
+              </a:rPr>
+              <a:t>)</a:t>
+            </a:r>
+          </a:p>
+        </p:txBody>
+      </p:sp>
+      <p:sp>
+        <p:nvSpPr>
+          <p:cNvPr id="314374" name="TextBox 314373"/>
+          <p:cNvSpPr txBox="1"/>
+          <p:nvPr/>
+        </p:nvSpPr>
+        <p:spPr>
+          <a:xfrm>
+            <a:off x="3610347" y="5045175"/>
+            <a:ext cx="6752492" cy="582612"/>
+          </a:xfrm>
+          <a:prstGeom prst="rect">
+            <a:avLst/>
+          </a:prstGeom>
+          <a:noFill/>
+        </p:spPr>
+        <p:txBody>
+          <a:bodyPr wrap="square" anchor="ctr" lIns="0" rIns="0" tIns="0" bIns="0">
+            <a:spAutoFit/>
+          </a:bodyPr>
+          <a:lstStyle/>
+          <a:p>
+            <a:r>
+              <a:rPr sz="1900">
+                <a:latin typeface="Cambria"/>
+              </a:rPr>
+              <a:t>L = 1 / (√(2π) σ) · exp( −(L(a) − L</a:t>
+            </a:r>
+            <a:r>
+              <a:rPr sz="1900" baseline="-25000">
+                <a:latin typeface="Cambria"/>
+              </a:rPr>
+              <a:t>a</a:t>
+            </a:r>
+            <a:r>
+              <a:rPr sz="1900">
+                <a:latin typeface="Cambria"/>
+              </a:rPr>
+              <a:t>)</a:t>
+            </a:r>
+            <a:r>
+              <a:rPr sz="1900" baseline="30000">
+                <a:latin typeface="Cambria"/>
+              </a:rPr>
+              <a:t>2</a:t>
+            </a:r>
+            <a:r>
+              <a:rPr sz="1900">
+                <a:latin typeface="Cambria"/>
+              </a:rPr>
+              <a:t> / (2σ</a:t>
+            </a:r>
+            <a:r>
+              <a:rPr sz="1900" baseline="30000">
+                <a:latin typeface="Cambria"/>
+              </a:rPr>
+              <a:t>2</a:t>
+            </a:r>
+            <a:r>
+              <a:rPr sz="1900">
+                <a:latin typeface="Cambria"/>
+              </a:rPr>
+              <a:t>) )</a:t>
             </a:r>
           </a:p>
         </p:txBody>
@@ -36783,101 +36095,6 @@
           </a:p>
         </p:txBody>
       </p:sp>
-      <p:graphicFrame>
-        <p:nvGraphicFramePr>
-          <p:cNvPr id="316419" name="Object 5"/>
-          <p:cNvGraphicFramePr>
-            <a:graphicFrameLocks noGrp="1" noChangeAspect="1"/>
-          </p:cNvGraphicFramePr>
-          <p:nvPr>
-            <p:ph sz="half" idx="1"/>
-          </p:nvPr>
-        </p:nvGraphicFramePr>
-        <p:xfrm>
-          <a:off x="3889376" y="1744663"/>
-          <a:ext cx="2663825" cy="584200"/>
-        </p:xfrm>
-        <a:graphic>
-          <a:graphicData uri="http://schemas.openxmlformats.org/presentationml/2006/ole">
-            <mc:AlternateContent xmlns:mc="http://schemas.openxmlformats.org/markup-compatibility/2006">
-              <mc:Choice xmlns:v="urn:schemas-microsoft-com:vml" Requires="v">
-                <p:oleObj name="Equation" r:id="rId3" imgW="1333500" imgH="292100" progId="Equation.DSMT4">
-                  <p:embed/>
-                </p:oleObj>
-              </mc:Choice>
-              <mc:Fallback>
-                <p:oleObj name="Equation" r:id="rId3" imgW="1333500" imgH="292100" progId="Equation.DSMT4">
-                  <p:embed/>
-                  <p:pic>
-                    <p:nvPicPr>
-                      <p:cNvPr id="0" name=""/>
-                      <p:cNvPicPr>
-                        <a:picLocks noChangeAspect="1" noChangeArrowheads="1"/>
-                      </p:cNvPicPr>
-                      <p:nvPr/>
-                    </p:nvPicPr>
-                    <p:blipFill>
-                      <a:blip r:embed="rId4">
-                        <a:extLst>
-                          <a:ext uri="{28A0092B-C50C-407E-A947-70E740481C1C}">
-                            <a14:useLocalDpi xmlns:a14="http://schemas.microsoft.com/office/drawing/2010/main" val="0"/>
-                          </a:ext>
-                        </a:extLst>
-                      </a:blip>
-                      <a:srcRect/>
-                      <a:stretch>
-                        <a:fillRect/>
-                      </a:stretch>
-                    </p:blipFill>
-                    <p:spPr bwMode="auto">
-                      <a:xfrm>
-                        <a:off x="3889376" y="1744663"/>
-                        <a:ext cx="2663825" cy="584200"/>
-                      </a:xfrm>
-                      <a:prstGeom prst="rect">
-                        <a:avLst/>
-                      </a:prstGeom>
-                      <a:noFill/>
-                      <a:ln>
-                        <a:noFill/>
-                      </a:ln>
-                      <a:effectLst/>
-                      <a:extLst>
-                        <a:ext uri="{909E8E84-426E-40DD-AFC4-6F175D3DCCD1}">
-                          <a14:hiddenFill xmlns:a14="http://schemas.microsoft.com/office/drawing/2010/main">
-                            <a:solidFill>
-                              <a:srgbClr val="FFFFFF"/>
-                            </a:solidFill>
-                          </a14:hiddenFill>
-                        </a:ext>
-                        <a:ext uri="{91240B29-F687-4F45-9708-019B960494DF}">
-                          <a14:hiddenLine xmlns:a14="http://schemas.microsoft.com/office/drawing/2010/main" w="9525">
-                            <a:solidFill>
-                              <a:srgbClr val="000000"/>
-                            </a:solidFill>
-                            <a:miter lim="800000"/>
-                            <a:headEnd/>
-                            <a:tailEnd/>
-                          </a14:hiddenLine>
-                        </a:ext>
-                        <a:ext uri="{AF507438-7753-43E0-B8FC-AC1667EBCBE1}">
-                          <a14:hiddenEffects xmlns:a14="http://schemas.microsoft.com/office/drawing/2010/main">
-                            <a:effectLst>
-                              <a:outerShdw dist="35921" dir="2700000" algn="ctr" rotWithShape="0">
-                                <a:srgbClr val="808080"/>
-                              </a:outerShdw>
-                            </a:effectLst>
-                          </a14:hiddenEffects>
-                        </a:ext>
-                      </a:extLst>
-                    </p:spPr>
-                  </p:pic>
-                </p:oleObj>
-              </mc:Fallback>
-            </mc:AlternateContent>
-          </a:graphicData>
-        </a:graphic>
-      </p:graphicFrame>
       <p:sp>
         <p:nvSpPr>
           <p:cNvPr id="15365" name="Text Box 4"/>
@@ -37538,101 +36755,6 @@
           </a:p>
         </p:txBody>
       </p:sp>
-      <p:graphicFrame>
-        <p:nvGraphicFramePr>
-          <p:cNvPr id="316424" name="Object 12"/>
-          <p:cNvGraphicFramePr>
-            <a:graphicFrameLocks noGrp="1" noChangeAspect="1"/>
-          </p:cNvGraphicFramePr>
-          <p:nvPr>
-            <p:ph sz="half" idx="2"/>
-          </p:nvPr>
-        </p:nvGraphicFramePr>
-        <p:xfrm>
-          <a:off x="3965575" y="3954463"/>
-          <a:ext cx="3119438" cy="741362"/>
-        </p:xfrm>
-        <a:graphic>
-          <a:graphicData uri="http://schemas.openxmlformats.org/presentationml/2006/ole">
-            <mc:AlternateContent xmlns:mc="http://schemas.openxmlformats.org/markup-compatibility/2006">
-              <mc:Choice xmlns:v="urn:schemas-microsoft-com:vml" Requires="v">
-                <p:oleObj name="Equation" r:id="rId5" imgW="1549400" imgH="368300" progId="Equation.DSMT4">
-                  <p:embed/>
-                </p:oleObj>
-              </mc:Choice>
-              <mc:Fallback>
-                <p:oleObj name="Equation" r:id="rId5" imgW="1549400" imgH="368300" progId="Equation.DSMT4">
-                  <p:embed/>
-                  <p:pic>
-                    <p:nvPicPr>
-                      <p:cNvPr id="0" name=""/>
-                      <p:cNvPicPr>
-                        <a:picLocks noChangeAspect="1" noChangeArrowheads="1"/>
-                      </p:cNvPicPr>
-                      <p:nvPr/>
-                    </p:nvPicPr>
-                    <p:blipFill>
-                      <a:blip r:embed="rId6">
-                        <a:extLst>
-                          <a:ext uri="{28A0092B-C50C-407E-A947-70E740481C1C}">
-                            <a14:useLocalDpi xmlns:a14="http://schemas.microsoft.com/office/drawing/2010/main" val="0"/>
-                          </a:ext>
-                        </a:extLst>
-                      </a:blip>
-                      <a:srcRect/>
-                      <a:stretch>
-                        <a:fillRect/>
-                      </a:stretch>
-                    </p:blipFill>
-                    <p:spPr bwMode="auto">
-                      <a:xfrm>
-                        <a:off x="3965575" y="3954463"/>
-                        <a:ext cx="3119438" cy="741362"/>
-                      </a:xfrm>
-                      <a:prstGeom prst="rect">
-                        <a:avLst/>
-                      </a:prstGeom>
-                      <a:noFill/>
-                      <a:ln>
-                        <a:noFill/>
-                      </a:ln>
-                      <a:effectLst/>
-                      <a:extLst>
-                        <a:ext uri="{909E8E84-426E-40DD-AFC4-6F175D3DCCD1}">
-                          <a14:hiddenFill xmlns:a14="http://schemas.microsoft.com/office/drawing/2010/main">
-                            <a:solidFill>
-                              <a:srgbClr val="FFFFFF"/>
-                            </a:solidFill>
-                          </a14:hiddenFill>
-                        </a:ext>
-                        <a:ext uri="{91240B29-F687-4F45-9708-019B960494DF}">
-                          <a14:hiddenLine xmlns:a14="http://schemas.microsoft.com/office/drawing/2010/main" w="9525">
-                            <a:solidFill>
-                              <a:srgbClr val="000000"/>
-                            </a:solidFill>
-                            <a:miter lim="800000"/>
-                            <a:headEnd/>
-                            <a:tailEnd/>
-                          </a14:hiddenLine>
-                        </a:ext>
-                        <a:ext uri="{AF507438-7753-43E0-B8FC-AC1667EBCBE1}">
-                          <a14:hiddenEffects xmlns:a14="http://schemas.microsoft.com/office/drawing/2010/main">
-                            <a:effectLst>
-                              <a:outerShdw dist="35921" dir="2700000" algn="ctr" rotWithShape="0">
-                                <a:srgbClr val="808080"/>
-                              </a:outerShdw>
-                            </a:effectLst>
-                          </a14:hiddenEffects>
-                        </a:ext>
-                      </a:extLst>
-                    </p:spPr>
-                  </p:pic>
-                </p:oleObj>
-              </mc:Fallback>
-            </mc:AlternateContent>
-          </a:graphicData>
-        </a:graphic>
-      </p:graphicFrame>
       <p:sp>
         <p:nvSpPr>
           <p:cNvPr id="15370" name="Text Box 14"/>
@@ -37928,6 +37050,152 @@
               <a:t>. </a:t>
             </a:r>
             <a:endParaRPr lang="en-US" sz="2000" dirty="0"/>
+          </a:p>
+        </p:txBody>
+      </p:sp>
+      <p:sp>
+        <p:nvSpPr>
+          <p:cNvPr id="316425" name="TextBox 316424"/>
+          <p:cNvSpPr txBox="1"/>
+          <p:nvPr/>
+        </p:nvSpPr>
+        <p:spPr>
+          <a:xfrm>
+            <a:off x="3889376" y="1744663"/>
+            <a:ext cx="6752492" cy="584200"/>
+          </a:xfrm>
+          <a:prstGeom prst="rect">
+            <a:avLst/>
+          </a:prstGeom>
+          <a:noFill/>
+        </p:spPr>
+        <p:txBody>
+          <a:bodyPr wrap="square" anchor="ctr" lIns="0" rIns="0" tIns="0" bIns="0">
+            <a:spAutoFit/>
+          </a:bodyPr>
+          <a:lstStyle/>
+          <a:p>
+            <a:r>
+              <a:rPr sz="1900">
+                <a:latin typeface="Cambria"/>
+              </a:rPr>
+              <a:t>L = 1 / (√(2π) σ) · exp( −(L(a) − L</a:t>
+            </a:r>
+            <a:r>
+              <a:rPr sz="1900" baseline="-25000">
+                <a:latin typeface="Cambria"/>
+              </a:rPr>
+              <a:t>a</a:t>
+            </a:r>
+            <a:r>
+              <a:rPr sz="1900">
+                <a:latin typeface="Cambria"/>
+              </a:rPr>
+              <a:t>)</a:t>
+            </a:r>
+            <a:r>
+              <a:rPr sz="1900" baseline="30000">
+                <a:latin typeface="Cambria"/>
+              </a:rPr>
+              <a:t>2</a:t>
+            </a:r>
+            <a:r>
+              <a:rPr sz="1900">
+                <a:latin typeface="Cambria"/>
+              </a:rPr>
+              <a:t> / (2σ</a:t>
+            </a:r>
+            <a:r>
+              <a:rPr sz="1900" baseline="30000">
+                <a:latin typeface="Cambria"/>
+              </a:rPr>
+              <a:t>2</a:t>
+            </a:r>
+            <a:r>
+              <a:rPr sz="1900">
+                <a:latin typeface="Cambria"/>
+              </a:rPr>
+              <a:t>) )</a:t>
+            </a:r>
+          </a:p>
+        </p:txBody>
+      </p:sp>
+      <p:sp>
+        <p:nvSpPr>
+          <p:cNvPr id="316426" name="TextBox 316425"/>
+          <p:cNvSpPr txBox="1"/>
+          <p:nvPr/>
+        </p:nvSpPr>
+        <p:spPr>
+          <a:xfrm>
+            <a:off x="3965575" y="3954463"/>
+            <a:ext cx="7174523" cy="741362"/>
+          </a:xfrm>
+          <a:prstGeom prst="rect">
+            <a:avLst/>
+          </a:prstGeom>
+          <a:noFill/>
+        </p:spPr>
+        <p:txBody>
+          <a:bodyPr wrap="square" anchor="ctr" lIns="0" rIns="0" tIns="0" bIns="0">
+            <a:spAutoFit/>
+          </a:bodyPr>
+          <a:lstStyle/>
+          <a:p>
+            <a:r>
+              <a:rPr sz="1900">
+                <a:latin typeface="Cambria"/>
+              </a:rPr>
+              <a:t>L = ∏</a:t>
+            </a:r>
+            <a:r>
+              <a:rPr sz="1900" baseline="-25000">
+                <a:latin typeface="Cambria"/>
+              </a:rPr>
+              <a:t>a</a:t>
+            </a:r>
+            <a:r>
+              <a:rPr sz="1900">
+                <a:latin typeface="Cambria"/>
+              </a:rPr>
+              <a:t> 1 / (√(2π) σ) · exp( −(L(a) − L</a:t>
+            </a:r>
+            <a:r>
+              <a:rPr sz="1900" baseline="-25000">
+                <a:latin typeface="Cambria"/>
+              </a:rPr>
+              <a:t>a</a:t>
+            </a:r>
+            <a:r>
+              <a:rPr sz="1900">
+                <a:latin typeface="Cambria"/>
+              </a:rPr>
+              <a:t>)</a:t>
+            </a:r>
+            <a:r>
+              <a:rPr sz="1900" baseline="30000">
+                <a:latin typeface="Cambria"/>
+              </a:rPr>
+              <a:t>2</a:t>
+            </a:r>
+            <a:r>
+              <a:rPr sz="1900">
+                <a:latin typeface="Cambria"/>
+              </a:rPr>
+              <a:t> / (2σ</a:t>
+            </a:r>
+            <a:r>
+              <a:rPr sz="1900" baseline="30000">
+                <a:latin typeface="Cambria"/>
+              </a:rPr>
+              <a:t>2</a:t>
+            </a:r>
+            <a:r>
+              <a:rPr sz="1900">
+                <a:latin typeface="Cambria"/>
+              </a:rPr>
+              <a:t>) )</a:t>
+            </a:r>
           </a:p>
         </p:txBody>
       </p:sp>

--- a/Day4_Likelihood_BayesI/FW536_Day4_Morning_maximum likelihod_accessible.pptx
+++ b/Day4_Likelihood_BayesI/FW536_Day4_Morning_maximum likelihod_accessible.pptx
@@ -5,7 +5,7 @@
     <p:sldMasterId id="2147483648" r:id="rId1"/>
   </p:sldMasterIdLst>
   <p:notesMasterIdLst>
-    <p:notesMasterId r:id="rId40"/>
+    <p:notesMasterId r:id="rId39"/>
   </p:notesMasterIdLst>
   <p:sldIdLst>
     <p:sldId id="275" r:id="rId2"/>
@@ -42,10 +42,9 @@
     <p:sldId id="320" r:id="rId33"/>
     <p:sldId id="321" r:id="rId34"/>
     <p:sldId id="324" r:id="rId35"/>
-    <p:sldId id="325" r:id="rId36"/>
-    <p:sldId id="326" r:id="rId37"/>
-    <p:sldId id="339" r:id="rId38"/>
-    <p:sldId id="340" r:id="rId39"/>
+    <p:sldId id="326" r:id="rId36"/>
+    <p:sldId id="339" r:id="rId37"/>
+    <p:sldId id="340" r:id="rId38"/>
   </p:sldIdLst>
   <p:sldSz cx="12192000" cy="6858000"/>
   <p:notesSz cx="6858000" cy="9144000"/>
@@ -234,7 +233,7 @@
           <a:p>
             <a:fld id="{F8E9C380-474B-B64D-9372-661513FD5BBF}" type="datetimeFigureOut">
               <a:rPr lang="en-US" smtClean="0"/>
-              <a:t>9/21/25</a:t>
+              <a:t>7/16/26</a:t>
             </a:fld>
             <a:endParaRPr lang="en-US"/>
           </a:p>
@@ -641,7 +640,7 @@
               </a14:hiddenEffects>
             </a:ext>
             <a:ext uri="{FAA26D3D-D897-4be2-8F04-BA451C77F1D7}">
-              <ma14:placeholderFlag xmlns="" xmlns:ma14="http://schemas.microsoft.com/office/mac/drawingml/2011/main" val="1"/>
+              <ma14:placeholderFlag xmlns:ma14="http://schemas.microsoft.com/office/mac/drawingml/2011/main" xmlns="" val="1"/>
             </a:ext>
           </a:extLst>
         </p:spPr>
@@ -726,7 +725,7 @@
               </a14:hiddenEffects>
             </a:ext>
             <a:ext uri="{FAA26D3D-D897-4be2-8F04-BA451C77F1D7}">
-              <ma14:placeholderFlag xmlns="" xmlns:ma14="http://schemas.microsoft.com/office/mac/drawingml/2011/main" val="1"/>
+              <ma14:placeholderFlag xmlns:ma14="http://schemas.microsoft.com/office/mac/drawingml/2011/main" xmlns="" val="1"/>
             </a:ext>
           </a:extLst>
         </p:spPr>
@@ -811,7 +810,7 @@
               </a14:hiddenEffects>
             </a:ext>
             <a:ext uri="{FAA26D3D-D897-4be2-8F04-BA451C77F1D7}">
-              <ma14:placeholderFlag xmlns="" xmlns:ma14="http://schemas.microsoft.com/office/mac/drawingml/2011/main" val="1"/>
+              <ma14:placeholderFlag xmlns:ma14="http://schemas.microsoft.com/office/mac/drawingml/2011/main" xmlns="" val="1"/>
             </a:ext>
           </a:extLst>
         </p:spPr>
@@ -896,7 +895,7 @@
               </a14:hiddenEffects>
             </a:ext>
             <a:ext uri="{FAA26D3D-D897-4be2-8F04-BA451C77F1D7}">
-              <ma14:placeholderFlag xmlns="" xmlns:ma14="http://schemas.microsoft.com/office/mac/drawingml/2011/main" val="1"/>
+              <ma14:placeholderFlag xmlns:ma14="http://schemas.microsoft.com/office/mac/drawingml/2011/main" xmlns="" val="1"/>
             </a:ext>
           </a:extLst>
         </p:spPr>
@@ -981,7 +980,7 @@
               </a14:hiddenEffects>
             </a:ext>
             <a:ext uri="{FAA26D3D-D897-4be2-8F04-BA451C77F1D7}">
-              <ma14:placeholderFlag xmlns="" xmlns:ma14="http://schemas.microsoft.com/office/mac/drawingml/2011/main" val="1"/>
+              <ma14:placeholderFlag xmlns:ma14="http://schemas.microsoft.com/office/mac/drawingml/2011/main" xmlns="" val="1"/>
             </a:ext>
           </a:extLst>
         </p:spPr>
@@ -1066,7 +1065,7 @@
               </a14:hiddenEffects>
             </a:ext>
             <a:ext uri="{FAA26D3D-D897-4be2-8F04-BA451C77F1D7}">
-              <ma14:placeholderFlag xmlns="" xmlns:ma14="http://schemas.microsoft.com/office/mac/drawingml/2011/main" val="1"/>
+              <ma14:placeholderFlag xmlns:ma14="http://schemas.microsoft.com/office/mac/drawingml/2011/main" xmlns="" val="1"/>
             </a:ext>
           </a:extLst>
         </p:spPr>
@@ -1151,7 +1150,7 @@
               </a14:hiddenEffects>
             </a:ext>
             <a:ext uri="{FAA26D3D-D897-4be2-8F04-BA451C77F1D7}">
-              <ma14:placeholderFlag xmlns="" xmlns:ma14="http://schemas.microsoft.com/office/mac/drawingml/2011/main" val="1"/>
+              <ma14:placeholderFlag xmlns:ma14="http://schemas.microsoft.com/office/mac/drawingml/2011/main" xmlns="" val="1"/>
             </a:ext>
           </a:extLst>
         </p:spPr>
@@ -1236,7 +1235,7 @@
               </a14:hiddenEffects>
             </a:ext>
             <a:ext uri="{FAA26D3D-D897-4be2-8F04-BA451C77F1D7}">
-              <ma14:placeholderFlag xmlns="" xmlns:ma14="http://schemas.microsoft.com/office/mac/drawingml/2011/main" val="1"/>
+              <ma14:placeholderFlag xmlns:ma14="http://schemas.microsoft.com/office/mac/drawingml/2011/main" xmlns="" val="1"/>
             </a:ext>
           </a:extLst>
         </p:spPr>
@@ -1321,7 +1320,7 @@
               </a14:hiddenEffects>
             </a:ext>
             <a:ext uri="{FAA26D3D-D897-4be2-8F04-BA451C77F1D7}">
-              <ma14:placeholderFlag xmlns="" xmlns:ma14="http://schemas.microsoft.com/office/mac/drawingml/2011/main" val="1"/>
+              <ma14:placeholderFlag xmlns:ma14="http://schemas.microsoft.com/office/mac/drawingml/2011/main" xmlns="" val="1"/>
             </a:ext>
           </a:extLst>
         </p:spPr>
@@ -1406,7 +1405,7 @@
               </a14:hiddenEffects>
             </a:ext>
             <a:ext uri="{FAA26D3D-D897-4be2-8F04-BA451C77F1D7}">
-              <ma14:placeholderFlag xmlns="" xmlns:ma14="http://schemas.microsoft.com/office/mac/drawingml/2011/main" val="1"/>
+              <ma14:placeholderFlag xmlns:ma14="http://schemas.microsoft.com/office/mac/drawingml/2011/main" xmlns="" val="1"/>
             </a:ext>
           </a:extLst>
         </p:spPr>
@@ -1491,7 +1490,7 @@
               </a14:hiddenEffects>
             </a:ext>
             <a:ext uri="{FAA26D3D-D897-4be2-8F04-BA451C77F1D7}">
-              <ma14:placeholderFlag xmlns="" xmlns:ma14="http://schemas.microsoft.com/office/mac/drawingml/2011/main" val="1"/>
+              <ma14:placeholderFlag xmlns:ma14="http://schemas.microsoft.com/office/mac/drawingml/2011/main" xmlns="" val="1"/>
             </a:ext>
           </a:extLst>
         </p:spPr>
@@ -1576,7 +1575,7 @@
               </a14:hiddenEffects>
             </a:ext>
             <a:ext uri="{FAA26D3D-D897-4be2-8F04-BA451C77F1D7}">
-              <ma14:placeholderFlag xmlns="" xmlns:ma14="http://schemas.microsoft.com/office/mac/drawingml/2011/main" val="1"/>
+              <ma14:placeholderFlag xmlns:ma14="http://schemas.microsoft.com/office/mac/drawingml/2011/main" xmlns="" val="1"/>
             </a:ext>
           </a:extLst>
         </p:spPr>
@@ -1661,7 +1660,7 @@
               </a14:hiddenEffects>
             </a:ext>
             <a:ext uri="{FAA26D3D-D897-4be2-8F04-BA451C77F1D7}">
-              <ma14:placeholderFlag xmlns="" xmlns:ma14="http://schemas.microsoft.com/office/mac/drawingml/2011/main" val="1"/>
+              <ma14:placeholderFlag xmlns:ma14="http://schemas.microsoft.com/office/mac/drawingml/2011/main" xmlns="" val="1"/>
             </a:ext>
           </a:extLst>
         </p:spPr>
@@ -1746,7 +1745,7 @@
               </a14:hiddenEffects>
             </a:ext>
             <a:ext uri="{FAA26D3D-D897-4be2-8F04-BA451C77F1D7}">
-              <ma14:placeholderFlag xmlns="" xmlns:ma14="http://schemas.microsoft.com/office/mac/drawingml/2011/main" val="1"/>
+              <ma14:placeholderFlag xmlns:ma14="http://schemas.microsoft.com/office/mac/drawingml/2011/main" xmlns="" val="1"/>
             </a:ext>
           </a:extLst>
         </p:spPr>
@@ -1831,7 +1830,7 @@
               </a14:hiddenEffects>
             </a:ext>
             <a:ext uri="{FAA26D3D-D897-4be2-8F04-BA451C77F1D7}">
-              <ma14:placeholderFlag xmlns="" xmlns:ma14="http://schemas.microsoft.com/office/mac/drawingml/2011/main" val="1"/>
+              <ma14:placeholderFlag xmlns:ma14="http://schemas.microsoft.com/office/mac/drawingml/2011/main" xmlns="" val="1"/>
             </a:ext>
           </a:extLst>
         </p:spPr>
@@ -1916,7 +1915,7 @@
               </a14:hiddenEffects>
             </a:ext>
             <a:ext uri="{FAA26D3D-D897-4be2-8F04-BA451C77F1D7}">
-              <ma14:placeholderFlag xmlns="" xmlns:ma14="http://schemas.microsoft.com/office/mac/drawingml/2011/main" val="1"/>
+              <ma14:placeholderFlag xmlns:ma14="http://schemas.microsoft.com/office/mac/drawingml/2011/main" xmlns="" val="1"/>
             </a:ext>
           </a:extLst>
         </p:spPr>
@@ -2001,7 +2000,7 @@
               </a14:hiddenEffects>
             </a:ext>
             <a:ext uri="{FAA26D3D-D897-4be2-8F04-BA451C77F1D7}">
-              <ma14:placeholderFlag xmlns="" xmlns:ma14="http://schemas.microsoft.com/office/mac/drawingml/2011/main" val="1"/>
+              <ma14:placeholderFlag xmlns:ma14="http://schemas.microsoft.com/office/mac/drawingml/2011/main" xmlns="" val="1"/>
             </a:ext>
           </a:extLst>
         </p:spPr>
@@ -2086,7 +2085,7 @@
               </a14:hiddenEffects>
             </a:ext>
             <a:ext uri="{FAA26D3D-D897-4be2-8F04-BA451C77F1D7}">
-              <ma14:placeholderFlag xmlns="" xmlns:ma14="http://schemas.microsoft.com/office/mac/drawingml/2011/main" val="1"/>
+              <ma14:placeholderFlag xmlns:ma14="http://schemas.microsoft.com/office/mac/drawingml/2011/main" xmlns="" val="1"/>
             </a:ext>
           </a:extLst>
         </p:spPr>
@@ -2171,7 +2170,7 @@
               </a14:hiddenEffects>
             </a:ext>
             <a:ext uri="{FAA26D3D-D897-4be2-8F04-BA451C77F1D7}">
-              <ma14:placeholderFlag xmlns="" xmlns:ma14="http://schemas.microsoft.com/office/mac/drawingml/2011/main" val="1"/>
+              <ma14:placeholderFlag xmlns:ma14="http://schemas.microsoft.com/office/mac/drawingml/2011/main" xmlns="" val="1"/>
             </a:ext>
           </a:extLst>
         </p:spPr>
@@ -2256,7 +2255,7 @@
               </a14:hiddenEffects>
             </a:ext>
             <a:ext uri="{FAA26D3D-D897-4be2-8F04-BA451C77F1D7}">
-              <ma14:placeholderFlag xmlns="" xmlns:ma14="http://schemas.microsoft.com/office/mac/drawingml/2011/main" val="1"/>
+              <ma14:placeholderFlag xmlns:ma14="http://schemas.microsoft.com/office/mac/drawingml/2011/main" xmlns="" val="1"/>
             </a:ext>
           </a:extLst>
         </p:spPr>
@@ -2341,7 +2340,7 @@
               </a14:hiddenEffects>
             </a:ext>
             <a:ext uri="{FAA26D3D-D897-4be2-8F04-BA451C77F1D7}">
-              <ma14:placeholderFlag xmlns="" xmlns:ma14="http://schemas.microsoft.com/office/mac/drawingml/2011/main" val="1"/>
+              <ma14:placeholderFlag xmlns:ma14="http://schemas.microsoft.com/office/mac/drawingml/2011/main" xmlns="" val="1"/>
             </a:ext>
           </a:extLst>
         </p:spPr>
@@ -2426,7 +2425,7 @@
               </a14:hiddenEffects>
             </a:ext>
             <a:ext uri="{FAA26D3D-D897-4be2-8F04-BA451C77F1D7}">
-              <ma14:placeholderFlag xmlns="" xmlns:ma14="http://schemas.microsoft.com/office/mac/drawingml/2011/main" val="1"/>
+              <ma14:placeholderFlag xmlns:ma14="http://schemas.microsoft.com/office/mac/drawingml/2011/main" xmlns="" val="1"/>
             </a:ext>
           </a:extLst>
         </p:spPr>
@@ -2511,7 +2510,7 @@
               </a14:hiddenEffects>
             </a:ext>
             <a:ext uri="{FAA26D3D-D897-4be2-8F04-BA451C77F1D7}">
-              <ma14:placeholderFlag xmlns="" xmlns:ma14="http://schemas.microsoft.com/office/mac/drawingml/2011/main" val="1"/>
+              <ma14:placeholderFlag xmlns:ma14="http://schemas.microsoft.com/office/mac/drawingml/2011/main" xmlns="" val="1"/>
             </a:ext>
           </a:extLst>
         </p:spPr>
@@ -2596,7 +2595,7 @@
               </a14:hiddenEffects>
             </a:ext>
             <a:ext uri="{FAA26D3D-D897-4be2-8F04-BA451C77F1D7}">
-              <ma14:placeholderFlag xmlns="" xmlns:ma14="http://schemas.microsoft.com/office/mac/drawingml/2011/main" val="1"/>
+              <ma14:placeholderFlag xmlns:ma14="http://schemas.microsoft.com/office/mac/drawingml/2011/main" xmlns="" val="1"/>
             </a:ext>
           </a:extLst>
         </p:spPr>
@@ -2681,7 +2680,7 @@
               </a14:hiddenEffects>
             </a:ext>
             <a:ext uri="{FAA26D3D-D897-4be2-8F04-BA451C77F1D7}">
-              <ma14:placeholderFlag xmlns="" xmlns:ma14="http://schemas.microsoft.com/office/mac/drawingml/2011/main" val="1"/>
+              <ma14:placeholderFlag xmlns:ma14="http://schemas.microsoft.com/office/mac/drawingml/2011/main" xmlns="" val="1"/>
             </a:ext>
           </a:extLst>
         </p:spPr>
@@ -2766,7 +2765,7 @@
               </a14:hiddenEffects>
             </a:ext>
             <a:ext uri="{FAA26D3D-D897-4be2-8F04-BA451C77F1D7}">
-              <ma14:placeholderFlag xmlns="" xmlns:ma14="http://schemas.microsoft.com/office/mac/drawingml/2011/main" val="1"/>
+              <ma14:placeholderFlag xmlns:ma14="http://schemas.microsoft.com/office/mac/drawingml/2011/main" xmlns="" val="1"/>
             </a:ext>
           </a:extLst>
         </p:spPr>
@@ -2851,7 +2850,7 @@
               </a14:hiddenEffects>
             </a:ext>
             <a:ext uri="{FAA26D3D-D897-4be2-8F04-BA451C77F1D7}">
-              <ma14:placeholderFlag xmlns="" xmlns:ma14="http://schemas.microsoft.com/office/mac/drawingml/2011/main" val="1"/>
+              <ma14:placeholderFlag xmlns:ma14="http://schemas.microsoft.com/office/mac/drawingml/2011/main" xmlns="" val="1"/>
             </a:ext>
           </a:extLst>
         </p:spPr>
@@ -2900,7 +2899,7 @@
       </p:grpSpPr>
       <p:sp>
         <p:nvSpPr>
-          <p:cNvPr id="32770" name="Slide Image Placeholder 1"/>
+          <p:cNvPr id="27650" name="Slide Image Placeholder 1"/>
           <p:cNvSpPr>
             <a:spLocks noGrp="1" noRot="1" noChangeAspect="1" noTextEdit="1"/>
           </p:cNvSpPr>
@@ -2914,7 +2913,7 @@
       </p:sp>
       <p:sp>
         <p:nvSpPr>
-          <p:cNvPr id="32771" name="Notes Placeholder 2"/>
+          <p:cNvPr id="27651" name="Notes Placeholder 2"/>
           <p:cNvSpPr>
             <a:spLocks noGrp="1"/>
           </p:cNvSpPr>
@@ -2936,7 +2935,7 @@
               </a14:hiddenEffects>
             </a:ext>
             <a:ext uri="{FAA26D3D-D897-4be2-8F04-BA451C77F1D7}">
-              <ma14:placeholderFlag xmlns="" xmlns:ma14="http://schemas.microsoft.com/office/mac/drawingml/2011/main" val="1"/>
+              <ma14:placeholderFlag xmlns:ma14="http://schemas.microsoft.com/office/mac/drawingml/2011/main" xmlns="" val="1"/>
             </a:ext>
           </a:extLst>
         </p:spPr>
@@ -2956,7 +2955,7 @@
     </p:spTree>
     <p:extLst>
       <p:ext uri="{BB962C8B-B14F-4D97-AF65-F5344CB8AC3E}">
-        <p14:creationId xmlns:p14="http://schemas.microsoft.com/office/powerpoint/2010/main" val="459182888"/>
+        <p14:creationId xmlns:p14="http://schemas.microsoft.com/office/powerpoint/2010/main" val="1103175948"/>
       </p:ext>
     </p:extLst>
   </p:cSld>
@@ -3021,92 +3020,7 @@
               </a14:hiddenEffects>
             </a:ext>
             <a:ext uri="{FAA26D3D-D897-4be2-8F04-BA451C77F1D7}">
-              <ma14:placeholderFlag xmlns="" xmlns:ma14="http://schemas.microsoft.com/office/mac/drawingml/2011/main" val="1"/>
-            </a:ext>
-          </a:extLst>
-        </p:spPr>
-        <p:txBody>
-          <a:bodyPr/>
-          <a:lstStyle/>
-          <a:p>
-            <a:pPr>
-              <a:defRPr/>
-            </a:pPr>
-            <a:endParaRPr lang="en-US" altLang="en-US">
-              <a:latin typeface="Times New Roman" charset="0"/>
-            </a:endParaRPr>
-          </a:p>
-        </p:txBody>
-      </p:sp>
-    </p:spTree>
-    <p:extLst>
-      <p:ext uri="{BB962C8B-B14F-4D97-AF65-F5344CB8AC3E}">
-        <p14:creationId xmlns:p14="http://schemas.microsoft.com/office/powerpoint/2010/main" val="1103175948"/>
-      </p:ext>
-    </p:extLst>
-  </p:cSld>
-  <p:clrMapOvr>
-    <a:masterClrMapping/>
-  </p:clrMapOvr>
-</p:notes>
-</file>
-
-<file path=ppt/notesSlides/notesSlide37.xml><?xml version="1.0" encoding="utf-8"?>
-<p:notes xmlns:a="http://schemas.openxmlformats.org/drawingml/2006/main" xmlns:r="http://schemas.openxmlformats.org/officeDocument/2006/relationships" xmlns:p="http://schemas.openxmlformats.org/presentationml/2006/main">
-  <p:cSld>
-    <p:spTree>
-      <p:nvGrpSpPr>
-        <p:cNvPr id="1" name=""/>
-        <p:cNvGrpSpPr/>
-        <p:nvPr/>
-      </p:nvGrpSpPr>
-      <p:grpSpPr>
-        <a:xfrm>
-          <a:off x="0" y="0"/>
-          <a:ext cx="0" cy="0"/>
-          <a:chOff x="0" y="0"/>
-          <a:chExt cx="0" cy="0"/>
-        </a:xfrm>
-      </p:grpSpPr>
-      <p:sp>
-        <p:nvSpPr>
-          <p:cNvPr id="27650" name="Slide Image Placeholder 1"/>
-          <p:cNvSpPr>
-            <a:spLocks noGrp="1" noRot="1" noChangeAspect="1" noTextEdit="1"/>
-          </p:cNvSpPr>
-          <p:nvPr>
-            <p:ph type="sldImg"/>
-          </p:nvPr>
-        </p:nvSpPr>
-        <p:spPr>
-          <a:ln/>
-        </p:spPr>
-      </p:sp>
-      <p:sp>
-        <p:nvSpPr>
-          <p:cNvPr id="27651" name="Notes Placeholder 2"/>
-          <p:cNvSpPr>
-            <a:spLocks noGrp="1"/>
-          </p:cNvSpPr>
-          <p:nvPr>
-            <p:ph type="body" idx="1"/>
-          </p:nvPr>
-        </p:nvSpPr>
-        <p:spPr>
-          <a:extLst>
-            <a:ext uri="{AF507438-7753-43E0-B8FC-AC1667EBCBE1}">
-              <a14:hiddenEffects xmlns:a14="http://schemas.microsoft.com/office/drawing/2010/main">
-                <a:effectLst>
-                  <a:outerShdw blurRad="63500" dist="38099" dir="2700000" algn="ctr" rotWithShape="0">
-                    <a:schemeClr val="bg2">
-                      <a:alpha val="74998"/>
-                    </a:schemeClr>
-                  </a:outerShdw>
-                </a:effectLst>
-              </a14:hiddenEffects>
-            </a:ext>
-            <a:ext uri="{FAA26D3D-D897-4be2-8F04-BA451C77F1D7}">
-              <ma14:placeholderFlag xmlns="" xmlns:ma14="http://schemas.microsoft.com/office/mac/drawingml/2011/main" val="1"/>
+              <ma14:placeholderFlag xmlns:ma14="http://schemas.microsoft.com/office/mac/drawingml/2011/main" xmlns="" val="1"/>
             </a:ext>
           </a:extLst>
         </p:spPr>
@@ -3136,7 +3050,7 @@
 </p:notes>
 </file>
 
-<file path=ppt/notesSlides/notesSlide38.xml><?xml version="1.0" encoding="utf-8"?>
+<file path=ppt/notesSlides/notesSlide37.xml><?xml version="1.0" encoding="utf-8"?>
 <p:notes xmlns:a="http://schemas.openxmlformats.org/drawingml/2006/main" xmlns:r="http://schemas.openxmlformats.org/officeDocument/2006/relationships" xmlns:p="http://schemas.openxmlformats.org/presentationml/2006/main">
   <p:cSld>
     <p:spTree>
@@ -3191,7 +3105,7 @@
               </a14:hiddenEffects>
             </a:ext>
             <a:ext uri="{FAA26D3D-D897-4be2-8F04-BA451C77F1D7}">
-              <ma14:placeholderFlag xmlns="" xmlns:ma14="http://schemas.microsoft.com/office/mac/drawingml/2011/main" val="1"/>
+              <ma14:placeholderFlag xmlns:ma14="http://schemas.microsoft.com/office/mac/drawingml/2011/main" xmlns="" val="1"/>
             </a:ext>
           </a:extLst>
         </p:spPr>
@@ -3276,7 +3190,7 @@
               </a14:hiddenEffects>
             </a:ext>
             <a:ext uri="{FAA26D3D-D897-4be2-8F04-BA451C77F1D7}">
-              <ma14:placeholderFlag xmlns="" xmlns:ma14="http://schemas.microsoft.com/office/mac/drawingml/2011/main" val="1"/>
+              <ma14:placeholderFlag xmlns:ma14="http://schemas.microsoft.com/office/mac/drawingml/2011/main" xmlns="" val="1"/>
             </a:ext>
           </a:extLst>
         </p:spPr>
@@ -3361,7 +3275,7 @@
               </a14:hiddenEffects>
             </a:ext>
             <a:ext uri="{FAA26D3D-D897-4be2-8F04-BA451C77F1D7}">
-              <ma14:placeholderFlag xmlns="" xmlns:ma14="http://schemas.microsoft.com/office/mac/drawingml/2011/main" val="1"/>
+              <ma14:placeholderFlag xmlns:ma14="http://schemas.microsoft.com/office/mac/drawingml/2011/main" xmlns="" val="1"/>
             </a:ext>
           </a:extLst>
         </p:spPr>
@@ -3446,7 +3360,7 @@
               </a14:hiddenEffects>
             </a:ext>
             <a:ext uri="{FAA26D3D-D897-4be2-8F04-BA451C77F1D7}">
-              <ma14:placeholderFlag xmlns="" xmlns:ma14="http://schemas.microsoft.com/office/mac/drawingml/2011/main" val="1"/>
+              <ma14:placeholderFlag xmlns:ma14="http://schemas.microsoft.com/office/mac/drawingml/2011/main" xmlns="" val="1"/>
             </a:ext>
           </a:extLst>
         </p:spPr>
@@ -3531,7 +3445,7 @@
               </a14:hiddenEffects>
             </a:ext>
             <a:ext uri="{FAA26D3D-D897-4be2-8F04-BA451C77F1D7}">
-              <ma14:placeholderFlag xmlns="" xmlns:ma14="http://schemas.microsoft.com/office/mac/drawingml/2011/main" val="1"/>
+              <ma14:placeholderFlag xmlns:ma14="http://schemas.microsoft.com/office/mac/drawingml/2011/main" xmlns="" val="1"/>
             </a:ext>
           </a:extLst>
         </p:spPr>
@@ -3616,7 +3530,7 @@
               </a14:hiddenEffects>
             </a:ext>
             <a:ext uri="{FAA26D3D-D897-4be2-8F04-BA451C77F1D7}">
-              <ma14:placeholderFlag xmlns="" xmlns:ma14="http://schemas.microsoft.com/office/mac/drawingml/2011/main" val="1"/>
+              <ma14:placeholderFlag xmlns:ma14="http://schemas.microsoft.com/office/mac/drawingml/2011/main" xmlns="" val="1"/>
             </a:ext>
           </a:extLst>
         </p:spPr>
@@ -3701,7 +3615,7 @@
               </a14:hiddenEffects>
             </a:ext>
             <a:ext uri="{FAA26D3D-D897-4be2-8F04-BA451C77F1D7}">
-              <ma14:placeholderFlag xmlns="" xmlns:ma14="http://schemas.microsoft.com/office/mac/drawingml/2011/main" val="1"/>
+              <ma14:placeholderFlag xmlns:ma14="http://schemas.microsoft.com/office/mac/drawingml/2011/main" xmlns="" val="1"/>
             </a:ext>
           </a:extLst>
         </p:spPr>
@@ -3860,7 +3774,7 @@
           <a:p>
             <a:fld id="{6D2DC8F3-C415-6641-9620-75163596B5B4}" type="datetimeFigureOut">
               <a:rPr lang="en-US" smtClean="0"/>
-              <a:t>9/21/25</a:t>
+              <a:t>7/16/26</a:t>
             </a:fld>
             <a:endParaRPr lang="en-US"/>
           </a:p>
@@ -4028,7 +3942,7 @@
           <a:p>
             <a:fld id="{6D2DC8F3-C415-6641-9620-75163596B5B4}" type="datetimeFigureOut">
               <a:rPr lang="en-US" smtClean="0"/>
-              <a:t>9/21/25</a:t>
+              <a:t>7/16/26</a:t>
             </a:fld>
             <a:endParaRPr lang="en-US"/>
           </a:p>
@@ -4206,7 +4120,7 @@
           <a:p>
             <a:fld id="{6D2DC8F3-C415-6641-9620-75163596B5B4}" type="datetimeFigureOut">
               <a:rPr lang="en-US" smtClean="0"/>
-              <a:t>9/21/25</a:t>
+              <a:t>7/16/26</a:t>
             </a:fld>
             <a:endParaRPr lang="en-US"/>
           </a:p>
@@ -4374,7 +4288,7 @@
           <a:p>
             <a:fld id="{6D2DC8F3-C415-6641-9620-75163596B5B4}" type="datetimeFigureOut">
               <a:rPr lang="en-US" smtClean="0"/>
-              <a:t>9/21/25</a:t>
+              <a:t>7/16/26</a:t>
             </a:fld>
             <a:endParaRPr lang="en-US"/>
           </a:p>
@@ -4619,7 +4533,7 @@
           <a:p>
             <a:fld id="{6D2DC8F3-C415-6641-9620-75163596B5B4}" type="datetimeFigureOut">
               <a:rPr lang="en-US" smtClean="0"/>
-              <a:t>9/21/25</a:t>
+              <a:t>7/16/26</a:t>
             </a:fld>
             <a:endParaRPr lang="en-US"/>
           </a:p>
@@ -4848,7 +4762,7 @@
           <a:p>
             <a:fld id="{6D2DC8F3-C415-6641-9620-75163596B5B4}" type="datetimeFigureOut">
               <a:rPr lang="en-US" smtClean="0"/>
-              <a:t>9/21/25</a:t>
+              <a:t>7/16/26</a:t>
             </a:fld>
             <a:endParaRPr lang="en-US"/>
           </a:p>
@@ -5212,7 +5126,7 @@
           <a:p>
             <a:fld id="{6D2DC8F3-C415-6641-9620-75163596B5B4}" type="datetimeFigureOut">
               <a:rPr lang="en-US" smtClean="0"/>
-              <a:t>9/21/25</a:t>
+              <a:t>7/16/26</a:t>
             </a:fld>
             <a:endParaRPr lang="en-US"/>
           </a:p>
@@ -5329,7 +5243,7 @@
           <a:p>
             <a:fld id="{6D2DC8F3-C415-6641-9620-75163596B5B4}" type="datetimeFigureOut">
               <a:rPr lang="en-US" smtClean="0"/>
-              <a:t>9/21/25</a:t>
+              <a:t>7/16/26</a:t>
             </a:fld>
             <a:endParaRPr lang="en-US"/>
           </a:p>
@@ -5424,7 +5338,7 @@
           <a:p>
             <a:fld id="{6D2DC8F3-C415-6641-9620-75163596B5B4}" type="datetimeFigureOut">
               <a:rPr lang="en-US" smtClean="0"/>
-              <a:t>9/21/25</a:t>
+              <a:t>7/16/26</a:t>
             </a:fld>
             <a:endParaRPr lang="en-US"/>
           </a:p>
@@ -5699,7 +5613,7 @@
           <a:p>
             <a:fld id="{6D2DC8F3-C415-6641-9620-75163596B5B4}" type="datetimeFigureOut">
               <a:rPr lang="en-US" smtClean="0"/>
-              <a:t>9/21/25</a:t>
+              <a:t>7/16/26</a:t>
             </a:fld>
             <a:endParaRPr lang="en-US"/>
           </a:p>
@@ -5951,7 +5865,7 @@
           <a:p>
             <a:fld id="{6D2DC8F3-C415-6641-9620-75163596B5B4}" type="datetimeFigureOut">
               <a:rPr lang="en-US" smtClean="0"/>
-              <a:t>9/21/25</a:t>
+              <a:t>7/16/26</a:t>
             </a:fld>
             <a:endParaRPr lang="en-US"/>
           </a:p>
@@ -6162,7 +6076,7 @@
           <a:p>
             <a:fld id="{6D2DC8F3-C415-6641-9620-75163596B5B4}" type="datetimeFigureOut">
               <a:rPr lang="en-US" smtClean="0"/>
-              <a:t>9/21/25</a:t>
+              <a:t>7/16/26</a:t>
             </a:fld>
             <a:endParaRPr lang="en-US"/>
           </a:p>
@@ -8110,7 +8024,7 @@
           <a:noFill/>
         </p:spPr>
         <p:txBody>
-          <a:bodyPr wrap="square" anchor="ctr" lIns="0" rIns="0" tIns="0" bIns="0">
+          <a:bodyPr wrap="square" lIns="0" tIns="0" rIns="0" bIns="0" anchor="ctr">
             <a:spAutoFit/>
           </a:bodyPr>
           <a:lstStyle/>
@@ -9196,7 +9110,7 @@
           <p:nvPr/>
         </p:nvPicPr>
         <p:blipFill>
-          <a:blip r:embed="rId5">
+          <a:blip r:embed="rId3">
             <a:extLst>
               <a:ext uri="{28A0092B-C50C-407E-A947-70E740481C1C}">
                 <a14:useLocalDpi xmlns:a14="http://schemas.microsoft.com/office/drawing/2010/main" val="0"/>
@@ -9623,7 +9537,7 @@
           <a:noFill/>
         </p:spPr>
         <p:txBody>
-          <a:bodyPr wrap="square" anchor="ctr" lIns="0" rIns="0" tIns="0" bIns="0">
+          <a:bodyPr wrap="square" lIns="0" tIns="0" rIns="0" bIns="0" anchor="ctr">
             <a:spAutoFit/>
           </a:bodyPr>
           <a:lstStyle/>
@@ -10474,11 +10388,7 @@
             </a:pPr>
             <a:r>
               <a:rPr lang="en-AU" altLang="en-US" dirty="0"/>
-              <a:t>mean blow rate for males be </a:t>
-            </a:r>
-            <a:r>
-              <a:rPr lang="en-AU" altLang="en-US" dirty="0"/>
-              <a:t> λ</a:t>
+              <a:t>mean blow rate for males be  λ</a:t>
             </a:r>
             <a:r>
               <a:rPr lang="en-AU" altLang="en-US" baseline="-25000" dirty="0">
@@ -10488,11 +10398,7 @@
             </a:r>
             <a:r>
               <a:rPr lang="en-AU" altLang="en-US" dirty="0"/>
-              <a:t> and that for females be </a:t>
-            </a:r>
-            <a:r>
-              <a:rPr lang="en-AU" altLang="en-US" dirty="0"/>
-              <a:t>λ</a:t>
+              <a:t> and that for females be λ</a:t>
             </a:r>
             <a:r>
               <a:rPr lang="en-AU" altLang="en-US" baseline="-25000" dirty="0">
@@ -10850,7 +10756,7 @@
           <p:nvPr/>
         </p:nvPicPr>
         <p:blipFill>
-          <a:blip r:embed="rId7">
+          <a:blip r:embed="rId3">
             <a:extLst>
               <a:ext uri="{28A0092B-C50C-407E-A947-70E740481C1C}">
                 <a14:useLocalDpi xmlns:a14="http://schemas.microsoft.com/office/drawing/2010/main" val="0"/>
@@ -10917,8 +10823,8 @@
         </p:nvSpPr>
         <p:spPr bwMode="auto">
           <a:xfrm flipH="1" flipV="1">
-            <a:off x="6419461" y="5783571"/>
-            <a:ext cx="166886" cy="457578"/>
+            <a:off x="6435969" y="5536100"/>
+            <a:ext cx="150378" cy="705049"/>
           </a:xfrm>
           <a:prstGeom prst="line">
             <a:avLst/>
@@ -11136,8 +11042,8 @@
         </p:nvSpPr>
         <p:spPr>
           <a:xfrm>
-            <a:off x="4666861" y="2415074"/>
-            <a:ext cx="3657600" cy="838200"/>
+            <a:off x="3952670" y="2695279"/>
+            <a:ext cx="3657600" cy="369332"/>
           </a:xfrm>
           <a:prstGeom prst="rect">
             <a:avLst/>
@@ -11145,25 +11051,25 @@
           <a:noFill/>
         </p:spPr>
         <p:txBody>
-          <a:bodyPr wrap="square" anchor="ctr" lIns="0" rIns="0" tIns="0" bIns="0">
+          <a:bodyPr wrap="square" lIns="0" tIns="0" rIns="0" bIns="0" anchor="ctr">
             <a:spAutoFit/>
           </a:bodyPr>
           <a:lstStyle/>
           <a:p>
             <a:r>
-              <a:rPr sz="2000">
+              <a:rPr sz="2400">
                 <a:latin typeface="Cambria"/>
               </a:rPr>
               <a:t>P(x | λ) = λ</a:t>
             </a:r>
             <a:r>
-              <a:rPr sz="2000" baseline="30000">
+              <a:rPr sz="2400" baseline="30000">
                 <a:latin typeface="Cambria"/>
               </a:rPr>
               <a:t>x</a:t>
             </a:r>
             <a:r>
-              <a:rPr sz="2000">
+              <a:rPr sz="2400">
                 <a:latin typeface="Cambria"/>
               </a:rPr>
               <a:t> exp(−λ) / x!</a:t>
@@ -11179,8 +11085,8 @@
         </p:nvSpPr>
         <p:spPr>
           <a:xfrm>
-            <a:off x="3174611" y="4701075"/>
-            <a:ext cx="8834509" cy="835025"/>
+            <a:off x="2506395" y="4929775"/>
+            <a:ext cx="8834509" cy="369332"/>
           </a:xfrm>
           <a:prstGeom prst="rect">
             <a:avLst/>
@@ -11188,97 +11094,97 @@
           <a:noFill/>
         </p:spPr>
         <p:txBody>
-          <a:bodyPr wrap="square" anchor="ctr" lIns="0" rIns="0" tIns="0" bIns="0">
+          <a:bodyPr wrap="square" lIns="0" tIns="0" rIns="0" bIns="0" anchor="ctr">
             <a:spAutoFit/>
           </a:bodyPr>
           <a:lstStyle/>
           <a:p>
             <a:r>
-              <a:rPr sz="1900">
+              <a:rPr sz="2400" dirty="0">
                 <a:latin typeface="Cambria"/>
               </a:rPr>
               <a:t>P(x | p, λ</a:t>
             </a:r>
             <a:r>
-              <a:rPr sz="1900" baseline="-25000">
+              <a:rPr sz="2400" baseline="-25000" dirty="0">
                 <a:latin typeface="Cambria"/>
               </a:rPr>
               <a:t>1</a:t>
             </a:r>
             <a:r>
-              <a:rPr sz="1900">
+              <a:rPr sz="2400" dirty="0">
                 <a:latin typeface="Cambria"/>
               </a:rPr>
               <a:t>, λ</a:t>
             </a:r>
             <a:r>
-              <a:rPr sz="1900" baseline="-25000">
+              <a:rPr sz="2400" baseline="-25000" dirty="0">
                 <a:latin typeface="Cambria"/>
               </a:rPr>
               <a:t>2</a:t>
             </a:r>
             <a:r>
-              <a:rPr sz="1900">
+              <a:rPr sz="2400" dirty="0">
                 <a:latin typeface="Cambria"/>
               </a:rPr>
               <a:t>) = p λ</a:t>
             </a:r>
             <a:r>
-              <a:rPr sz="1900" baseline="-25000">
+              <a:rPr sz="2400" baseline="-25000" dirty="0">
                 <a:latin typeface="Cambria"/>
               </a:rPr>
               <a:t>1</a:t>
             </a:r>
             <a:r>
-              <a:rPr sz="1900" baseline="30000">
+              <a:rPr sz="2400" baseline="30000" dirty="0">
                 <a:latin typeface="Cambria"/>
               </a:rPr>
               <a:t>x</a:t>
             </a:r>
             <a:r>
-              <a:rPr sz="1900">
+              <a:rPr sz="2400" dirty="0">
                 <a:latin typeface="Cambria"/>
               </a:rPr>
               <a:t> exp(−λ</a:t>
             </a:r>
             <a:r>
-              <a:rPr sz="1900" baseline="-25000">
+              <a:rPr sz="2400" baseline="-25000" dirty="0">
                 <a:latin typeface="Cambria"/>
               </a:rPr>
               <a:t>1</a:t>
             </a:r>
             <a:r>
-              <a:rPr sz="1900">
+              <a:rPr sz="2400" dirty="0">
                 <a:latin typeface="Cambria"/>
               </a:rPr>
               <a:t>) / x! + (1 − p) λ</a:t>
             </a:r>
             <a:r>
-              <a:rPr sz="1900" baseline="-25000">
+              <a:rPr sz="2400" baseline="-25000" dirty="0">
                 <a:latin typeface="Cambria"/>
               </a:rPr>
               <a:t>2</a:t>
             </a:r>
             <a:r>
-              <a:rPr sz="1900" baseline="30000">
+              <a:rPr sz="2400" baseline="30000" dirty="0">
                 <a:latin typeface="Cambria"/>
               </a:rPr>
               <a:t>x</a:t>
             </a:r>
             <a:r>
-              <a:rPr sz="1900">
+              <a:rPr sz="2400" dirty="0">
                 <a:latin typeface="Cambria"/>
               </a:rPr>
               <a:t> exp(−λ</a:t>
             </a:r>
             <a:r>
-              <a:rPr sz="1900" baseline="-25000">
+              <a:rPr sz="2400" baseline="-25000" dirty="0">
                 <a:latin typeface="Cambria"/>
               </a:rPr>
               <a:t>2</a:t>
             </a:r>
             <a:r>
-              <a:rPr sz="1900">
+              <a:rPr sz="2400" dirty="0">
                 <a:latin typeface="Cambria"/>
               </a:rPr>
               <a:t>) / x!</a:t>
@@ -11352,11 +11258,7 @@
             </a:r>
             <a:r>
               <a:rPr lang="en-AU" dirty="0" err="1"/>
-              <a:t>is</a:t>
-            </a:r>
-            <a:r>
-              <a:rPr lang="en-AU" dirty="0" err="1"/>
-              <a:t> </a:t>
+              <a:t>is </a:t>
             </a:r>
             <a:r>
               <a:rPr lang="en-AU" i="1" dirty="0" err="1">
@@ -12095,8 +11997,8 @@
         </p:nvSpPr>
         <p:spPr>
           <a:xfrm>
-            <a:off x="3161717" y="2354425"/>
-            <a:ext cx="8847403" cy="965200"/>
+            <a:off x="1672298" y="2735425"/>
+            <a:ext cx="8847403" cy="369332"/>
           </a:xfrm>
           <a:prstGeom prst="rect">
             <a:avLst/>
@@ -12104,133 +12006,133 @@
           <a:noFill/>
         </p:spPr>
         <p:txBody>
-          <a:bodyPr wrap="square" anchor="ctr" lIns="0" rIns="0" tIns="0" bIns="0">
+          <a:bodyPr wrap="square" lIns="0" tIns="0" rIns="0" bIns="0" anchor="ctr">
             <a:spAutoFit/>
           </a:bodyPr>
           <a:lstStyle/>
           <a:p>
             <a:r>
-              <a:rPr sz="1600">
+              <a:rPr sz="2400">
                 <a:latin typeface="Cambria"/>
               </a:rPr>
               <a:t>P(x | p, λ</a:t>
             </a:r>
             <a:r>
-              <a:rPr sz="1600" baseline="-25000">
+              <a:rPr sz="2400" baseline="-25000">
                 <a:latin typeface="Cambria"/>
               </a:rPr>
               <a:t>1</a:t>
             </a:r>
             <a:r>
-              <a:rPr sz="1600">
+              <a:rPr sz="2400">
                 <a:latin typeface="Cambria"/>
               </a:rPr>
               <a:t>, λ</a:t>
             </a:r>
             <a:r>
-              <a:rPr sz="1600" baseline="-25000">
+              <a:rPr sz="2400" baseline="-25000">
                 <a:latin typeface="Cambria"/>
               </a:rPr>
               <a:t>2</a:t>
             </a:r>
             <a:r>
-              <a:rPr sz="1600">
+              <a:rPr sz="2400">
                 <a:latin typeface="Cambria"/>
               </a:rPr>
               <a:t>) = ∏</a:t>
             </a:r>
             <a:r>
-              <a:rPr sz="1600" baseline="-25000">
+              <a:rPr sz="2400" baseline="-25000">
                 <a:latin typeface="Cambria"/>
               </a:rPr>
               <a:t>i</a:t>
             </a:r>
             <a:r>
-              <a:rPr sz="1600">
+              <a:rPr sz="2400">
                 <a:latin typeface="Cambria"/>
               </a:rPr>
               <a:t> ( p λ</a:t>
             </a:r>
             <a:r>
-              <a:rPr sz="1600" baseline="-25000">
+              <a:rPr sz="2400" baseline="-25000">
                 <a:latin typeface="Cambria"/>
               </a:rPr>
               <a:t>1</a:t>
             </a:r>
             <a:r>
-              <a:rPr sz="1600" baseline="30000">
+              <a:rPr sz="2400" baseline="30000">
                 <a:latin typeface="Cambria"/>
               </a:rPr>
               <a:t>xᵢ</a:t>
             </a:r>
             <a:r>
-              <a:rPr sz="1600">
+              <a:rPr sz="2400">
                 <a:latin typeface="Cambria"/>
               </a:rPr>
               <a:t> exp(−λ</a:t>
             </a:r>
             <a:r>
-              <a:rPr sz="1600" baseline="-25000">
+              <a:rPr sz="2400" baseline="-25000">
                 <a:latin typeface="Cambria"/>
               </a:rPr>
               <a:t>1</a:t>
             </a:r>
             <a:r>
-              <a:rPr sz="1600">
+              <a:rPr sz="2400">
                 <a:latin typeface="Cambria"/>
               </a:rPr>
               <a:t>) / x</a:t>
             </a:r>
             <a:r>
-              <a:rPr sz="1600" baseline="-25000">
+              <a:rPr sz="2400" baseline="-25000">
                 <a:latin typeface="Cambria"/>
               </a:rPr>
               <a:t>i</a:t>
             </a:r>
             <a:r>
-              <a:rPr sz="1600">
+              <a:rPr sz="2400">
                 <a:latin typeface="Cambria"/>
               </a:rPr>
               <a:t>! + (1 − p) λ</a:t>
             </a:r>
             <a:r>
-              <a:rPr sz="1600" baseline="-25000">
+              <a:rPr sz="2400" baseline="-25000">
                 <a:latin typeface="Cambria"/>
               </a:rPr>
               <a:t>2</a:t>
             </a:r>
             <a:r>
-              <a:rPr sz="1600" baseline="30000">
+              <a:rPr sz="2400" baseline="30000">
                 <a:latin typeface="Cambria"/>
               </a:rPr>
               <a:t>xᵢ</a:t>
             </a:r>
             <a:r>
-              <a:rPr sz="1600">
+              <a:rPr sz="2400">
                 <a:latin typeface="Cambria"/>
               </a:rPr>
               <a:t> exp(−λ</a:t>
             </a:r>
             <a:r>
-              <a:rPr sz="1600" baseline="-25000">
+              <a:rPr sz="2400" baseline="-25000">
                 <a:latin typeface="Cambria"/>
               </a:rPr>
               <a:t>2</a:t>
             </a:r>
             <a:r>
-              <a:rPr sz="1600">
+              <a:rPr sz="2400">
                 <a:latin typeface="Cambria"/>
               </a:rPr>
               <a:t>) / x</a:t>
             </a:r>
             <a:r>
-              <a:rPr sz="1600" baseline="-25000">
+              <a:rPr sz="2400" baseline="-25000">
                 <a:latin typeface="Cambria"/>
               </a:rPr>
               <a:t>i</a:t>
             </a:r>
             <a:r>
-              <a:rPr sz="1600">
+              <a:rPr sz="2400">
                 <a:latin typeface="Cambria"/>
               </a:rPr>
               <a:t>! )</a:t>
@@ -12255,7 +12157,7 @@
           <a:noFill/>
         </p:spPr>
         <p:txBody>
-          <a:bodyPr wrap="square" anchor="ctr" lIns="0" rIns="0" tIns="0" bIns="0">
+          <a:bodyPr wrap="square" lIns="0" tIns="0" rIns="0" bIns="0" anchor="ctr">
             <a:spAutoFit/>
           </a:bodyPr>
           <a:lstStyle/>
@@ -13695,7 +13597,7 @@
             </a:pPr>
             <a:r>
               <a:rPr lang="en-AU" altLang="en-US" dirty="0"/>
-              <a:t>Function in grid search lab takes “</a:t>
+              <a:t>takes “</a:t>
             </a:r>
             <a:r>
               <a:rPr lang="en-AU" altLang="en-US" dirty="0" err="1"/>
@@ -14784,7 +14686,7 @@
         <p:spPr bwMode="auto">
           <a:xfrm>
             <a:off x="1725614" y="2209800"/>
-            <a:ext cx="8048806" cy="830997"/>
+            <a:ext cx="8068234" cy="830997"/>
           </a:xfrm>
           <a:prstGeom prst="rect">
             <a:avLst/>
@@ -18664,15 +18566,7 @@
                   <a:srgbClr val="000000"/>
                 </a:solidFill>
               </a:rPr>
-              <a:t>mean blow rate for males be </a:t>
-            </a:r>
-            <a:r>
-              <a:rPr lang="en-AU" altLang="en-US" dirty="0">
-                <a:solidFill>
-                  <a:srgbClr val="000000"/>
-                </a:solidFill>
-              </a:rPr>
-              <a:t> λ</a:t>
+              <a:t>mean blow rate for males be  λ</a:t>
             </a:r>
             <a:r>
               <a:rPr lang="en-AU" altLang="en-US" baseline="-25000" dirty="0">
@@ -18689,15 +18583,7 @@
                   <a:srgbClr val="000000"/>
                 </a:solidFill>
               </a:rPr>
-              <a:t> and that for females be </a:t>
-            </a:r>
-            <a:r>
-              <a:rPr lang="en-AU" altLang="en-US" dirty="0">
-                <a:solidFill>
-                  <a:srgbClr val="000000"/>
-                </a:solidFill>
-              </a:rPr>
-              <a:t>λ</a:t>
+              <a:t> and that for females be λ</a:t>
             </a:r>
             <a:r>
               <a:rPr lang="en-AU" altLang="en-US" baseline="-25000" dirty="0">
@@ -19124,7 +19010,7 @@
               </a14:hiddenEffects>
             </a:ext>
             <a:ext uri="{FAA26D3D-D897-4be2-8F04-BA451C77F1D7}">
-              <ma14:placeholderFlag xmlns="" xmlns:ma14="http://schemas.microsoft.com/office/mac/drawingml/2011/main" val="1"/>
+              <ma14:placeholderFlag xmlns:ma14="http://schemas.microsoft.com/office/mac/drawingml/2011/main" xmlns="" val="1"/>
             </a:ext>
           </a:extLst>
         </p:spPr>
@@ -19462,8 +19348,8 @@
         </p:nvSpPr>
         <p:spPr>
           <a:xfrm>
-            <a:off x="5105400" y="1752600"/>
-            <a:ext cx="3657600" cy="838200"/>
+            <a:off x="4108942" y="1975311"/>
+            <a:ext cx="3657600" cy="369332"/>
           </a:xfrm>
           <a:prstGeom prst="rect">
             <a:avLst/>
@@ -19471,28 +19357,58 @@
           <a:noFill/>
         </p:spPr>
         <p:txBody>
-          <a:bodyPr wrap="square" anchor="ctr" lIns="0" rIns="0" tIns="0" bIns="0">
+          <a:bodyPr wrap="square" lIns="0" tIns="0" rIns="0" bIns="0" anchor="ctr">
             <a:spAutoFit/>
           </a:bodyPr>
           <a:lstStyle/>
           <a:p>
             <a:r>
-              <a:rPr sz="2000">
+              <a:rPr sz="2400" dirty="0">
                 <a:latin typeface="Cambria"/>
               </a:rPr>
-              <a:t>P(x | λ) = λ</a:t>
-            </a:r>
-            <a:r>
-              <a:rPr sz="2000" baseline="30000">
+              <a:t>P(x | </a:t>
+            </a:r>
+            <a:r>
+              <a:rPr sz="2400" dirty="0" err="1">
+                <a:latin typeface="Cambria"/>
+              </a:rPr>
+              <a:t>λ</a:t>
+            </a:r>
+            <a:r>
+              <a:rPr sz="2400" dirty="0">
+                <a:latin typeface="Cambria"/>
+              </a:rPr>
+              <a:t>) = </a:t>
+            </a:r>
+            <a:r>
+              <a:rPr sz="2400" dirty="0" err="1">
+                <a:latin typeface="Cambria"/>
+              </a:rPr>
+              <a:t>λ</a:t>
+            </a:r>
+            <a:r>
+              <a:rPr sz="2400" baseline="30000" dirty="0" err="1">
                 <a:latin typeface="Cambria"/>
               </a:rPr>
               <a:t>x</a:t>
             </a:r>
             <a:r>
-              <a:rPr sz="2000">
+              <a:rPr sz="2400" dirty="0">
                 <a:latin typeface="Cambria"/>
               </a:rPr>
-              <a:t> exp(−λ) / x!</a:t>
+              <a:t> exp(−</a:t>
+            </a:r>
+            <a:r>
+              <a:rPr sz="2400" dirty="0" err="1">
+                <a:latin typeface="Cambria"/>
+              </a:rPr>
+              <a:t>λ</a:t>
+            </a:r>
+            <a:r>
+              <a:rPr sz="2400" dirty="0">
+                <a:latin typeface="Cambria"/>
+              </a:rPr>
+              <a:t>) / x!</a:t>
             </a:r>
           </a:p>
         </p:txBody>
@@ -19505,8 +19421,8 @@
         </p:nvSpPr>
         <p:spPr>
           <a:xfrm>
-            <a:off x="3613150" y="4038601"/>
-            <a:ext cx="8395970" cy="835025"/>
+            <a:off x="2616692" y="4259724"/>
+            <a:ext cx="8395970" cy="369332"/>
           </a:xfrm>
           <a:prstGeom prst="rect">
             <a:avLst/>
@@ -19514,97 +19430,97 @@
           <a:noFill/>
         </p:spPr>
         <p:txBody>
-          <a:bodyPr wrap="square" anchor="ctr" lIns="0" rIns="0" tIns="0" bIns="0">
+          <a:bodyPr wrap="square" lIns="0" tIns="0" rIns="0" bIns="0" anchor="ctr">
             <a:spAutoFit/>
           </a:bodyPr>
           <a:lstStyle/>
           <a:p>
             <a:r>
-              <a:rPr sz="1800">
+              <a:rPr sz="2400">
                 <a:latin typeface="Cambria"/>
               </a:rPr>
               <a:t>P(x | p, λ</a:t>
             </a:r>
             <a:r>
-              <a:rPr sz="1800" baseline="-25000">
+              <a:rPr sz="2400" baseline="-25000">
                 <a:latin typeface="Cambria"/>
               </a:rPr>
               <a:t>1</a:t>
             </a:r>
             <a:r>
-              <a:rPr sz="1800">
+              <a:rPr sz="2400">
                 <a:latin typeface="Cambria"/>
               </a:rPr>
               <a:t>, λ</a:t>
             </a:r>
             <a:r>
-              <a:rPr sz="1800" baseline="-25000">
+              <a:rPr sz="2400" baseline="-25000">
                 <a:latin typeface="Cambria"/>
               </a:rPr>
               <a:t>2</a:t>
             </a:r>
             <a:r>
-              <a:rPr sz="1800">
+              <a:rPr sz="2400">
                 <a:latin typeface="Cambria"/>
               </a:rPr>
               <a:t>) = p λ</a:t>
             </a:r>
             <a:r>
-              <a:rPr sz="1800" baseline="-25000">
+              <a:rPr sz="2400" baseline="-25000">
                 <a:latin typeface="Cambria"/>
               </a:rPr>
               <a:t>1</a:t>
             </a:r>
             <a:r>
-              <a:rPr sz="1800" baseline="30000">
+              <a:rPr sz="2400" baseline="30000">
                 <a:latin typeface="Cambria"/>
               </a:rPr>
               <a:t>x</a:t>
             </a:r>
             <a:r>
-              <a:rPr sz="1800">
+              <a:rPr sz="2400">
                 <a:latin typeface="Cambria"/>
               </a:rPr>
               <a:t> exp(−λ</a:t>
             </a:r>
             <a:r>
-              <a:rPr sz="1800" baseline="-25000">
+              <a:rPr sz="2400" baseline="-25000">
                 <a:latin typeface="Cambria"/>
               </a:rPr>
               <a:t>1</a:t>
             </a:r>
             <a:r>
-              <a:rPr sz="1800">
+              <a:rPr sz="2400">
                 <a:latin typeface="Cambria"/>
               </a:rPr>
               <a:t>) / x! + (1 − p) λ</a:t>
             </a:r>
             <a:r>
-              <a:rPr sz="1800" baseline="-25000">
+              <a:rPr sz="2400" baseline="-25000">
                 <a:latin typeface="Cambria"/>
               </a:rPr>
               <a:t>2</a:t>
             </a:r>
             <a:r>
-              <a:rPr sz="1800" baseline="30000">
+              <a:rPr sz="2400" baseline="30000">
                 <a:latin typeface="Cambria"/>
               </a:rPr>
               <a:t>x</a:t>
             </a:r>
             <a:r>
-              <a:rPr sz="1800">
+              <a:rPr sz="2400">
                 <a:latin typeface="Cambria"/>
               </a:rPr>
               <a:t> exp(−λ</a:t>
             </a:r>
             <a:r>
-              <a:rPr sz="1800" baseline="-25000">
+              <a:rPr sz="2400" baseline="-25000">
                 <a:latin typeface="Cambria"/>
               </a:rPr>
               <a:t>2</a:t>
             </a:r>
             <a:r>
-              <a:rPr sz="1800">
+              <a:rPr sz="2400">
                 <a:latin typeface="Cambria"/>
               </a:rPr>
               <a:t>) / x!</a:t>
@@ -19620,8 +19536,8 @@
         </p:nvSpPr>
         <p:spPr>
           <a:xfrm>
-            <a:off x="2362200" y="5659438"/>
-            <a:ext cx="9646920" cy="965200"/>
+            <a:off x="1365742" y="5945649"/>
+            <a:ext cx="9646920" cy="369332"/>
           </a:xfrm>
           <a:prstGeom prst="rect">
             <a:avLst/>
@@ -19629,133 +19545,133 @@
           <a:noFill/>
         </p:spPr>
         <p:txBody>
-          <a:bodyPr wrap="square" anchor="ctr" lIns="0" rIns="0" tIns="0" bIns="0">
+          <a:bodyPr wrap="square" lIns="0" tIns="0" rIns="0" bIns="0" anchor="ctr">
             <a:spAutoFit/>
           </a:bodyPr>
           <a:lstStyle/>
           <a:p>
             <a:r>
-              <a:rPr sz="1700">
+              <a:rPr sz="2400">
                 <a:latin typeface="Cambria"/>
               </a:rPr>
               <a:t>P(x | p, λ</a:t>
             </a:r>
             <a:r>
-              <a:rPr sz="1700" baseline="-25000">
+              <a:rPr sz="2400" baseline="-25000">
                 <a:latin typeface="Cambria"/>
               </a:rPr>
               <a:t>1</a:t>
             </a:r>
             <a:r>
-              <a:rPr sz="1700">
+              <a:rPr sz="2400">
                 <a:latin typeface="Cambria"/>
               </a:rPr>
               <a:t>, λ</a:t>
             </a:r>
             <a:r>
-              <a:rPr sz="1700" baseline="-25000">
+              <a:rPr sz="2400" baseline="-25000">
                 <a:latin typeface="Cambria"/>
               </a:rPr>
               <a:t>2</a:t>
             </a:r>
             <a:r>
-              <a:rPr sz="1700">
+              <a:rPr sz="2400">
                 <a:latin typeface="Cambria"/>
               </a:rPr>
               <a:t>) = ∏</a:t>
             </a:r>
             <a:r>
-              <a:rPr sz="1700" baseline="-25000">
+              <a:rPr sz="2400" baseline="-25000">
                 <a:latin typeface="Cambria"/>
               </a:rPr>
               <a:t>i</a:t>
             </a:r>
             <a:r>
-              <a:rPr sz="1700">
+              <a:rPr sz="2400">
                 <a:latin typeface="Cambria"/>
               </a:rPr>
               <a:t> ( p λ</a:t>
             </a:r>
             <a:r>
-              <a:rPr sz="1700" baseline="-25000">
+              <a:rPr sz="2400" baseline="-25000">
                 <a:latin typeface="Cambria"/>
               </a:rPr>
               <a:t>1</a:t>
             </a:r>
             <a:r>
-              <a:rPr sz="1700" baseline="30000">
+              <a:rPr sz="2400" baseline="30000">
                 <a:latin typeface="Cambria"/>
               </a:rPr>
               <a:t>xᵢ</a:t>
             </a:r>
             <a:r>
-              <a:rPr sz="1700">
+              <a:rPr sz="2400">
                 <a:latin typeface="Cambria"/>
               </a:rPr>
               <a:t> exp(−λ</a:t>
             </a:r>
             <a:r>
-              <a:rPr sz="1700" baseline="-25000">
+              <a:rPr sz="2400" baseline="-25000">
                 <a:latin typeface="Cambria"/>
               </a:rPr>
               <a:t>1</a:t>
             </a:r>
             <a:r>
-              <a:rPr sz="1700">
+              <a:rPr sz="2400">
                 <a:latin typeface="Cambria"/>
               </a:rPr>
               <a:t>) / x</a:t>
             </a:r>
             <a:r>
-              <a:rPr sz="1700" baseline="-25000">
+              <a:rPr sz="2400" baseline="-25000">
                 <a:latin typeface="Cambria"/>
               </a:rPr>
               <a:t>i</a:t>
             </a:r>
             <a:r>
-              <a:rPr sz="1700">
+              <a:rPr sz="2400">
                 <a:latin typeface="Cambria"/>
               </a:rPr>
               <a:t>! + (1 − p) λ</a:t>
             </a:r>
             <a:r>
-              <a:rPr sz="1700" baseline="-25000">
+              <a:rPr sz="2400" baseline="-25000">
                 <a:latin typeface="Cambria"/>
               </a:rPr>
               <a:t>2</a:t>
             </a:r>
             <a:r>
-              <a:rPr sz="1700" baseline="30000">
+              <a:rPr sz="2400" baseline="30000">
                 <a:latin typeface="Cambria"/>
               </a:rPr>
               <a:t>xᵢ</a:t>
             </a:r>
             <a:r>
-              <a:rPr sz="1700">
+              <a:rPr sz="2400">
                 <a:latin typeface="Cambria"/>
               </a:rPr>
               <a:t> exp(−λ</a:t>
             </a:r>
             <a:r>
-              <a:rPr sz="1700" baseline="-25000">
+              <a:rPr sz="2400" baseline="-25000">
                 <a:latin typeface="Cambria"/>
               </a:rPr>
               <a:t>2</a:t>
             </a:r>
             <a:r>
-              <a:rPr sz="1700">
+              <a:rPr sz="2400">
                 <a:latin typeface="Cambria"/>
               </a:rPr>
               <a:t>) / x</a:t>
             </a:r>
             <a:r>
-              <a:rPr sz="1700" baseline="-25000">
+              <a:rPr sz="2400" baseline="-25000">
                 <a:latin typeface="Cambria"/>
               </a:rPr>
               <a:t>i</a:t>
             </a:r>
             <a:r>
-              <a:rPr sz="1700">
+              <a:rPr sz="2400">
                 <a:latin typeface="Cambria"/>
               </a:rPr>
               <a:t>! )</a:t>
@@ -19996,7 +19912,7 @@
               </a14:hiddenEffects>
             </a:ext>
             <a:ext uri="{FAA26D3D-D897-4be2-8F04-BA451C77F1D7}">
-              <ma14:placeholderFlag xmlns="" xmlns:ma14="http://schemas.microsoft.com/office/mac/drawingml/2011/main" val="1"/>
+              <ma14:placeholderFlag xmlns:ma14="http://schemas.microsoft.com/office/mac/drawingml/2011/main" xmlns="" val="1"/>
             </a:ext>
           </a:extLst>
         </p:spPr>
@@ -20519,8 +20435,8 @@
         </p:nvSpPr>
         <p:spPr>
           <a:xfrm>
-            <a:off x="2667000" y="2090738"/>
-            <a:ext cx="9342120" cy="965200"/>
+            <a:off x="1528128" y="2807771"/>
+            <a:ext cx="9342120" cy="369332"/>
           </a:xfrm>
           <a:prstGeom prst="rect">
             <a:avLst/>
@@ -20528,133 +20444,133 @@
           <a:noFill/>
         </p:spPr>
         <p:txBody>
-          <a:bodyPr wrap="square" anchor="ctr" lIns="0" rIns="0" tIns="0" bIns="0">
+          <a:bodyPr wrap="square" lIns="0" tIns="0" rIns="0" bIns="0" anchor="ctr">
             <a:spAutoFit/>
           </a:bodyPr>
           <a:lstStyle/>
           <a:p>
             <a:r>
-              <a:rPr sz="1700">
+              <a:rPr sz="2400">
                 <a:latin typeface="Cambria"/>
               </a:rPr>
               <a:t>P(x | p, λ</a:t>
             </a:r>
             <a:r>
-              <a:rPr sz="1700" baseline="-25000">
+              <a:rPr sz="2400" baseline="-25000">
                 <a:latin typeface="Cambria"/>
               </a:rPr>
               <a:t>1</a:t>
             </a:r>
             <a:r>
-              <a:rPr sz="1700">
+              <a:rPr sz="2400">
                 <a:latin typeface="Cambria"/>
               </a:rPr>
               <a:t>, λ</a:t>
             </a:r>
             <a:r>
-              <a:rPr sz="1700" baseline="-25000">
+              <a:rPr sz="2400" baseline="-25000">
                 <a:latin typeface="Cambria"/>
               </a:rPr>
               <a:t>2</a:t>
             </a:r>
             <a:r>
-              <a:rPr sz="1700">
+              <a:rPr sz="2400">
                 <a:latin typeface="Cambria"/>
               </a:rPr>
               <a:t>) = ∏</a:t>
             </a:r>
             <a:r>
-              <a:rPr sz="1700" baseline="-25000">
+              <a:rPr sz="2400" baseline="-25000">
                 <a:latin typeface="Cambria"/>
               </a:rPr>
               <a:t>i</a:t>
             </a:r>
             <a:r>
-              <a:rPr sz="1700">
+              <a:rPr sz="2400">
                 <a:latin typeface="Cambria"/>
               </a:rPr>
               <a:t> ( p λ</a:t>
             </a:r>
             <a:r>
-              <a:rPr sz="1700" baseline="-25000">
+              <a:rPr sz="2400" baseline="-25000">
                 <a:latin typeface="Cambria"/>
               </a:rPr>
               <a:t>1</a:t>
             </a:r>
             <a:r>
-              <a:rPr sz="1700" baseline="30000">
+              <a:rPr sz="2400" baseline="30000">
                 <a:latin typeface="Cambria"/>
               </a:rPr>
               <a:t>xᵢ</a:t>
             </a:r>
             <a:r>
-              <a:rPr sz="1700">
+              <a:rPr sz="2400">
                 <a:latin typeface="Cambria"/>
               </a:rPr>
               <a:t> exp(−λ</a:t>
             </a:r>
             <a:r>
-              <a:rPr sz="1700" baseline="-25000">
+              <a:rPr sz="2400" baseline="-25000">
                 <a:latin typeface="Cambria"/>
               </a:rPr>
               <a:t>1</a:t>
             </a:r>
             <a:r>
-              <a:rPr sz="1700">
+              <a:rPr sz="2400">
                 <a:latin typeface="Cambria"/>
               </a:rPr>
               <a:t>) / x</a:t>
             </a:r>
             <a:r>
-              <a:rPr sz="1700" baseline="-25000">
+              <a:rPr sz="2400" baseline="-25000">
                 <a:latin typeface="Cambria"/>
               </a:rPr>
               <a:t>i</a:t>
             </a:r>
             <a:r>
-              <a:rPr sz="1700">
+              <a:rPr sz="2400">
                 <a:latin typeface="Cambria"/>
               </a:rPr>
               <a:t>! + (1 − p) λ</a:t>
             </a:r>
             <a:r>
-              <a:rPr sz="1700" baseline="-25000">
+              <a:rPr sz="2400" baseline="-25000">
                 <a:latin typeface="Cambria"/>
               </a:rPr>
               <a:t>2</a:t>
             </a:r>
             <a:r>
-              <a:rPr sz="1700" baseline="30000">
+              <a:rPr sz="2400" baseline="30000">
                 <a:latin typeface="Cambria"/>
               </a:rPr>
               <a:t>xᵢ</a:t>
             </a:r>
             <a:r>
-              <a:rPr sz="1700">
+              <a:rPr sz="2400">
                 <a:latin typeface="Cambria"/>
               </a:rPr>
               <a:t> exp(−λ</a:t>
             </a:r>
             <a:r>
-              <a:rPr sz="1700" baseline="-25000">
+              <a:rPr sz="2400" baseline="-25000">
                 <a:latin typeface="Cambria"/>
               </a:rPr>
               <a:t>2</a:t>
             </a:r>
             <a:r>
-              <a:rPr sz="1700">
+              <a:rPr sz="2400">
                 <a:latin typeface="Cambria"/>
               </a:rPr>
               <a:t>) / x</a:t>
             </a:r>
             <a:r>
-              <a:rPr sz="1700" baseline="-25000">
+              <a:rPr sz="2400" baseline="-25000">
                 <a:latin typeface="Cambria"/>
               </a:rPr>
               <a:t>i</a:t>
             </a:r>
             <a:r>
-              <a:rPr sz="1700">
+              <a:rPr sz="2400">
                 <a:latin typeface="Cambria"/>
               </a:rPr>
               <a:t>! )</a:t>
@@ -24469,7 +24385,7 @@
             </a:pPr>
             <a:r>
               <a:rPr lang="en-US" altLang="en-US" dirty="0"/>
-              <a:t>Methods may work better if the variables are all scaled to approximately 1.</a:t>
+              <a:t>Methods may work better if the variables are all scaled</a:t>
             </a:r>
           </a:p>
           <a:p>
@@ -25184,8 +25100,8 @@
         </p:nvSpPr>
         <p:spPr>
           <a:xfrm>
-            <a:off x="2692401" y="2354263"/>
-            <a:ext cx="2954215" cy="482600"/>
+            <a:off x="2692401" y="2410897"/>
+            <a:ext cx="2954215" cy="369332"/>
           </a:xfrm>
           <a:prstGeom prst="rect">
             <a:avLst/>
@@ -25193,53 +25109,68 @@
           <a:noFill/>
         </p:spPr>
         <p:txBody>
-          <a:bodyPr wrap="square" anchor="ctr" lIns="0" rIns="0" tIns="0" bIns="0">
+          <a:bodyPr wrap="square" lIns="0" tIns="0" rIns="0" bIns="0" anchor="ctr">
             <a:spAutoFit/>
           </a:bodyPr>
           <a:lstStyle/>
           <a:p>
             <a:r>
-              <a:rPr sz="1900">
+              <a:rPr sz="2400" dirty="0">
                 <a:latin typeface="Cambria"/>
               </a:rPr>
               <a:t>L</a:t>
             </a:r>
             <a:r>
-              <a:rPr sz="1900" baseline="-25000">
+              <a:rPr sz="2400" baseline="-25000" dirty="0">
                 <a:latin typeface="Cambria"/>
               </a:rPr>
               <a:t>a</a:t>
             </a:r>
             <a:r>
-              <a:rPr sz="1900">
+              <a:rPr sz="2400" dirty="0">
                 <a:latin typeface="Cambria"/>
               </a:rPr>
               <a:t> = ℓ</a:t>
             </a:r>
             <a:r>
-              <a:rPr sz="1900" baseline="-25000">
+              <a:rPr sz="2400" baseline="-25000" dirty="0">
                 <a:latin typeface="Cambria"/>
               </a:rPr>
               <a:t>∞</a:t>
             </a:r>
             <a:r>
-              <a:rPr sz="1900">
+              <a:rPr sz="2400" dirty="0">
                 <a:latin typeface="Cambria"/>
               </a:rPr>
               <a:t>(1 − e</a:t>
             </a:r>
             <a:r>
-              <a:rPr sz="1900" baseline="30000">
+              <a:rPr sz="2400" baseline="30000" dirty="0">
                 <a:latin typeface="Cambria"/>
               </a:rPr>
-              <a:t>−κa</a:t>
-            </a:r>
-            <a:r>
-              <a:rPr sz="1900">
+              <a:t>−</a:t>
+            </a:r>
+            <a:r>
+              <a:rPr sz="2400" baseline="30000" dirty="0" err="1">
                 <a:latin typeface="Cambria"/>
               </a:rPr>
-              <a:t>) + ε</a:t>
-            </a:r>
+              <a:t>κa</a:t>
+            </a:r>
+            <a:r>
+              <a:rPr sz="2400" dirty="0">
+                <a:latin typeface="Cambria"/>
+              </a:rPr>
+              <a:t>) + </a:t>
+            </a:r>
+            <a:r>
+              <a:rPr sz="2400" dirty="0" err="1">
+                <a:latin typeface="Cambria"/>
+              </a:rPr>
+              <a:t>ε</a:t>
+            </a:r>
+            <a:endParaRPr sz="2400" dirty="0">
+              <a:latin typeface="Cambria"/>
+            </a:endParaRPr>
           </a:p>
         </p:txBody>
       </p:sp>
@@ -25251,8 +25182,8 @@
         </p:nvSpPr>
         <p:spPr>
           <a:xfrm>
-            <a:off x="6780214" y="2354263"/>
-            <a:ext cx="1688123" cy="457200"/>
+            <a:off x="6780214" y="2398197"/>
+            <a:ext cx="1688123" cy="369332"/>
           </a:xfrm>
           <a:prstGeom prst="rect">
             <a:avLst/>
@@ -25260,25 +25191,25 @@
           <a:noFill/>
         </p:spPr>
         <p:txBody>
-          <a:bodyPr wrap="square" anchor="ctr" lIns="0" rIns="0" tIns="0" bIns="0">
+          <a:bodyPr wrap="square" lIns="0" tIns="0" rIns="0" bIns="0" anchor="ctr">
             <a:spAutoFit/>
           </a:bodyPr>
           <a:lstStyle/>
           <a:p>
             <a:r>
-              <a:rPr sz="1900">
+              <a:rPr sz="2400">
                 <a:latin typeface="Cambria"/>
               </a:rPr>
               <a:t>ε ~ N(0, σ</a:t>
             </a:r>
             <a:r>
-              <a:rPr sz="1900" baseline="30000">
+              <a:rPr sz="2400" baseline="30000">
                 <a:latin typeface="Cambria"/>
               </a:rPr>
               <a:t>2</a:t>
             </a:r>
             <a:r>
-              <a:rPr sz="1900">
+              <a:rPr sz="2400">
                 <a:latin typeface="Cambria"/>
               </a:rPr>
               <a:t>)</a:t>
@@ -25300,608 +25231,6 @@
 </file>
 
 <file path=ppt/slides/slide35.xml><?xml version="1.0" encoding="utf-8"?>
-<p:sld xmlns:a="http://schemas.openxmlformats.org/drawingml/2006/main" xmlns:r="http://schemas.openxmlformats.org/officeDocument/2006/relationships" xmlns:p="http://schemas.openxmlformats.org/presentationml/2006/main">
-  <p:cSld>
-    <p:spTree>
-      <p:nvGrpSpPr>
-        <p:cNvPr id="1" name=""/>
-        <p:cNvGrpSpPr/>
-        <p:nvPr/>
-      </p:nvGrpSpPr>
-      <p:grpSpPr>
-        <a:xfrm>
-          <a:off x="0" y="0"/>
-          <a:ext cx="0" cy="0"/>
-          <a:chOff x="0" y="0"/>
-          <a:chExt cx="0" cy="0"/>
-        </a:xfrm>
-      </p:grpSpPr>
-      <p:sp>
-        <p:nvSpPr>
-          <p:cNvPr id="15362" name="Text Box 2"/>
-          <p:cNvSpPr txBox="1">
-            <a:spLocks noChangeArrowheads="1"/>
-          </p:cNvSpPr>
-          <p:nvPr/>
-        </p:nvSpPr>
-        <p:spPr bwMode="auto">
-          <a:xfrm>
-            <a:off x="2260600" y="1414464"/>
-            <a:ext cx="7570788" cy="1938337"/>
-          </a:xfrm>
-          <a:prstGeom prst="rect">
-            <a:avLst/>
-          </a:prstGeom>
-          <a:noFill/>
-          <a:ln>
-            <a:noFill/>
-          </a:ln>
-          <a:effectLst/>
-          <a:extLst>
-            <a:ext uri="{909E8E84-426E-40DD-AFC4-6F175D3DCCD1}">
-              <a14:hiddenFill xmlns:a14="http://schemas.microsoft.com/office/drawing/2010/main">
-                <a:solidFill>
-                  <a:schemeClr val="accent1"/>
-                </a:solidFill>
-              </a14:hiddenFill>
-            </a:ext>
-            <a:ext uri="{91240B29-F687-4F45-9708-019B960494DF}">
-              <a14:hiddenLine xmlns:a14="http://schemas.microsoft.com/office/drawing/2010/main" w="9525">
-                <a:solidFill>
-                  <a:schemeClr val="tx1"/>
-                </a:solidFill>
-                <a:miter lim="800000"/>
-                <a:headEnd/>
-                <a:tailEnd/>
-              </a14:hiddenLine>
-            </a:ext>
-            <a:ext uri="{AF507438-7753-43E0-B8FC-AC1667EBCBE1}">
-              <a14:hiddenEffects xmlns:a14="http://schemas.microsoft.com/office/drawing/2010/main">
-                <a:effectLst>
-                  <a:outerShdw blurRad="63500" dist="38099" dir="2700000" algn="ctr" rotWithShape="0">
-                    <a:schemeClr val="bg2">
-                      <a:alpha val="74998"/>
-                    </a:schemeClr>
-                  </a:outerShdw>
-                </a:effectLst>
-              </a14:hiddenEffects>
-            </a:ext>
-          </a:extLst>
-        </p:spPr>
-        <p:txBody>
-          <a:bodyPr>
-            <a:spAutoFit/>
-          </a:bodyPr>
-          <a:lstStyle>
-            <a:lvl1pPr eaLnBrk="0" hangingPunct="0">
-              <a:defRPr sz="2400">
-                <a:solidFill>
-                  <a:schemeClr val="tx1"/>
-                </a:solidFill>
-                <a:latin typeface="Tahoma" charset="0"/>
-              </a:defRPr>
-            </a:lvl1pPr>
-            <a:lvl2pPr marL="742950" indent="-285750" eaLnBrk="0" hangingPunct="0">
-              <a:defRPr sz="2400">
-                <a:solidFill>
-                  <a:schemeClr val="tx1"/>
-                </a:solidFill>
-                <a:latin typeface="Tahoma" charset="0"/>
-              </a:defRPr>
-            </a:lvl2pPr>
-            <a:lvl3pPr marL="1143000" indent="-228600" eaLnBrk="0" hangingPunct="0">
-              <a:defRPr sz="2400">
-                <a:solidFill>
-                  <a:schemeClr val="tx1"/>
-                </a:solidFill>
-                <a:latin typeface="Tahoma" charset="0"/>
-              </a:defRPr>
-            </a:lvl3pPr>
-            <a:lvl4pPr marL="1600200" indent="-228600" eaLnBrk="0" hangingPunct="0">
-              <a:defRPr sz="2400">
-                <a:solidFill>
-                  <a:schemeClr val="tx1"/>
-                </a:solidFill>
-                <a:latin typeface="Tahoma" charset="0"/>
-              </a:defRPr>
-            </a:lvl4pPr>
-            <a:lvl5pPr marL="2057400" indent="-228600" eaLnBrk="0" hangingPunct="0">
-              <a:defRPr sz="2400">
-                <a:solidFill>
-                  <a:schemeClr val="tx1"/>
-                </a:solidFill>
-                <a:latin typeface="Tahoma" charset="0"/>
-              </a:defRPr>
-            </a:lvl5pPr>
-            <a:lvl6pPr marL="2514600" indent="-228600" algn="ctr" eaLnBrk="0" fontAlgn="base" hangingPunct="0">
-              <a:spcBef>
-                <a:spcPct val="0"/>
-              </a:spcBef>
-              <a:spcAft>
-                <a:spcPct val="0"/>
-              </a:spcAft>
-              <a:defRPr sz="2400">
-                <a:solidFill>
-                  <a:schemeClr val="tx1"/>
-                </a:solidFill>
-                <a:latin typeface="Tahoma" charset="0"/>
-              </a:defRPr>
-            </a:lvl6pPr>
-            <a:lvl7pPr marL="2971800" indent="-228600" algn="ctr" eaLnBrk="0" fontAlgn="base" hangingPunct="0">
-              <a:spcBef>
-                <a:spcPct val="0"/>
-              </a:spcBef>
-              <a:spcAft>
-                <a:spcPct val="0"/>
-              </a:spcAft>
-              <a:defRPr sz="2400">
-                <a:solidFill>
-                  <a:schemeClr val="tx1"/>
-                </a:solidFill>
-                <a:latin typeface="Tahoma" charset="0"/>
-              </a:defRPr>
-            </a:lvl7pPr>
-            <a:lvl8pPr marL="3429000" indent="-228600" algn="ctr" eaLnBrk="0" fontAlgn="base" hangingPunct="0">
-              <a:spcBef>
-                <a:spcPct val="0"/>
-              </a:spcBef>
-              <a:spcAft>
-                <a:spcPct val="0"/>
-              </a:spcAft>
-              <a:defRPr sz="2400">
-                <a:solidFill>
-                  <a:schemeClr val="tx1"/>
-                </a:solidFill>
-                <a:latin typeface="Tahoma" charset="0"/>
-              </a:defRPr>
-            </a:lvl8pPr>
-            <a:lvl9pPr marL="3886200" indent="-228600" algn="ctr" eaLnBrk="0" fontAlgn="base" hangingPunct="0">
-              <a:spcBef>
-                <a:spcPct val="0"/>
-              </a:spcBef>
-              <a:spcAft>
-                <a:spcPct val="0"/>
-              </a:spcAft>
-              <a:defRPr sz="2400">
-                <a:solidFill>
-                  <a:schemeClr val="tx1"/>
-                </a:solidFill>
-                <a:latin typeface="Tahoma" charset="0"/>
-              </a:defRPr>
-            </a:lvl9pPr>
-          </a:lstStyle>
-          <a:p>
-            <a:pPr eaLnBrk="1" hangingPunct="1">
-              <a:defRPr/>
-            </a:pPr>
-            <a:r>
-              <a:rPr lang="en-AU" altLang="en-US" dirty="0">
-                <a:solidFill>
-                  <a:srgbClr val="000000"/>
-                </a:solidFill>
-              </a:rPr>
-              <a:t>The length of a fish is related to its age according to the von </a:t>
-            </a:r>
-            <a:r>
-              <a:rPr lang="en-AU" altLang="en-US" dirty="0" err="1">
-                <a:solidFill>
-                  <a:srgbClr val="000000"/>
-                </a:solidFill>
-              </a:rPr>
-              <a:t>Bertalanffy</a:t>
-            </a:r>
-            <a:r>
-              <a:rPr lang="en-AU" altLang="en-US" dirty="0">
-                <a:solidFill>
-                  <a:srgbClr val="000000"/>
-                </a:solidFill>
-              </a:rPr>
-              <a:t> growth curve:</a:t>
-            </a:r>
-          </a:p>
-          <a:p>
-            <a:pPr eaLnBrk="1" hangingPunct="1">
-              <a:defRPr/>
-            </a:pPr>
-            <a:endParaRPr lang="en-AU" altLang="en-US" dirty="0">
-              <a:solidFill>
-                <a:srgbClr val="000000"/>
-              </a:solidFill>
-            </a:endParaRPr>
-          </a:p>
-          <a:p>
-            <a:pPr eaLnBrk="1" hangingPunct="1">
-              <a:defRPr/>
-            </a:pPr>
-            <a:endParaRPr lang="en-AU" altLang="en-US" dirty="0">
-              <a:solidFill>
-                <a:srgbClr val="000000"/>
-              </a:solidFill>
-            </a:endParaRPr>
-          </a:p>
-          <a:p>
-            <a:pPr eaLnBrk="1" hangingPunct="1">
-              <a:defRPr/>
-            </a:pPr>
-            <a:r>
-              <a:rPr lang="en-AU" altLang="en-US" dirty="0">
-                <a:solidFill>
-                  <a:srgbClr val="000000"/>
-                </a:solidFill>
-              </a:rPr>
-              <a:t>Below find some data for random fish</a:t>
-            </a:r>
-          </a:p>
-        </p:txBody>
-      </p:sp>
-      <p:pic>
-        <p:nvPicPr>
-          <p:cNvPr id="15363" name="Picture 3" descr="Two scatter plots, Females and Males, each Age in years (x, 5 to 25) versus Length in cm (y, 0 to 100). Points rise with age then plateau." title="Two scatter plots, Females and Males, each Age in years (x, 5 to 25) versus Leng"/>
-          <p:cNvPicPr>
-            <a:picLocks noChangeAspect="1" noChangeArrowheads="1"/>
-          </p:cNvPicPr>
-          <p:nvPr/>
-        </p:nvPicPr>
-        <p:blipFill>
-          <a:blip r:embed="rId3">
-            <a:extLst>
-              <a:ext uri="{28A0092B-C50C-407E-A947-70E740481C1C}">
-                <a14:useLocalDpi xmlns:a14="http://schemas.microsoft.com/office/drawing/2010/main" val="0"/>
-              </a:ext>
-            </a:extLst>
-          </a:blip>
-          <a:srcRect/>
-          <a:stretch>
-            <a:fillRect/>
-          </a:stretch>
-        </p:blipFill>
-        <p:spPr bwMode="auto">
-          <a:xfrm>
-            <a:off x="2667000" y="3124201"/>
-            <a:ext cx="6553200" cy="6543675"/>
-          </a:xfrm>
-          <a:prstGeom prst="rect">
-            <a:avLst/>
-          </a:prstGeom>
-          <a:noFill/>
-          <a:ln>
-            <a:noFill/>
-          </a:ln>
-          <a:effectLst/>
-          <a:extLst>
-            <a:ext uri="{909E8E84-426E-40DD-AFC4-6F175D3DCCD1}">
-              <a14:hiddenFill xmlns:a14="http://schemas.microsoft.com/office/drawing/2010/main">
-                <a:solidFill>
-                  <a:schemeClr val="accent1"/>
-                </a:solidFill>
-              </a14:hiddenFill>
-            </a:ext>
-            <a:ext uri="{91240B29-F687-4F45-9708-019B960494DF}">
-              <a14:hiddenLine xmlns:a14="http://schemas.microsoft.com/office/drawing/2010/main" w="9525">
-                <a:solidFill>
-                  <a:schemeClr val="tx1"/>
-                </a:solidFill>
-                <a:miter lim="800000"/>
-                <a:headEnd/>
-                <a:tailEnd/>
-              </a14:hiddenLine>
-            </a:ext>
-            <a:ext uri="{AF507438-7753-43E0-B8FC-AC1667EBCBE1}">
-              <a14:hiddenEffects xmlns:a14="http://schemas.microsoft.com/office/drawing/2010/main">
-                <a:effectLst>
-                  <a:outerShdw blurRad="63500" dist="38099" dir="2700000" algn="ctr" rotWithShape="0">
-                    <a:schemeClr val="bg2">
-                      <a:alpha val="74998"/>
-                    </a:schemeClr>
-                  </a:outerShdw>
-                </a:effectLst>
-              </a14:hiddenEffects>
-            </a:ext>
-          </a:extLst>
-        </p:spPr>
-      </p:pic>
-      <p:sp>
-        <p:nvSpPr>
-          <p:cNvPr id="15364" name="Rectangle 4"/>
-          <p:cNvSpPr>
-            <a:spLocks noGrp="1" noChangeArrowheads="1"/>
-          </p:cNvSpPr>
-          <p:nvPr>
-            <p:ph type="title"/>
-          </p:nvPr>
-        </p:nvSpPr>
-        <p:spPr>
-          <a:xfrm>
-            <a:off x="2441575" y="0"/>
-            <a:ext cx="7793038" cy="1143000"/>
-          </a:xfrm>
-        </p:spPr>
-        <p:txBody>
-          <a:bodyPr/>
-          <a:lstStyle/>
-          <a:p>
-            <a:pPr algn="ctr" eaLnBrk="1" hangingPunct="1">
-              <a:defRPr/>
-            </a:pPr>
-            <a:r>
-              <a:rPr lang="en-AU" altLang="en-US"/>
-              <a:t>Question 3</a:t>
-            </a:r>
-          </a:p>
-        </p:txBody>
-      </p:sp>
-      <p:sp>
-        <p:nvSpPr>
-          <p:cNvPr id="15367" name="Slide Number Placeholder 1"/>
-          <p:cNvSpPr>
-            <a:spLocks noGrp="1"/>
-          </p:cNvSpPr>
-          <p:nvPr>
-            <p:ph type="sldNum" sz="quarter" idx="12"/>
-          </p:nvPr>
-        </p:nvSpPr>
-        <p:spPr>
-          <a:extLst>
-            <a:ext uri="{AF507438-7753-43E0-B8FC-AC1667EBCBE1}">
-              <a14:hiddenEffects xmlns:a14="http://schemas.microsoft.com/office/drawing/2010/main">
-                <a:effectLst>
-                  <a:outerShdw blurRad="63500" dist="38099" dir="2700000" algn="ctr" rotWithShape="0">
-                    <a:schemeClr val="bg2">
-                      <a:alpha val="74998"/>
-                    </a:schemeClr>
-                  </a:outerShdw>
-                </a:effectLst>
-              </a14:hiddenEffects>
-            </a:ext>
-          </a:extLst>
-        </p:spPr>
-        <p:txBody>
-          <a:bodyPr/>
-          <a:lstStyle>
-            <a:lvl1pPr eaLnBrk="0" hangingPunct="0">
-              <a:defRPr sz="2400">
-                <a:solidFill>
-                  <a:schemeClr val="tx1"/>
-                </a:solidFill>
-                <a:latin typeface="Tahoma" charset="0"/>
-              </a:defRPr>
-            </a:lvl1pPr>
-            <a:lvl2pPr marL="742950" indent="-285750" eaLnBrk="0" hangingPunct="0">
-              <a:defRPr sz="2400">
-                <a:solidFill>
-                  <a:schemeClr val="tx1"/>
-                </a:solidFill>
-                <a:latin typeface="Tahoma" charset="0"/>
-              </a:defRPr>
-            </a:lvl2pPr>
-            <a:lvl3pPr marL="1143000" indent="-228600" eaLnBrk="0" hangingPunct="0">
-              <a:defRPr sz="2400">
-                <a:solidFill>
-                  <a:schemeClr val="tx1"/>
-                </a:solidFill>
-                <a:latin typeface="Tahoma" charset="0"/>
-              </a:defRPr>
-            </a:lvl3pPr>
-            <a:lvl4pPr marL="1600200" indent="-228600" eaLnBrk="0" hangingPunct="0">
-              <a:defRPr sz="2400">
-                <a:solidFill>
-                  <a:schemeClr val="tx1"/>
-                </a:solidFill>
-                <a:latin typeface="Tahoma" charset="0"/>
-              </a:defRPr>
-            </a:lvl4pPr>
-            <a:lvl5pPr marL="2057400" indent="-228600" eaLnBrk="0" hangingPunct="0">
-              <a:defRPr sz="2400">
-                <a:solidFill>
-                  <a:schemeClr val="tx1"/>
-                </a:solidFill>
-                <a:latin typeface="Tahoma" charset="0"/>
-              </a:defRPr>
-            </a:lvl5pPr>
-            <a:lvl6pPr marL="2514600" indent="-228600" algn="ctr" eaLnBrk="0" fontAlgn="base" hangingPunct="0">
-              <a:spcBef>
-                <a:spcPct val="0"/>
-              </a:spcBef>
-              <a:spcAft>
-                <a:spcPct val="0"/>
-              </a:spcAft>
-              <a:defRPr sz="2400">
-                <a:solidFill>
-                  <a:schemeClr val="tx1"/>
-                </a:solidFill>
-                <a:latin typeface="Tahoma" charset="0"/>
-              </a:defRPr>
-            </a:lvl6pPr>
-            <a:lvl7pPr marL="2971800" indent="-228600" algn="ctr" eaLnBrk="0" fontAlgn="base" hangingPunct="0">
-              <a:spcBef>
-                <a:spcPct val="0"/>
-              </a:spcBef>
-              <a:spcAft>
-                <a:spcPct val="0"/>
-              </a:spcAft>
-              <a:defRPr sz="2400">
-                <a:solidFill>
-                  <a:schemeClr val="tx1"/>
-                </a:solidFill>
-                <a:latin typeface="Tahoma" charset="0"/>
-              </a:defRPr>
-            </a:lvl7pPr>
-            <a:lvl8pPr marL="3429000" indent="-228600" algn="ctr" eaLnBrk="0" fontAlgn="base" hangingPunct="0">
-              <a:spcBef>
-                <a:spcPct val="0"/>
-              </a:spcBef>
-              <a:spcAft>
-                <a:spcPct val="0"/>
-              </a:spcAft>
-              <a:defRPr sz="2400">
-                <a:solidFill>
-                  <a:schemeClr val="tx1"/>
-                </a:solidFill>
-                <a:latin typeface="Tahoma" charset="0"/>
-              </a:defRPr>
-            </a:lvl8pPr>
-            <a:lvl9pPr marL="3886200" indent="-228600" algn="ctr" eaLnBrk="0" fontAlgn="base" hangingPunct="0">
-              <a:spcBef>
-                <a:spcPct val="0"/>
-              </a:spcBef>
-              <a:spcAft>
-                <a:spcPct val="0"/>
-              </a:spcAft>
-              <a:defRPr sz="2400">
-                <a:solidFill>
-                  <a:schemeClr val="tx1"/>
-                </a:solidFill>
-                <a:latin typeface="Tahoma" charset="0"/>
-              </a:defRPr>
-            </a:lvl9pPr>
-          </a:lstStyle>
-          <a:p>
-            <a:pPr eaLnBrk="1" hangingPunct="1">
-              <a:defRPr/>
-            </a:pPr>
-            <a:fld id="{CCE8E203-2336-0E49-A1D0-7190259E16E8}" type="slidenum">
-              <a:rPr lang="en-US" altLang="en-US" sz="1400">
-                <a:solidFill>
-                  <a:srgbClr val="000000"/>
-                </a:solidFill>
-              </a:rPr>
-              <a:pPr eaLnBrk="1" hangingPunct="1">
-                <a:defRPr/>
-              </a:pPr>
-              <a:t>35</a:t>
-            </a:fld>
-            <a:endParaRPr lang="en-US" altLang="en-US" sz="1400">
-              <a:solidFill>
-                <a:srgbClr val="000000"/>
-              </a:solidFill>
-            </a:endParaRPr>
-          </a:p>
-        </p:txBody>
-      </p:sp>
-      <p:sp>
-        <p:nvSpPr>
-          <p:cNvPr id="51206" name="TextBox 51205"/>
-          <p:cNvSpPr txBox="1"/>
-          <p:nvPr/>
-        </p:nvSpPr>
-        <p:spPr>
-          <a:xfrm>
-            <a:off x="2898776" y="2298700"/>
-            <a:ext cx="2954215" cy="482600"/>
-          </a:xfrm>
-          <a:prstGeom prst="rect">
-            <a:avLst/>
-          </a:prstGeom>
-          <a:noFill/>
-        </p:spPr>
-        <p:txBody>
-          <a:bodyPr wrap="square" anchor="ctr" lIns="0" rIns="0" tIns="0" bIns="0">
-            <a:spAutoFit/>
-          </a:bodyPr>
-          <a:lstStyle/>
-          <a:p>
-            <a:r>
-              <a:rPr sz="1900">
-                <a:latin typeface="Cambria"/>
-              </a:rPr>
-              <a:t>L</a:t>
-            </a:r>
-            <a:r>
-              <a:rPr sz="1900" baseline="-25000">
-                <a:latin typeface="Cambria"/>
-              </a:rPr>
-              <a:t>a</a:t>
-            </a:r>
-            <a:r>
-              <a:rPr sz="1900">
-                <a:latin typeface="Cambria"/>
-              </a:rPr>
-              <a:t> = ℓ</a:t>
-            </a:r>
-            <a:r>
-              <a:rPr sz="1900" baseline="-25000">
-                <a:latin typeface="Cambria"/>
-              </a:rPr>
-              <a:t>∞</a:t>
-            </a:r>
-            <a:r>
-              <a:rPr sz="1900">
-                <a:latin typeface="Cambria"/>
-              </a:rPr>
-              <a:t>(1 − e</a:t>
-            </a:r>
-            <a:r>
-              <a:rPr sz="1900" baseline="30000">
-                <a:latin typeface="Cambria"/>
-              </a:rPr>
-              <a:t>−κa</a:t>
-            </a:r>
-            <a:r>
-              <a:rPr sz="1900">
-                <a:latin typeface="Cambria"/>
-              </a:rPr>
-              <a:t>) + ε</a:t>
-            </a:r>
-          </a:p>
-        </p:txBody>
-      </p:sp>
-      <p:sp>
-        <p:nvSpPr>
-          <p:cNvPr id="51207" name="TextBox 51206"/>
-          <p:cNvSpPr txBox="1"/>
-          <p:nvPr/>
-        </p:nvSpPr>
-        <p:spPr>
-          <a:xfrm>
-            <a:off x="7059614" y="2298700"/>
-            <a:ext cx="1688123" cy="457200"/>
-          </a:xfrm>
-          <a:prstGeom prst="rect">
-            <a:avLst/>
-          </a:prstGeom>
-          <a:noFill/>
-        </p:spPr>
-        <p:txBody>
-          <a:bodyPr wrap="square" anchor="ctr" lIns="0" rIns="0" tIns="0" bIns="0">
-            <a:spAutoFit/>
-          </a:bodyPr>
-          <a:lstStyle/>
-          <a:p>
-            <a:r>
-              <a:rPr sz="1900">
-                <a:latin typeface="Cambria"/>
-              </a:rPr>
-              <a:t>ε ~ N(0, σ</a:t>
-            </a:r>
-            <a:r>
-              <a:rPr sz="1900" baseline="30000">
-                <a:latin typeface="Cambria"/>
-              </a:rPr>
-              <a:t>2</a:t>
-            </a:r>
-            <a:r>
-              <a:rPr sz="1900">
-                <a:latin typeface="Cambria"/>
-              </a:rPr>
-              <a:t>)</a:t>
-            </a:r>
-          </a:p>
-        </p:txBody>
-      </p:sp>
-    </p:spTree>
-    <p:extLst>
-      <p:ext uri="{BB962C8B-B14F-4D97-AF65-F5344CB8AC3E}">
-        <p14:creationId xmlns:p14="http://schemas.microsoft.com/office/powerpoint/2010/main" val="589956041"/>
-      </p:ext>
-    </p:extLst>
-  </p:cSld>
-  <p:clrMapOvr>
-    <a:masterClrMapping/>
-  </p:clrMapOvr>
-</p:sld>
-</file>
-
-<file path=ppt/slides/slide36.xml><?xml version="1.0" encoding="utf-8"?>
 <p:sld xmlns:a="http://schemas.openxmlformats.org/drawingml/2006/main" xmlns:r="http://schemas.openxmlformats.org/officeDocument/2006/relationships" xmlns:p="http://schemas.openxmlformats.org/presentationml/2006/main">
   <p:cSld>
     <p:spTree>
@@ -25958,8 +25287,8 @@
         </p:nvSpPr>
         <p:spPr bwMode="auto">
           <a:xfrm>
-            <a:off x="1905001" y="1600201"/>
-            <a:ext cx="8730532" cy="4708981"/>
+            <a:off x="1160586" y="1600201"/>
+            <a:ext cx="10351476" cy="4339650"/>
           </a:xfrm>
           <a:prstGeom prst="rect">
             <a:avLst/>
@@ -26001,7 +25330,7 @@
           </a:extLst>
         </p:spPr>
         <p:txBody>
-          <a:bodyPr wrap="none">
+          <a:bodyPr wrap="square">
             <a:spAutoFit/>
           </a:bodyPr>
           <a:lstStyle>
@@ -26117,24 +25446,15 @@
               <a:t>ℓ</a:t>
             </a:r>
             <a:r>
-              <a:rPr lang="en-AU" altLang="en-US" dirty="0" baseline="-25000">
+              <a:rPr lang="en-AU" altLang="en-US" baseline="-25000" dirty="0">
                 <a:latin typeface="Cambria"/>
               </a:rPr>
               <a:t>∞</a:t>
             </a:r>
             <a:r>
               <a:rPr lang="en-AU" altLang="en-US" dirty="0"/>
-              <a:t>, </a:t>
-            </a:r>
-            <a:r>
-              <a:rPr lang="en-AU" altLang="en-US" dirty="0"/>
-              <a:t>κ, and σ from the age and </a:t>
-            </a:r>
-          </a:p>
-          <a:p>
-            <a:pPr eaLnBrk="1" hangingPunct="1">
-              <a:defRPr/>
-            </a:pPr>
+              <a:t>, κ, and σ from the age and </a:t>
+            </a:r>
             <a:r>
               <a:rPr lang="en-AU" altLang="en-US" dirty="0">
                 <a:sym typeface="Symbol" charset="2"/>
@@ -26417,7 +25737,7 @@
               <a:pPr eaLnBrk="1" hangingPunct="1">
                 <a:defRPr/>
               </a:pPr>
-              <a:t>36</a:t>
+              <a:t>35</a:t>
             </a:fld>
             <a:endParaRPr lang="en-US" altLang="en-US" sz="1400" dirty="0"/>
           </a:p>
@@ -26436,7 +25756,7 @@
 </p:sld>
 </file>
 
-<file path=ppt/slides/slide37.xml><?xml version="1.0" encoding="utf-8"?>
+<file path=ppt/slides/slide36.xml><?xml version="1.0" encoding="utf-8"?>
 <p:sld xmlns:a="http://schemas.openxmlformats.org/drawingml/2006/main" xmlns:r="http://schemas.openxmlformats.org/officeDocument/2006/relationships" xmlns:p="http://schemas.openxmlformats.org/presentationml/2006/main">
   <p:cSld>
     <p:spTree>
@@ -30438,7 +29758,7 @@
               <a:pPr eaLnBrk="1" hangingPunct="1">
                 <a:defRPr/>
               </a:pPr>
-              <a:t>37</a:t>
+              <a:t>36</a:t>
             </a:fld>
             <a:endParaRPr lang="en-US" altLang="en-US" sz="1400"/>
           </a:p>
@@ -30457,7 +29777,7 @@
 </p:sld>
 </file>
 
-<file path=ppt/slides/slide38.xml><?xml version="1.0" encoding="utf-8"?>
+<file path=ppt/slides/slide37.xml><?xml version="1.0" encoding="utf-8"?>
 <p:sld xmlns:a="http://schemas.openxmlformats.org/drawingml/2006/main" xmlns:r="http://schemas.openxmlformats.org/officeDocument/2006/relationships" xmlns:p="http://schemas.openxmlformats.org/presentationml/2006/main">
   <p:cSld>
     <p:spTree>
@@ -31155,7 +30475,7 @@
               <a:pPr eaLnBrk="1" hangingPunct="1">
                 <a:defRPr/>
               </a:pPr>
-              <a:t>38</a:t>
+              <a:t>37</a:t>
             </a:fld>
             <a:endParaRPr lang="en-US" altLang="en-US" sz="1400"/>
           </a:p>
@@ -31660,8 +30980,8 @@
         </p:nvSpPr>
         <p:spPr bwMode="auto">
           <a:xfrm flipV="1">
-            <a:off x="2743199" y="3001109"/>
-            <a:ext cx="1676400" cy="914400"/>
+            <a:off x="2743199" y="3077309"/>
+            <a:ext cx="1371600" cy="838200"/>
           </a:xfrm>
           <a:prstGeom prst="line">
             <a:avLst/>
@@ -31881,8 +31201,8 @@
         </p:nvSpPr>
         <p:spPr bwMode="auto">
           <a:xfrm flipH="1" flipV="1">
-            <a:off x="3505199" y="3229709"/>
-            <a:ext cx="1905000" cy="685800"/>
+            <a:off x="3311524" y="3255109"/>
+            <a:ext cx="2098675" cy="660400"/>
           </a:xfrm>
           <a:prstGeom prst="line">
             <a:avLst/>
@@ -31937,8 +31257,8 @@
         </p:nvSpPr>
         <p:spPr bwMode="auto">
           <a:xfrm flipH="1" flipV="1">
-            <a:off x="4267199" y="3001109"/>
-            <a:ext cx="1600200" cy="914400"/>
+            <a:off x="4013199" y="3153509"/>
+            <a:ext cx="1854200" cy="762000"/>
           </a:xfrm>
           <a:prstGeom prst="line">
             <a:avLst/>
@@ -32214,8 +31534,8 @@
         </p:nvSpPr>
         <p:spPr bwMode="auto">
           <a:xfrm flipH="1" flipV="1">
-            <a:off x="7391399" y="3077309"/>
-            <a:ext cx="1219200" cy="685800"/>
+            <a:off x="7391399" y="3077308"/>
+            <a:ext cx="1230312" cy="753209"/>
           </a:xfrm>
           <a:prstGeom prst="line">
             <a:avLst/>
@@ -32270,8 +31590,8 @@
         </p:nvSpPr>
         <p:spPr bwMode="auto">
           <a:xfrm flipH="1" flipV="1">
-            <a:off x="5105399" y="3077309"/>
-            <a:ext cx="3352800" cy="914400"/>
+            <a:off x="4648198" y="3100755"/>
+            <a:ext cx="3821113" cy="916354"/>
           </a:xfrm>
           <a:prstGeom prst="line">
             <a:avLst/>
@@ -32505,7 +31825,7 @@
           <a:noFill/>
         </p:spPr>
         <p:txBody>
-          <a:bodyPr wrap="square" anchor="ctr" lIns="0" rIns="0" tIns="0" bIns="0">
+          <a:bodyPr wrap="square" lIns="0" tIns="0" rIns="0" bIns="0" anchor="ctr">
             <a:spAutoFit/>
           </a:bodyPr>
           <a:lstStyle/>
@@ -32563,7 +31883,7 @@
         </p:nvSpPr>
         <p:spPr>
           <a:xfrm>
-            <a:off x="7162799" y="2696309"/>
+            <a:off x="7205845" y="2640626"/>
             <a:ext cx="1688123" cy="457200"/>
           </a:xfrm>
           <a:prstGeom prst="rect">
@@ -32572,7 +31892,7 @@
           <a:noFill/>
         </p:spPr>
         <p:txBody>
-          <a:bodyPr wrap="square" anchor="ctr" lIns="0" rIns="0" tIns="0" bIns="0">
+          <a:bodyPr wrap="square" lIns="0" tIns="0" rIns="0" bIns="0" anchor="ctr">
             <a:spAutoFit/>
           </a:bodyPr>
           <a:lstStyle/>
@@ -33819,7 +33139,7 @@
         </p:nvSpPr>
         <p:spPr bwMode="auto">
           <a:xfrm>
-            <a:off x="0" y="5412544"/>
+            <a:off x="0" y="5260144"/>
             <a:ext cx="4472990" cy="1200329"/>
           </a:xfrm>
           <a:prstGeom prst="rect">
@@ -33969,7 +33289,7 @@
             </a:pPr>
             <a:r>
               <a:rPr lang="en-AU" altLang="en-US" dirty="0"/>
-              <a:t>Notation often inconsistent, but IMO better  to put parameters conditional on data</a:t>
+              <a:t>Notation often inconsistent, but better to put parameters conditional on data</a:t>
             </a:r>
           </a:p>
         </p:txBody>
@@ -33984,7 +33304,7 @@
         </p:nvSpPr>
         <p:spPr bwMode="auto">
           <a:xfrm>
-            <a:off x="4619951" y="5181711"/>
+            <a:off x="4350320" y="5998808"/>
             <a:ext cx="2593979" cy="461665"/>
           </a:xfrm>
           <a:prstGeom prst="rect">
@@ -34157,7 +33477,7 @@
         </p:nvSpPr>
         <p:spPr bwMode="auto">
           <a:xfrm flipV="1">
-            <a:off x="2630384" y="4345744"/>
+            <a:off x="2876568" y="4203864"/>
             <a:ext cx="152400" cy="914400"/>
           </a:xfrm>
           <a:prstGeom prst="line">
@@ -34213,7 +33533,229 @@
         </p:nvSpPr>
         <p:spPr bwMode="auto">
           <a:xfrm flipH="1" flipV="1">
-            <a:off x="4606637" y="4291680"/>
+            <a:off x="3839411" y="4104327"/>
+            <a:ext cx="1025665" cy="1780657"/>
+          </a:xfrm>
+          <a:prstGeom prst="line">
+            <a:avLst/>
+          </a:prstGeom>
+          <a:noFill/>
+          <a:ln w="38100">
+            <a:solidFill>
+              <a:schemeClr val="hlink"/>
+            </a:solidFill>
+            <a:round/>
+            <a:headEnd/>
+            <a:tailEnd type="triangle" w="med" len="med"/>
+          </a:ln>
+          <a:effectLst/>
+          <a:extLst>
+            <a:ext uri="{909E8E84-426E-40DD-AFC4-6F175D3DCCD1}">
+              <a14:hiddenFill xmlns:a14="http://schemas.microsoft.com/office/drawing/2010/main">
+                <a:noFill/>
+              </a14:hiddenFill>
+            </a:ext>
+            <a:ext uri="{AF507438-7753-43E0-B8FC-AC1667EBCBE1}">
+              <a14:hiddenEffects xmlns:a14="http://schemas.microsoft.com/office/drawing/2010/main">
+                <a:effectLst>
+                  <a:outerShdw blurRad="63500" dist="38099" dir="2700000" algn="ctr" rotWithShape="0">
+                    <a:schemeClr val="bg2">
+                      <a:alpha val="74998"/>
+                    </a:schemeClr>
+                  </a:outerShdw>
+                </a:effectLst>
+              </a14:hiddenEffects>
+            </a:ext>
+          </a:extLst>
+        </p:spPr>
+        <p:txBody>
+          <a:bodyPr wrap="none"/>
+          <a:lstStyle/>
+          <a:p>
+            <a:pPr algn="ctr" eaLnBrk="1" hangingPunct="1">
+              <a:defRPr/>
+            </a:pPr>
+            <a:endParaRPr lang="en-US"/>
+          </a:p>
+        </p:txBody>
+      </p:sp>
+      <p:sp>
+        <p:nvSpPr>
+          <p:cNvPr id="15" name="Text Box 9"/>
+          <p:cNvSpPr txBox="1">
+            <a:spLocks noChangeArrowheads="1"/>
+          </p:cNvSpPr>
+          <p:nvPr/>
+        </p:nvSpPr>
+        <p:spPr bwMode="auto">
+          <a:xfrm>
+            <a:off x="6689876" y="4705766"/>
+            <a:ext cx="4293733" cy="830997"/>
+          </a:xfrm>
+          <a:prstGeom prst="rect">
+            <a:avLst/>
+          </a:prstGeom>
+          <a:noFill/>
+          <a:ln>
+            <a:noFill/>
+          </a:ln>
+          <a:effectLst/>
+          <a:extLst>
+            <a:ext uri="{909E8E84-426E-40DD-AFC4-6F175D3DCCD1}">
+              <a14:hiddenFill xmlns:a14="http://schemas.microsoft.com/office/drawing/2010/main">
+                <a:solidFill>
+                  <a:schemeClr val="accent1"/>
+                </a:solidFill>
+              </a14:hiddenFill>
+            </a:ext>
+            <a:ext uri="{91240B29-F687-4F45-9708-019B960494DF}">
+              <a14:hiddenLine xmlns:a14="http://schemas.microsoft.com/office/drawing/2010/main" w="9525">
+                <a:solidFill>
+                  <a:schemeClr val="tx1"/>
+                </a:solidFill>
+                <a:miter lim="800000"/>
+                <a:headEnd/>
+                <a:tailEnd/>
+              </a14:hiddenLine>
+            </a:ext>
+            <a:ext uri="{AF507438-7753-43E0-B8FC-AC1667EBCBE1}">
+              <a14:hiddenEffects xmlns:a14="http://schemas.microsoft.com/office/drawing/2010/main">
+                <a:effectLst>
+                  <a:outerShdw blurRad="63500" dist="38099" dir="2700000" algn="ctr" rotWithShape="0">
+                    <a:schemeClr val="bg2">
+                      <a:alpha val="74998"/>
+                    </a:schemeClr>
+                  </a:outerShdw>
+                </a:effectLst>
+              </a14:hiddenEffects>
+            </a:ext>
+          </a:extLst>
+        </p:spPr>
+        <p:txBody>
+          <a:bodyPr wrap="square">
+            <a:spAutoFit/>
+          </a:bodyPr>
+          <a:lstStyle>
+            <a:lvl1pPr eaLnBrk="0" hangingPunct="0">
+              <a:defRPr sz="2400">
+                <a:solidFill>
+                  <a:schemeClr val="tx1"/>
+                </a:solidFill>
+                <a:latin typeface="Tahoma" charset="0"/>
+              </a:defRPr>
+            </a:lvl1pPr>
+            <a:lvl2pPr marL="742950" indent="-285750" eaLnBrk="0" hangingPunct="0">
+              <a:defRPr sz="2400">
+                <a:solidFill>
+                  <a:schemeClr val="tx1"/>
+                </a:solidFill>
+                <a:latin typeface="Tahoma" charset="0"/>
+              </a:defRPr>
+            </a:lvl2pPr>
+            <a:lvl3pPr marL="1143000" indent="-228600" eaLnBrk="0" hangingPunct="0">
+              <a:defRPr sz="2400">
+                <a:solidFill>
+                  <a:schemeClr val="tx1"/>
+                </a:solidFill>
+                <a:latin typeface="Tahoma" charset="0"/>
+              </a:defRPr>
+            </a:lvl3pPr>
+            <a:lvl4pPr marL="1600200" indent="-228600" eaLnBrk="0" hangingPunct="0">
+              <a:defRPr sz="2400">
+                <a:solidFill>
+                  <a:schemeClr val="tx1"/>
+                </a:solidFill>
+                <a:latin typeface="Tahoma" charset="0"/>
+              </a:defRPr>
+            </a:lvl4pPr>
+            <a:lvl5pPr marL="2057400" indent="-228600" eaLnBrk="0" hangingPunct="0">
+              <a:defRPr sz="2400">
+                <a:solidFill>
+                  <a:schemeClr val="tx1"/>
+                </a:solidFill>
+                <a:latin typeface="Tahoma" charset="0"/>
+              </a:defRPr>
+            </a:lvl5pPr>
+            <a:lvl6pPr marL="2514600" indent="-228600" algn="ctr" eaLnBrk="0" fontAlgn="base" hangingPunct="0">
+              <a:spcBef>
+                <a:spcPct val="0"/>
+              </a:spcBef>
+              <a:spcAft>
+                <a:spcPct val="0"/>
+              </a:spcAft>
+              <a:defRPr sz="2400">
+                <a:solidFill>
+                  <a:schemeClr val="tx1"/>
+                </a:solidFill>
+                <a:latin typeface="Tahoma" charset="0"/>
+              </a:defRPr>
+            </a:lvl6pPr>
+            <a:lvl7pPr marL="2971800" indent="-228600" algn="ctr" eaLnBrk="0" fontAlgn="base" hangingPunct="0">
+              <a:spcBef>
+                <a:spcPct val="0"/>
+              </a:spcBef>
+              <a:spcAft>
+                <a:spcPct val="0"/>
+              </a:spcAft>
+              <a:defRPr sz="2400">
+                <a:solidFill>
+                  <a:schemeClr val="tx1"/>
+                </a:solidFill>
+                <a:latin typeface="Tahoma" charset="0"/>
+              </a:defRPr>
+            </a:lvl7pPr>
+            <a:lvl8pPr marL="3429000" indent="-228600" algn="ctr" eaLnBrk="0" fontAlgn="base" hangingPunct="0">
+              <a:spcBef>
+                <a:spcPct val="0"/>
+              </a:spcBef>
+              <a:spcAft>
+                <a:spcPct val="0"/>
+              </a:spcAft>
+              <a:defRPr sz="2400">
+                <a:solidFill>
+                  <a:schemeClr val="tx1"/>
+                </a:solidFill>
+                <a:latin typeface="Tahoma" charset="0"/>
+              </a:defRPr>
+            </a:lvl8pPr>
+            <a:lvl9pPr marL="3886200" indent="-228600" algn="ctr" eaLnBrk="0" fontAlgn="base" hangingPunct="0">
+              <a:spcBef>
+                <a:spcPct val="0"/>
+              </a:spcBef>
+              <a:spcAft>
+                <a:spcPct val="0"/>
+              </a:spcAft>
+              <a:defRPr sz="2400">
+                <a:solidFill>
+                  <a:schemeClr val="tx1"/>
+                </a:solidFill>
+                <a:latin typeface="Tahoma" charset="0"/>
+              </a:defRPr>
+            </a:lvl9pPr>
+          </a:lstStyle>
+          <a:p>
+            <a:pPr algn="ctr" eaLnBrk="1" hangingPunct="1">
+              <a:defRPr/>
+            </a:pPr>
+            <a:r>
+              <a:rPr lang="en-AU" altLang="en-US" dirty="0"/>
+              <a:t>Product of the PDF/Likelihood across all data points</a:t>
+            </a:r>
+            <a:endParaRPr lang="en-AU" altLang="en-US" i="1" baseline="-25000" dirty="0"/>
+          </a:p>
+        </p:txBody>
+      </p:sp>
+      <p:sp>
+        <p:nvSpPr>
+          <p:cNvPr id="16" name="Line 11"/>
+          <p:cNvSpPr>
+            <a:spLocks noChangeShapeType="1"/>
+          </p:cNvSpPr>
+          <p:nvPr/>
+        </p:nvSpPr>
+        <p:spPr bwMode="auto">
+          <a:xfrm flipH="1" flipV="1">
+            <a:off x="5850745" y="4241964"/>
             <a:ext cx="685800" cy="838200"/>
           </a:xfrm>
           <a:prstGeom prst="line">
@@ -34261,228 +33803,6 @@
       </p:sp>
       <p:sp>
         <p:nvSpPr>
-          <p:cNvPr id="15" name="Text Box 9"/>
-          <p:cNvSpPr txBox="1">
-            <a:spLocks noChangeArrowheads="1"/>
-          </p:cNvSpPr>
-          <p:nvPr/>
-        </p:nvSpPr>
-        <p:spPr bwMode="auto">
-          <a:xfrm>
-            <a:off x="7522215" y="5260144"/>
-            <a:ext cx="4293733" cy="830997"/>
-          </a:xfrm>
-          <a:prstGeom prst="rect">
-            <a:avLst/>
-          </a:prstGeom>
-          <a:noFill/>
-          <a:ln>
-            <a:noFill/>
-          </a:ln>
-          <a:effectLst/>
-          <a:extLst>
-            <a:ext uri="{909E8E84-426E-40DD-AFC4-6F175D3DCCD1}">
-              <a14:hiddenFill xmlns:a14="http://schemas.microsoft.com/office/drawing/2010/main">
-                <a:solidFill>
-                  <a:schemeClr val="accent1"/>
-                </a:solidFill>
-              </a14:hiddenFill>
-            </a:ext>
-            <a:ext uri="{91240B29-F687-4F45-9708-019B960494DF}">
-              <a14:hiddenLine xmlns:a14="http://schemas.microsoft.com/office/drawing/2010/main" w="9525">
-                <a:solidFill>
-                  <a:schemeClr val="tx1"/>
-                </a:solidFill>
-                <a:miter lim="800000"/>
-                <a:headEnd/>
-                <a:tailEnd/>
-              </a14:hiddenLine>
-            </a:ext>
-            <a:ext uri="{AF507438-7753-43E0-B8FC-AC1667EBCBE1}">
-              <a14:hiddenEffects xmlns:a14="http://schemas.microsoft.com/office/drawing/2010/main">
-                <a:effectLst>
-                  <a:outerShdw blurRad="63500" dist="38099" dir="2700000" algn="ctr" rotWithShape="0">
-                    <a:schemeClr val="bg2">
-                      <a:alpha val="74998"/>
-                    </a:schemeClr>
-                  </a:outerShdw>
-                </a:effectLst>
-              </a14:hiddenEffects>
-            </a:ext>
-          </a:extLst>
-        </p:spPr>
-        <p:txBody>
-          <a:bodyPr wrap="square">
-            <a:spAutoFit/>
-          </a:bodyPr>
-          <a:lstStyle>
-            <a:lvl1pPr eaLnBrk="0" hangingPunct="0">
-              <a:defRPr sz="2400">
-                <a:solidFill>
-                  <a:schemeClr val="tx1"/>
-                </a:solidFill>
-                <a:latin typeface="Tahoma" charset="0"/>
-              </a:defRPr>
-            </a:lvl1pPr>
-            <a:lvl2pPr marL="742950" indent="-285750" eaLnBrk="0" hangingPunct="0">
-              <a:defRPr sz="2400">
-                <a:solidFill>
-                  <a:schemeClr val="tx1"/>
-                </a:solidFill>
-                <a:latin typeface="Tahoma" charset="0"/>
-              </a:defRPr>
-            </a:lvl2pPr>
-            <a:lvl3pPr marL="1143000" indent="-228600" eaLnBrk="0" hangingPunct="0">
-              <a:defRPr sz="2400">
-                <a:solidFill>
-                  <a:schemeClr val="tx1"/>
-                </a:solidFill>
-                <a:latin typeface="Tahoma" charset="0"/>
-              </a:defRPr>
-            </a:lvl3pPr>
-            <a:lvl4pPr marL="1600200" indent="-228600" eaLnBrk="0" hangingPunct="0">
-              <a:defRPr sz="2400">
-                <a:solidFill>
-                  <a:schemeClr val="tx1"/>
-                </a:solidFill>
-                <a:latin typeface="Tahoma" charset="0"/>
-              </a:defRPr>
-            </a:lvl4pPr>
-            <a:lvl5pPr marL="2057400" indent="-228600" eaLnBrk="0" hangingPunct="0">
-              <a:defRPr sz="2400">
-                <a:solidFill>
-                  <a:schemeClr val="tx1"/>
-                </a:solidFill>
-                <a:latin typeface="Tahoma" charset="0"/>
-              </a:defRPr>
-            </a:lvl5pPr>
-            <a:lvl6pPr marL="2514600" indent="-228600" algn="ctr" eaLnBrk="0" fontAlgn="base" hangingPunct="0">
-              <a:spcBef>
-                <a:spcPct val="0"/>
-              </a:spcBef>
-              <a:spcAft>
-                <a:spcPct val="0"/>
-              </a:spcAft>
-              <a:defRPr sz="2400">
-                <a:solidFill>
-                  <a:schemeClr val="tx1"/>
-                </a:solidFill>
-                <a:latin typeface="Tahoma" charset="0"/>
-              </a:defRPr>
-            </a:lvl6pPr>
-            <a:lvl7pPr marL="2971800" indent="-228600" algn="ctr" eaLnBrk="0" fontAlgn="base" hangingPunct="0">
-              <a:spcBef>
-                <a:spcPct val="0"/>
-              </a:spcBef>
-              <a:spcAft>
-                <a:spcPct val="0"/>
-              </a:spcAft>
-              <a:defRPr sz="2400">
-                <a:solidFill>
-                  <a:schemeClr val="tx1"/>
-                </a:solidFill>
-                <a:latin typeface="Tahoma" charset="0"/>
-              </a:defRPr>
-            </a:lvl7pPr>
-            <a:lvl8pPr marL="3429000" indent="-228600" algn="ctr" eaLnBrk="0" fontAlgn="base" hangingPunct="0">
-              <a:spcBef>
-                <a:spcPct val="0"/>
-              </a:spcBef>
-              <a:spcAft>
-                <a:spcPct val="0"/>
-              </a:spcAft>
-              <a:defRPr sz="2400">
-                <a:solidFill>
-                  <a:schemeClr val="tx1"/>
-                </a:solidFill>
-                <a:latin typeface="Tahoma" charset="0"/>
-              </a:defRPr>
-            </a:lvl8pPr>
-            <a:lvl9pPr marL="3886200" indent="-228600" algn="ctr" eaLnBrk="0" fontAlgn="base" hangingPunct="0">
-              <a:spcBef>
-                <a:spcPct val="0"/>
-              </a:spcBef>
-              <a:spcAft>
-                <a:spcPct val="0"/>
-              </a:spcAft>
-              <a:defRPr sz="2400">
-                <a:solidFill>
-                  <a:schemeClr val="tx1"/>
-                </a:solidFill>
-                <a:latin typeface="Tahoma" charset="0"/>
-              </a:defRPr>
-            </a:lvl9pPr>
-          </a:lstStyle>
-          <a:p>
-            <a:pPr algn="ctr" eaLnBrk="1" hangingPunct="1">
-              <a:defRPr/>
-            </a:pPr>
-            <a:r>
-              <a:rPr lang="en-AU" altLang="en-US" dirty="0"/>
-              <a:t>Product of the PDF/Likelihood across all data points</a:t>
-            </a:r>
-            <a:endParaRPr lang="en-AU" altLang="en-US" i="1" baseline="-25000" dirty="0"/>
-          </a:p>
-        </p:txBody>
-      </p:sp>
-      <p:sp>
-        <p:nvSpPr>
-          <p:cNvPr id="16" name="Line 11"/>
-          <p:cNvSpPr>
-            <a:spLocks noChangeShapeType="1"/>
-          </p:cNvSpPr>
-          <p:nvPr/>
-        </p:nvSpPr>
-        <p:spPr bwMode="auto">
-          <a:xfrm flipH="1" flipV="1">
-            <a:off x="7789860" y="4345744"/>
-            <a:ext cx="685800" cy="838200"/>
-          </a:xfrm>
-          <a:prstGeom prst="line">
-            <a:avLst/>
-          </a:prstGeom>
-          <a:noFill/>
-          <a:ln w="38100">
-            <a:solidFill>
-              <a:schemeClr val="hlink"/>
-            </a:solidFill>
-            <a:round/>
-            <a:headEnd/>
-            <a:tailEnd type="triangle" w="med" len="med"/>
-          </a:ln>
-          <a:effectLst/>
-          <a:extLst>
-            <a:ext uri="{909E8E84-426E-40DD-AFC4-6F175D3DCCD1}">
-              <a14:hiddenFill xmlns:a14="http://schemas.microsoft.com/office/drawing/2010/main">
-                <a:noFill/>
-              </a14:hiddenFill>
-            </a:ext>
-            <a:ext uri="{AF507438-7753-43E0-B8FC-AC1667EBCBE1}">
-              <a14:hiddenEffects xmlns:a14="http://schemas.microsoft.com/office/drawing/2010/main">
-                <a:effectLst>
-                  <a:outerShdw blurRad="63500" dist="38099" dir="2700000" algn="ctr" rotWithShape="0">
-                    <a:schemeClr val="bg2">
-                      <a:alpha val="74998"/>
-                    </a:schemeClr>
-                  </a:outerShdw>
-                </a:effectLst>
-              </a14:hiddenEffects>
-            </a:ext>
-          </a:extLst>
-        </p:spPr>
-        <p:txBody>
-          <a:bodyPr wrap="none"/>
-          <a:lstStyle/>
-          <a:p>
-            <a:pPr algn="ctr" eaLnBrk="1" hangingPunct="1">
-              <a:defRPr/>
-            </a:pPr>
-            <a:endParaRPr lang="en-US"/>
-          </a:p>
-        </p:txBody>
-      </p:sp>
-      <p:sp>
-        <p:nvSpPr>
           <p:cNvPr id="13316" name="TextBox 13315"/>
           <p:cNvSpPr txBox="1"/>
           <p:nvPr/>
@@ -34498,7 +33818,7 @@
           <a:noFill/>
         </p:spPr>
         <p:txBody>
-          <a:bodyPr wrap="square" anchor="ctr" lIns="0" rIns="0" tIns="0" bIns="0">
+          <a:bodyPr wrap="square" lIns="0" tIns="0" rIns="0" bIns="0" anchor="ctr">
             <a:spAutoFit/>
           </a:bodyPr>
           <a:lstStyle/>
@@ -35010,8 +34330,8 @@
         </p:nvSpPr>
         <p:spPr bwMode="auto">
           <a:xfrm>
-            <a:off x="2915771" y="5730976"/>
-            <a:ext cx="2051139" cy="707886"/>
+            <a:off x="6588664" y="6135269"/>
+            <a:ext cx="2050881" cy="400110"/>
           </a:xfrm>
           <a:prstGeom prst="rect">
             <a:avLst/>
@@ -35163,15 +34483,6 @@
               <a:t>Model prediction</a:t>
             </a:r>
           </a:p>
-          <a:p>
-            <a:pPr algn="ctr" eaLnBrk="1" hangingPunct="1">
-              <a:defRPr/>
-            </a:pPr>
-            <a:r>
-              <a:rPr lang="en-AU" altLang="en-US" sz="2000" dirty="0"/>
-              <a:t>(Q: why here?)</a:t>
-            </a:r>
-          </a:p>
         </p:txBody>
       </p:sp>
       <p:sp>
@@ -35184,7 +34495,7 @@
         </p:nvSpPr>
         <p:spPr bwMode="auto">
           <a:xfrm>
-            <a:off x="6048747" y="5715101"/>
+            <a:off x="5567733" y="6158967"/>
             <a:ext cx="709613" cy="396875"/>
           </a:xfrm>
           <a:prstGeom prst="rect">
@@ -35333,7 +34644,7 @@
               <a:defRPr/>
             </a:pPr>
             <a:r>
-              <a:rPr lang="en-AU" altLang="en-US" sz="2000"/>
+              <a:rPr lang="en-AU" altLang="en-US" sz="2000" dirty="0"/>
               <a:t>Data</a:t>
             </a:r>
           </a:p>
@@ -35348,9 +34659,9 @@
           <p:nvPr/>
         </p:nvSpPr>
         <p:spPr bwMode="auto">
-          <a:xfrm flipV="1">
-            <a:off x="4677146" y="5349975"/>
-            <a:ext cx="457200" cy="457200"/>
+          <a:xfrm flipH="1" flipV="1">
+            <a:off x="6986592" y="5552657"/>
+            <a:ext cx="398945" cy="510470"/>
           </a:xfrm>
           <a:prstGeom prst="line">
             <a:avLst/>
@@ -35404,9 +34715,9 @@
           <p:nvPr/>
         </p:nvSpPr>
         <p:spPr bwMode="auto">
-          <a:xfrm flipH="1" flipV="1">
-            <a:off x="5515346" y="5349975"/>
-            <a:ext cx="762000" cy="457200"/>
+          <a:xfrm flipV="1">
+            <a:off x="5972546" y="5552657"/>
+            <a:ext cx="304800" cy="606309"/>
           </a:xfrm>
           <a:prstGeom prst="line">
             <a:avLst/>
@@ -35459,8 +34770,8 @@
         </p:nvSpPr>
         <p:spPr>
           <a:xfrm>
-            <a:off x="8543867" y="5197334"/>
-            <a:ext cx="3419533" cy="944533"/>
+            <a:off x="3575856" y="4247518"/>
+            <a:ext cx="4689231" cy="276999"/>
           </a:xfrm>
           <a:prstGeom prst="rect">
             <a:avLst/>
@@ -35468,25 +34779,61 @@
           <a:noFill/>
         </p:spPr>
         <p:txBody>
-          <a:bodyPr wrap="square" anchor="ctr" lIns="0" rIns="0" tIns="0" bIns="0">
+          <a:bodyPr wrap="square" lIns="0" tIns="0" rIns="0" bIns="0" anchor="ctr">
             <a:spAutoFit/>
           </a:bodyPr>
           <a:lstStyle/>
           <a:p>
             <a:r>
-              <a:rPr sz="1200" b="0">
+              <a:rPr b="0" dirty="0">
                 <a:latin typeface="Cambria"/>
               </a:rPr>
-              <a:t>f(x) = 1 / (σ √(2π)) · exp( −½ ((x − μ)/σ)</a:t>
-            </a:r>
-            <a:r>
-              <a:rPr sz="1200" b="0" baseline="30000">
+              <a:t>f(x) = 1 / (</a:t>
+            </a:r>
+            <a:r>
+              <a:rPr b="0" dirty="0" err="1">
+                <a:latin typeface="Cambria"/>
+              </a:rPr>
+              <a:t>σ</a:t>
+            </a:r>
+            <a:r>
+              <a:rPr b="0" dirty="0">
+                <a:latin typeface="Cambria"/>
+              </a:rPr>
+              <a:t> √(2π)) · exp( −½ ((x − </a:t>
+            </a:r>
+            <a:r>
+              <a:rPr b="0" dirty="0" err="1">
+                <a:latin typeface="Cambria"/>
+              </a:rPr>
+              <a:t>μ</a:t>
+            </a:r>
+            <a:r>
+              <a:rPr b="0" dirty="0">
+                <a:latin typeface="Cambria"/>
+              </a:rPr>
+              <a:t>)/</a:t>
+            </a:r>
+            <a:r>
+              <a:rPr b="0" dirty="0" err="1">
+                <a:latin typeface="Cambria"/>
+              </a:rPr>
+              <a:t>σ</a:t>
+            </a:r>
+            <a:r>
+              <a:rPr b="0" dirty="0">
+                <a:latin typeface="Cambria"/>
+              </a:rPr>
+              <a:t>)</a:t>
+            </a:r>
+            <a:r>
+              <a:rPr b="0" baseline="30000" dirty="0">
                 <a:latin typeface="Cambria"/>
               </a:rPr>
               <a:t>2</a:t>
             </a:r>
             <a:r>
-              <a:rPr sz="1200" b="0">
+              <a:rPr b="0" dirty="0">
                 <a:latin typeface="Cambria"/>
               </a:rPr>
               <a:t> )</a:t>
@@ -35502,8 +34849,8 @@
         </p:nvSpPr>
         <p:spPr>
           <a:xfrm>
-            <a:off x="4572001" y="3225679"/>
-            <a:ext cx="2672861" cy="482600"/>
+            <a:off x="4313732" y="3244334"/>
+            <a:ext cx="2672861" cy="369332"/>
           </a:xfrm>
           <a:prstGeom prst="rect">
             <a:avLst/>
@@ -35511,37 +34858,43 @@
           <a:noFill/>
         </p:spPr>
         <p:txBody>
-          <a:bodyPr wrap="square" anchor="ctr" lIns="0" rIns="0" tIns="0" bIns="0">
+          <a:bodyPr wrap="square" lIns="0" tIns="0" rIns="0" bIns="0" anchor="ctr">
             <a:spAutoFit/>
           </a:bodyPr>
           <a:lstStyle/>
           <a:p>
             <a:r>
-              <a:rPr sz="1900">
+              <a:rPr sz="2400" dirty="0">
                 <a:latin typeface="Cambria"/>
               </a:rPr>
               <a:t>L(a) = ℓ</a:t>
             </a:r>
             <a:r>
-              <a:rPr sz="1900" baseline="-25000">
+              <a:rPr sz="2400" baseline="-25000" dirty="0">
                 <a:latin typeface="Cambria"/>
               </a:rPr>
               <a:t>∞</a:t>
             </a:r>
             <a:r>
-              <a:rPr sz="1900">
+              <a:rPr sz="2400" dirty="0">
                 <a:latin typeface="Cambria"/>
               </a:rPr>
               <a:t>(1 − e</a:t>
             </a:r>
             <a:r>
-              <a:rPr sz="1900" baseline="30000">
+              <a:rPr sz="2400" baseline="30000" dirty="0">
                 <a:latin typeface="Cambria"/>
               </a:rPr>
-              <a:t>−κa</a:t>
-            </a:r>
-            <a:r>
-              <a:rPr sz="1900">
+              <a:t>−</a:t>
+            </a:r>
+            <a:r>
+              <a:rPr sz="2400" baseline="30000" dirty="0" err="1">
+                <a:latin typeface="Cambria"/>
+              </a:rPr>
+              <a:t>κa</a:t>
+            </a:r>
+            <a:r>
+              <a:rPr sz="2400" dirty="0">
                 <a:latin typeface="Cambria"/>
               </a:rPr>
               <a:t>)</a:t>
@@ -35566,7 +34919,7 @@
           <a:noFill/>
         </p:spPr>
         <p:txBody>
-          <a:bodyPr wrap="square" anchor="ctr" lIns="0" rIns="0" tIns="0" bIns="0">
+          <a:bodyPr wrap="square" lIns="0" tIns="0" rIns="0" bIns="0" anchor="ctr">
             <a:spAutoFit/>
           </a:bodyPr>
           <a:lstStyle/>
@@ -35626,260 +34979,6 @@
   <p:clrMapOvr>
     <a:masterClrMapping/>
   </p:clrMapOvr>
-  <p:timing>
-    <p:tnLst>
-      <p:par>
-        <p:cTn id="1" dur="indefinite" restart="never" nodeType="tmRoot">
-          <p:childTnLst>
-            <p:seq concurrent="1" nextAc="seek">
-              <p:cTn id="2" dur="indefinite" nodeType="mainSeq">
-                <p:childTnLst>
-                  <p:par>
-                    <p:cTn id="3" fill="hold" nodeType="clickPar">
-                      <p:stCondLst>
-                        <p:cond delay="indefinite"/>
-                      </p:stCondLst>
-                      <p:childTnLst>
-                        <p:par>
-                          <p:cTn id="4" fill="hold" nodeType="withGroup">
-                            <p:stCondLst>
-                              <p:cond delay="0"/>
-                            </p:stCondLst>
-                            <p:childTnLst>
-                              <p:par>
-                                <p:cTn id="5" presetID="1" presetClass="entr" presetSubtype="0" fill="hold" nodeType="clickEffect">
-                                  <p:stCondLst>
-                                    <p:cond delay="0"/>
-                                  </p:stCondLst>
-                                  <p:childTnLst>
-                                    <p:set>
-                                      <p:cBhvr>
-                                        <p:cTn id="6" dur="1" fill="hold">
-                                          <p:stCondLst>
-                                            <p:cond delay="0"/>
-                                          </p:stCondLst>
-                                        </p:cTn>
-                                        <p:tgtEl>
-                                          <p:spTgt spid="14338">
-                                            <p:txEl>
-                                              <p:pRg st="4" end="4"/>
-                                            </p:txEl>
-                                          </p:spTgt>
-                                        </p:tgtEl>
-                                        <p:attrNameLst>
-                                          <p:attrName>style.visibility</p:attrName>
-                                        </p:attrNameLst>
-                                      </p:cBhvr>
-                                      <p:to>
-                                        <p:strVal val="visible"/>
-                                      </p:to>
-                                    </p:set>
-                                  </p:childTnLst>
-                                </p:cTn>
-                              </p:par>
-                            </p:childTnLst>
-                          </p:cTn>
-                        </p:par>
-                      </p:childTnLst>
-                    </p:cTn>
-                  </p:par>
-                  <p:par>
-                    <p:cTn id="7" fill="hold" nodeType="clickPar">
-                      <p:stCondLst>
-                        <p:cond delay="indefinite"/>
-                      </p:stCondLst>
-                      <p:childTnLst>
-                        <p:par>
-                          <p:cTn id="8" fill="hold" nodeType="withGroup">
-                            <p:stCondLst>
-                              <p:cond delay="0"/>
-                            </p:stCondLst>
-                            <p:childTnLst>
-                              <p:par>
-                                <p:cTn id="9" presetID="1" presetClass="entr" presetSubtype="0" fill="hold" nodeType="clickEffect">
-                                  <p:stCondLst>
-                                    <p:cond delay="0"/>
-                                  </p:stCondLst>
-                                  <p:childTnLst>
-                                    <p:set>
-                                      <p:cBhvr>
-                                        <p:cTn id="10" dur="1" fill="hold">
-                                          <p:stCondLst>
-                                            <p:cond delay="0"/>
-                                          </p:stCondLst>
-                                        </p:cTn>
-                                        <p:tgtEl>
-                                          <p:spTgt spid="14342"/>
-                                        </p:tgtEl>
-                                        <p:attrNameLst>
-                                          <p:attrName>style.visibility</p:attrName>
-                                        </p:attrNameLst>
-                                      </p:cBhvr>
-                                      <p:to>
-                                        <p:strVal val="visible"/>
-                                      </p:to>
-                                    </p:set>
-                                  </p:childTnLst>
-                                </p:cTn>
-                              </p:par>
-                            </p:childTnLst>
-                          </p:cTn>
-                        </p:par>
-                      </p:childTnLst>
-                    </p:cTn>
-                  </p:par>
-                  <p:par>
-                    <p:cTn id="11" fill="hold" nodeType="clickPar">
-                      <p:stCondLst>
-                        <p:cond delay="indefinite"/>
-                      </p:stCondLst>
-                      <p:childTnLst>
-                        <p:par>
-                          <p:cTn id="12" fill="hold" nodeType="withGroup">
-                            <p:stCondLst>
-                              <p:cond delay="0"/>
-                            </p:stCondLst>
-                            <p:childTnLst>
-                              <p:par>
-                                <p:cTn id="13" presetID="1" presetClass="entr" presetSubtype="0" fill="hold" grpId="0" nodeType="clickEffect">
-                                  <p:stCondLst>
-                                    <p:cond delay="0"/>
-                                  </p:stCondLst>
-                                  <p:childTnLst>
-                                    <p:set>
-                                      <p:cBhvr>
-                                        <p:cTn id="14" dur="1" fill="hold">
-                                          <p:stCondLst>
-                                            <p:cond delay="0"/>
-                                          </p:stCondLst>
-                                        </p:cTn>
-                                        <p:tgtEl>
-                                          <p:spTgt spid="14343"/>
-                                        </p:tgtEl>
-                                        <p:attrNameLst>
-                                          <p:attrName>style.visibility</p:attrName>
-                                        </p:attrNameLst>
-                                      </p:cBhvr>
-                                      <p:to>
-                                        <p:strVal val="visible"/>
-                                      </p:to>
-                                    </p:set>
-                                  </p:childTnLst>
-                                </p:cTn>
-                              </p:par>
-                              <p:par>
-                                <p:cTn id="15" presetID="1" presetClass="entr" presetSubtype="0" fill="hold" nodeType="withEffect">
-                                  <p:stCondLst>
-                                    <p:cond delay="0"/>
-                                  </p:stCondLst>
-                                  <p:childTnLst>
-                                    <p:set>
-                                      <p:cBhvr>
-                                        <p:cTn id="16" dur="1" fill="hold">
-                                          <p:stCondLst>
-                                            <p:cond delay="0"/>
-                                          </p:stCondLst>
-                                        </p:cTn>
-                                        <p:tgtEl>
-                                          <p:spTgt spid="14345"/>
-                                        </p:tgtEl>
-                                        <p:attrNameLst>
-                                          <p:attrName>style.visibility</p:attrName>
-                                        </p:attrNameLst>
-                                      </p:cBhvr>
-                                      <p:to>
-                                        <p:strVal val="visible"/>
-                                      </p:to>
-                                    </p:set>
-                                  </p:childTnLst>
-                                </p:cTn>
-                              </p:par>
-                              <p:par>
-                                <p:cTn id="17" presetID="1" presetClass="entr" presetSubtype="0" fill="hold" nodeType="withEffect">
-                                  <p:stCondLst>
-                                    <p:cond delay="0"/>
-                                  </p:stCondLst>
-                                  <p:childTnLst>
-                                    <p:set>
-                                      <p:cBhvr>
-                                        <p:cTn id="18" dur="1" fill="hold">
-                                          <p:stCondLst>
-                                            <p:cond delay="0"/>
-                                          </p:stCondLst>
-                                        </p:cTn>
-                                        <p:tgtEl>
-                                          <p:spTgt spid="14346"/>
-                                        </p:tgtEl>
-                                        <p:attrNameLst>
-                                          <p:attrName>style.visibility</p:attrName>
-                                        </p:attrNameLst>
-                                      </p:cBhvr>
-                                      <p:to>
-                                        <p:strVal val="visible"/>
-                                      </p:to>
-                                    </p:set>
-                                  </p:childTnLst>
-                                </p:cTn>
-                              </p:par>
-                              <p:par>
-                                <p:cTn id="19" presetID="1" presetClass="entr" presetSubtype="0" fill="hold" grpId="0" nodeType="withEffect">
-                                  <p:stCondLst>
-                                    <p:cond delay="0"/>
-                                  </p:stCondLst>
-                                  <p:childTnLst>
-                                    <p:set>
-                                      <p:cBhvr>
-                                        <p:cTn id="20" dur="1" fill="hold">
-                                          <p:stCondLst>
-                                            <p:cond delay="0"/>
-                                          </p:stCondLst>
-                                        </p:cTn>
-                                        <p:tgtEl>
-                                          <p:spTgt spid="14344"/>
-                                        </p:tgtEl>
-                                        <p:attrNameLst>
-                                          <p:attrName>style.visibility</p:attrName>
-                                        </p:attrNameLst>
-                                      </p:cBhvr>
-                                      <p:to>
-                                        <p:strVal val="visible"/>
-                                      </p:to>
-                                    </p:set>
-                                  </p:childTnLst>
-                                </p:cTn>
-                              </p:par>
-                            </p:childTnLst>
-                          </p:cTn>
-                        </p:par>
-                      </p:childTnLst>
-                    </p:cTn>
-                  </p:par>
-                </p:childTnLst>
-              </p:cTn>
-              <p:prevCondLst>
-                <p:cond evt="onPrev" delay="0">
-                  <p:tgtEl>
-                    <p:sldTgt/>
-                  </p:tgtEl>
-                </p:cond>
-              </p:prevCondLst>
-              <p:nextCondLst>
-                <p:cond evt="onNext" delay="0">
-                  <p:tgtEl>
-                    <p:sldTgt/>
-                  </p:tgtEl>
-                </p:cond>
-              </p:nextCondLst>
-            </p:seq>
-          </p:childTnLst>
-        </p:cTn>
-      </p:par>
-    </p:tnLst>
-    <p:bldLst>
-      <p:bldP spid="14343" grpId="0"/>
-      <p:bldP spid="14344" grpId="0"/>
-    </p:bldLst>
-  </p:timing>
 </p:sld>
 </file>
 
@@ -37070,7 +36169,7 @@
           <a:noFill/>
         </p:spPr>
         <p:txBody>
-          <a:bodyPr wrap="square" anchor="ctr" lIns="0" rIns="0" tIns="0" bIns="0">
+          <a:bodyPr wrap="square" lIns="0" tIns="0" rIns="0" bIns="0" anchor="ctr">
             <a:spAutoFit/>
           </a:bodyPr>
           <a:lstStyle/>
@@ -37137,7 +36236,7 @@
           <a:noFill/>
         </p:spPr>
         <p:txBody>
-          <a:bodyPr wrap="square" anchor="ctr" lIns="0" rIns="0" tIns="0" bIns="0">
+          <a:bodyPr wrap="square" lIns="0" tIns="0" rIns="0" bIns="0" anchor="ctr">
             <a:spAutoFit/>
           </a:bodyPr>
           <a:lstStyle/>
@@ -37418,27 +36517,27 @@
               <a:defRPr/>
             </a:pPr>
             <a:r>
-              <a:rPr lang="en-AU" altLang="en-US" sz="2000" i="1" dirty="0" err="1"/>
+              <a:rPr lang="en-AU" altLang="en-US" sz="2000" dirty="0" err="1"/>
               <a:t>pred_vec</a:t>
             </a:r>
             <a:r>
-              <a:rPr lang="en-AU" altLang="en-US" sz="2000" i="1" dirty="0"/>
+              <a:rPr lang="en-AU" altLang="en-US" sz="2000" dirty="0"/>
               <a:t> &lt;- </a:t>
             </a:r>
             <a:r>
-              <a:rPr lang="en-AU" altLang="en-US" sz="2000" i="1" dirty="0" err="1"/>
+              <a:rPr lang="en-AU" altLang="en-US" sz="2000" dirty="0" err="1"/>
               <a:t>Linfs</a:t>
             </a:r>
             <a:r>
-              <a:rPr lang="en-AU" altLang="en-US" sz="2000" i="1" dirty="0"/>
+              <a:rPr lang="en-AU" altLang="en-US" sz="2000" dirty="0"/>
               <a:t>[II]*(1-exp(-Kappa[II]*</a:t>
             </a:r>
             <a:r>
-              <a:rPr lang="en-AU" altLang="en-US" sz="2000" i="1" dirty="0" err="1"/>
+              <a:rPr lang="en-AU" altLang="en-US" sz="2000" dirty="0" err="1"/>
               <a:t>age_vec</a:t>
             </a:r>
             <a:r>
-              <a:rPr lang="en-AU" altLang="en-US" sz="2000" i="1" dirty="0"/>
+              <a:rPr lang="en-AU" altLang="en-US" sz="2000" dirty="0"/>
               <a:t>))</a:t>
             </a:r>
           </a:p>
@@ -37447,31 +36546,31 @@
               <a:defRPr/>
             </a:pPr>
             <a:r>
-              <a:rPr lang="en-AU" altLang="en-US" sz="2000" i="1" dirty="0"/>
+              <a:rPr lang="en-AU" altLang="en-US" sz="2000" dirty="0"/>
               <a:t>likelihood &lt;- prod(</a:t>
             </a:r>
             <a:r>
-              <a:rPr lang="en-AU" altLang="en-US" sz="2000" i="1" dirty="0" err="1"/>
+              <a:rPr lang="en-AU" altLang="en-US" sz="2000" dirty="0" err="1"/>
               <a:t>dnorm</a:t>
             </a:r>
             <a:r>
-              <a:rPr lang="en-AU" altLang="en-US" sz="2000" i="1" dirty="0"/>
+              <a:rPr lang="en-AU" altLang="en-US" sz="2000" dirty="0"/>
               <a:t>(</a:t>
             </a:r>
             <a:r>
-              <a:rPr lang="en-AU" altLang="en-US" sz="2000" i="1" dirty="0" err="1"/>
+              <a:rPr lang="en-AU" altLang="en-US" sz="2000" dirty="0" err="1"/>
               <a:t>len_vec</a:t>
             </a:r>
             <a:r>
-              <a:rPr lang="en-AU" altLang="en-US" sz="2000" i="1" dirty="0"/>
+              <a:rPr lang="en-AU" altLang="en-US" sz="2000" dirty="0"/>
               <a:t>, </a:t>
             </a:r>
             <a:r>
-              <a:rPr lang="en-AU" altLang="en-US" sz="2000" i="1" dirty="0" err="1"/>
+              <a:rPr lang="en-AU" altLang="en-US" sz="2000" dirty="0" err="1"/>
               <a:t>pred_vec</a:t>
             </a:r>
             <a:r>
-              <a:rPr lang="en-AU" altLang="en-US" sz="2000" i="1" dirty="0"/>
+              <a:rPr lang="en-AU" altLang="en-US" sz="2000" dirty="0"/>
               <a:t>, sigma))</a:t>
             </a:r>
           </a:p>
@@ -37480,7 +36579,7 @@
               <a:defRPr/>
             </a:pPr>
             <a:r>
-              <a:rPr lang="en-AU" altLang="en-US" sz="2000" i="1" dirty="0"/>
+              <a:rPr lang="en-AU" altLang="en-US" sz="2000" dirty="0"/>
               <a:t>print(likelihood) </a:t>
             </a:r>
           </a:p>

--- a/Day4_Likelihood_BayesI/FW536_Day4_Morning_maximum likelihod_accessible.pptx
+++ b/Day4_Likelihood_BayesI/FW536_Day4_Morning_maximum likelihod_accessible.pptx
@@ -233,7 +233,7 @@
           <a:p>
             <a:fld id="{F8E9C380-474B-B64D-9372-661513FD5BBF}" type="datetimeFigureOut">
               <a:rPr lang="en-US" smtClean="0"/>
-              <a:t>7/16/26</a:t>
+              <a:t>8/31/26</a:t>
             </a:fld>
             <a:endParaRPr lang="en-US"/>
           </a:p>
@@ -640,7 +640,7 @@
               </a14:hiddenEffects>
             </a:ext>
             <a:ext uri="{FAA26D3D-D897-4be2-8F04-BA451C77F1D7}">
-              <ma14:placeholderFlag xmlns:ma14="http://schemas.microsoft.com/office/mac/drawingml/2011/main" xmlns="" val="1"/>
+              <ma14:placeholderFlag xmlns="" xmlns:ma14="http://schemas.microsoft.com/office/mac/drawingml/2011/main" val="1"/>
             </a:ext>
           </a:extLst>
         </p:spPr>
@@ -725,7 +725,7 @@
               </a14:hiddenEffects>
             </a:ext>
             <a:ext uri="{FAA26D3D-D897-4be2-8F04-BA451C77F1D7}">
-              <ma14:placeholderFlag xmlns:ma14="http://schemas.microsoft.com/office/mac/drawingml/2011/main" xmlns="" val="1"/>
+              <ma14:placeholderFlag xmlns="" xmlns:ma14="http://schemas.microsoft.com/office/mac/drawingml/2011/main" val="1"/>
             </a:ext>
           </a:extLst>
         </p:spPr>
@@ -810,7 +810,7 @@
               </a14:hiddenEffects>
             </a:ext>
             <a:ext uri="{FAA26D3D-D897-4be2-8F04-BA451C77F1D7}">
-              <ma14:placeholderFlag xmlns:ma14="http://schemas.microsoft.com/office/mac/drawingml/2011/main" xmlns="" val="1"/>
+              <ma14:placeholderFlag xmlns="" xmlns:ma14="http://schemas.microsoft.com/office/mac/drawingml/2011/main" val="1"/>
             </a:ext>
           </a:extLst>
         </p:spPr>
@@ -895,7 +895,7 @@
               </a14:hiddenEffects>
             </a:ext>
             <a:ext uri="{FAA26D3D-D897-4be2-8F04-BA451C77F1D7}">
-              <ma14:placeholderFlag xmlns:ma14="http://schemas.microsoft.com/office/mac/drawingml/2011/main" xmlns="" val="1"/>
+              <ma14:placeholderFlag xmlns="" xmlns:ma14="http://schemas.microsoft.com/office/mac/drawingml/2011/main" val="1"/>
             </a:ext>
           </a:extLst>
         </p:spPr>
@@ -980,7 +980,7 @@
               </a14:hiddenEffects>
             </a:ext>
             <a:ext uri="{FAA26D3D-D897-4be2-8F04-BA451C77F1D7}">
-              <ma14:placeholderFlag xmlns:ma14="http://schemas.microsoft.com/office/mac/drawingml/2011/main" xmlns="" val="1"/>
+              <ma14:placeholderFlag xmlns="" xmlns:ma14="http://schemas.microsoft.com/office/mac/drawingml/2011/main" val="1"/>
             </a:ext>
           </a:extLst>
         </p:spPr>
@@ -1065,7 +1065,7 @@
               </a14:hiddenEffects>
             </a:ext>
             <a:ext uri="{FAA26D3D-D897-4be2-8F04-BA451C77F1D7}">
-              <ma14:placeholderFlag xmlns:ma14="http://schemas.microsoft.com/office/mac/drawingml/2011/main" xmlns="" val="1"/>
+              <ma14:placeholderFlag xmlns="" xmlns:ma14="http://schemas.microsoft.com/office/mac/drawingml/2011/main" val="1"/>
             </a:ext>
           </a:extLst>
         </p:spPr>
@@ -1150,7 +1150,7 @@
               </a14:hiddenEffects>
             </a:ext>
             <a:ext uri="{FAA26D3D-D897-4be2-8F04-BA451C77F1D7}">
-              <ma14:placeholderFlag xmlns:ma14="http://schemas.microsoft.com/office/mac/drawingml/2011/main" xmlns="" val="1"/>
+              <ma14:placeholderFlag xmlns="" xmlns:ma14="http://schemas.microsoft.com/office/mac/drawingml/2011/main" val="1"/>
             </a:ext>
           </a:extLst>
         </p:spPr>
@@ -1235,7 +1235,7 @@
               </a14:hiddenEffects>
             </a:ext>
             <a:ext uri="{FAA26D3D-D897-4be2-8F04-BA451C77F1D7}">
-              <ma14:placeholderFlag xmlns:ma14="http://schemas.microsoft.com/office/mac/drawingml/2011/main" xmlns="" val="1"/>
+              <ma14:placeholderFlag xmlns="" xmlns:ma14="http://schemas.microsoft.com/office/mac/drawingml/2011/main" val="1"/>
             </a:ext>
           </a:extLst>
         </p:spPr>
@@ -1320,7 +1320,7 @@
               </a14:hiddenEffects>
             </a:ext>
             <a:ext uri="{FAA26D3D-D897-4be2-8F04-BA451C77F1D7}">
-              <ma14:placeholderFlag xmlns:ma14="http://schemas.microsoft.com/office/mac/drawingml/2011/main" xmlns="" val="1"/>
+              <ma14:placeholderFlag xmlns="" xmlns:ma14="http://schemas.microsoft.com/office/mac/drawingml/2011/main" val="1"/>
             </a:ext>
           </a:extLst>
         </p:spPr>
@@ -1405,7 +1405,7 @@
               </a14:hiddenEffects>
             </a:ext>
             <a:ext uri="{FAA26D3D-D897-4be2-8F04-BA451C77F1D7}">
-              <ma14:placeholderFlag xmlns:ma14="http://schemas.microsoft.com/office/mac/drawingml/2011/main" xmlns="" val="1"/>
+              <ma14:placeholderFlag xmlns="" xmlns:ma14="http://schemas.microsoft.com/office/mac/drawingml/2011/main" val="1"/>
             </a:ext>
           </a:extLst>
         </p:spPr>
@@ -1490,7 +1490,7 @@
               </a14:hiddenEffects>
             </a:ext>
             <a:ext uri="{FAA26D3D-D897-4be2-8F04-BA451C77F1D7}">
-              <ma14:placeholderFlag xmlns:ma14="http://schemas.microsoft.com/office/mac/drawingml/2011/main" xmlns="" val="1"/>
+              <ma14:placeholderFlag xmlns="" xmlns:ma14="http://schemas.microsoft.com/office/mac/drawingml/2011/main" val="1"/>
             </a:ext>
           </a:extLst>
         </p:spPr>
@@ -1575,7 +1575,7 @@
               </a14:hiddenEffects>
             </a:ext>
             <a:ext uri="{FAA26D3D-D897-4be2-8F04-BA451C77F1D7}">
-              <ma14:placeholderFlag xmlns:ma14="http://schemas.microsoft.com/office/mac/drawingml/2011/main" xmlns="" val="1"/>
+              <ma14:placeholderFlag xmlns="" xmlns:ma14="http://schemas.microsoft.com/office/mac/drawingml/2011/main" val="1"/>
             </a:ext>
           </a:extLst>
         </p:spPr>
@@ -1660,7 +1660,7 @@
               </a14:hiddenEffects>
             </a:ext>
             <a:ext uri="{FAA26D3D-D897-4be2-8F04-BA451C77F1D7}">
-              <ma14:placeholderFlag xmlns:ma14="http://schemas.microsoft.com/office/mac/drawingml/2011/main" xmlns="" val="1"/>
+              <ma14:placeholderFlag xmlns="" xmlns:ma14="http://schemas.microsoft.com/office/mac/drawingml/2011/main" val="1"/>
             </a:ext>
           </a:extLst>
         </p:spPr>
@@ -1745,7 +1745,7 @@
               </a14:hiddenEffects>
             </a:ext>
             <a:ext uri="{FAA26D3D-D897-4be2-8F04-BA451C77F1D7}">
-              <ma14:placeholderFlag xmlns:ma14="http://schemas.microsoft.com/office/mac/drawingml/2011/main" xmlns="" val="1"/>
+              <ma14:placeholderFlag xmlns="" xmlns:ma14="http://schemas.microsoft.com/office/mac/drawingml/2011/main" val="1"/>
             </a:ext>
           </a:extLst>
         </p:spPr>
@@ -1830,7 +1830,7 @@
               </a14:hiddenEffects>
             </a:ext>
             <a:ext uri="{FAA26D3D-D897-4be2-8F04-BA451C77F1D7}">
-              <ma14:placeholderFlag xmlns:ma14="http://schemas.microsoft.com/office/mac/drawingml/2011/main" xmlns="" val="1"/>
+              <ma14:placeholderFlag xmlns="" xmlns:ma14="http://schemas.microsoft.com/office/mac/drawingml/2011/main" val="1"/>
             </a:ext>
           </a:extLst>
         </p:spPr>
@@ -1915,7 +1915,7 @@
               </a14:hiddenEffects>
             </a:ext>
             <a:ext uri="{FAA26D3D-D897-4be2-8F04-BA451C77F1D7}">
-              <ma14:placeholderFlag xmlns:ma14="http://schemas.microsoft.com/office/mac/drawingml/2011/main" xmlns="" val="1"/>
+              <ma14:placeholderFlag xmlns="" xmlns:ma14="http://schemas.microsoft.com/office/mac/drawingml/2011/main" val="1"/>
             </a:ext>
           </a:extLst>
         </p:spPr>
@@ -2000,7 +2000,7 @@
               </a14:hiddenEffects>
             </a:ext>
             <a:ext uri="{FAA26D3D-D897-4be2-8F04-BA451C77F1D7}">
-              <ma14:placeholderFlag xmlns:ma14="http://schemas.microsoft.com/office/mac/drawingml/2011/main" xmlns="" val="1"/>
+              <ma14:placeholderFlag xmlns="" xmlns:ma14="http://schemas.microsoft.com/office/mac/drawingml/2011/main" val="1"/>
             </a:ext>
           </a:extLst>
         </p:spPr>
@@ -2085,7 +2085,7 @@
               </a14:hiddenEffects>
             </a:ext>
             <a:ext uri="{FAA26D3D-D897-4be2-8F04-BA451C77F1D7}">
-              <ma14:placeholderFlag xmlns:ma14="http://schemas.microsoft.com/office/mac/drawingml/2011/main" xmlns="" val="1"/>
+              <ma14:placeholderFlag xmlns="" xmlns:ma14="http://schemas.microsoft.com/office/mac/drawingml/2011/main" val="1"/>
             </a:ext>
           </a:extLst>
         </p:spPr>
@@ -2170,7 +2170,7 @@
               </a14:hiddenEffects>
             </a:ext>
             <a:ext uri="{FAA26D3D-D897-4be2-8F04-BA451C77F1D7}">
-              <ma14:placeholderFlag xmlns:ma14="http://schemas.microsoft.com/office/mac/drawingml/2011/main" xmlns="" val="1"/>
+              <ma14:placeholderFlag xmlns="" xmlns:ma14="http://schemas.microsoft.com/office/mac/drawingml/2011/main" val="1"/>
             </a:ext>
           </a:extLst>
         </p:spPr>
@@ -2255,7 +2255,7 @@
               </a14:hiddenEffects>
             </a:ext>
             <a:ext uri="{FAA26D3D-D897-4be2-8F04-BA451C77F1D7}">
-              <ma14:placeholderFlag xmlns:ma14="http://schemas.microsoft.com/office/mac/drawingml/2011/main" xmlns="" val="1"/>
+              <ma14:placeholderFlag xmlns="" xmlns:ma14="http://schemas.microsoft.com/office/mac/drawingml/2011/main" val="1"/>
             </a:ext>
           </a:extLst>
         </p:spPr>
@@ -2340,7 +2340,7 @@
               </a14:hiddenEffects>
             </a:ext>
             <a:ext uri="{FAA26D3D-D897-4be2-8F04-BA451C77F1D7}">
-              <ma14:placeholderFlag xmlns:ma14="http://schemas.microsoft.com/office/mac/drawingml/2011/main" xmlns="" val="1"/>
+              <ma14:placeholderFlag xmlns="" xmlns:ma14="http://schemas.microsoft.com/office/mac/drawingml/2011/main" val="1"/>
             </a:ext>
           </a:extLst>
         </p:spPr>
@@ -2425,7 +2425,7 @@
               </a14:hiddenEffects>
             </a:ext>
             <a:ext uri="{FAA26D3D-D897-4be2-8F04-BA451C77F1D7}">
-              <ma14:placeholderFlag xmlns:ma14="http://schemas.microsoft.com/office/mac/drawingml/2011/main" xmlns="" val="1"/>
+              <ma14:placeholderFlag xmlns="" xmlns:ma14="http://schemas.microsoft.com/office/mac/drawingml/2011/main" val="1"/>
             </a:ext>
           </a:extLst>
         </p:spPr>
@@ -2510,7 +2510,7 @@
               </a14:hiddenEffects>
             </a:ext>
             <a:ext uri="{FAA26D3D-D897-4be2-8F04-BA451C77F1D7}">
-              <ma14:placeholderFlag xmlns:ma14="http://schemas.microsoft.com/office/mac/drawingml/2011/main" xmlns="" val="1"/>
+              <ma14:placeholderFlag xmlns="" xmlns:ma14="http://schemas.microsoft.com/office/mac/drawingml/2011/main" val="1"/>
             </a:ext>
           </a:extLst>
         </p:spPr>
@@ -2595,7 +2595,7 @@
               </a14:hiddenEffects>
             </a:ext>
             <a:ext uri="{FAA26D3D-D897-4be2-8F04-BA451C77F1D7}">
-              <ma14:placeholderFlag xmlns:ma14="http://schemas.microsoft.com/office/mac/drawingml/2011/main" xmlns="" val="1"/>
+              <ma14:placeholderFlag xmlns="" xmlns:ma14="http://schemas.microsoft.com/office/mac/drawingml/2011/main" val="1"/>
             </a:ext>
           </a:extLst>
         </p:spPr>
@@ -2680,7 +2680,7 @@
               </a14:hiddenEffects>
             </a:ext>
             <a:ext uri="{FAA26D3D-D897-4be2-8F04-BA451C77F1D7}">
-              <ma14:placeholderFlag xmlns:ma14="http://schemas.microsoft.com/office/mac/drawingml/2011/main" xmlns="" val="1"/>
+              <ma14:placeholderFlag xmlns="" xmlns:ma14="http://schemas.microsoft.com/office/mac/drawingml/2011/main" val="1"/>
             </a:ext>
           </a:extLst>
         </p:spPr>
@@ -2765,7 +2765,7 @@
               </a14:hiddenEffects>
             </a:ext>
             <a:ext uri="{FAA26D3D-D897-4be2-8F04-BA451C77F1D7}">
-              <ma14:placeholderFlag xmlns:ma14="http://schemas.microsoft.com/office/mac/drawingml/2011/main" xmlns="" val="1"/>
+              <ma14:placeholderFlag xmlns="" xmlns:ma14="http://schemas.microsoft.com/office/mac/drawingml/2011/main" val="1"/>
             </a:ext>
           </a:extLst>
         </p:spPr>
@@ -2850,7 +2850,7 @@
               </a14:hiddenEffects>
             </a:ext>
             <a:ext uri="{FAA26D3D-D897-4be2-8F04-BA451C77F1D7}">
-              <ma14:placeholderFlag xmlns:ma14="http://schemas.microsoft.com/office/mac/drawingml/2011/main" xmlns="" val="1"/>
+              <ma14:placeholderFlag xmlns="" xmlns:ma14="http://schemas.microsoft.com/office/mac/drawingml/2011/main" val="1"/>
             </a:ext>
           </a:extLst>
         </p:spPr>
@@ -2935,7 +2935,7 @@
               </a14:hiddenEffects>
             </a:ext>
             <a:ext uri="{FAA26D3D-D897-4be2-8F04-BA451C77F1D7}">
-              <ma14:placeholderFlag xmlns:ma14="http://schemas.microsoft.com/office/mac/drawingml/2011/main" xmlns="" val="1"/>
+              <ma14:placeholderFlag xmlns="" xmlns:ma14="http://schemas.microsoft.com/office/mac/drawingml/2011/main" val="1"/>
             </a:ext>
           </a:extLst>
         </p:spPr>
@@ -3020,7 +3020,7 @@
               </a14:hiddenEffects>
             </a:ext>
             <a:ext uri="{FAA26D3D-D897-4be2-8F04-BA451C77F1D7}">
-              <ma14:placeholderFlag xmlns:ma14="http://schemas.microsoft.com/office/mac/drawingml/2011/main" xmlns="" val="1"/>
+              <ma14:placeholderFlag xmlns="" xmlns:ma14="http://schemas.microsoft.com/office/mac/drawingml/2011/main" val="1"/>
             </a:ext>
           </a:extLst>
         </p:spPr>
@@ -3105,7 +3105,7 @@
               </a14:hiddenEffects>
             </a:ext>
             <a:ext uri="{FAA26D3D-D897-4be2-8F04-BA451C77F1D7}">
-              <ma14:placeholderFlag xmlns:ma14="http://schemas.microsoft.com/office/mac/drawingml/2011/main" xmlns="" val="1"/>
+              <ma14:placeholderFlag xmlns="" xmlns:ma14="http://schemas.microsoft.com/office/mac/drawingml/2011/main" val="1"/>
             </a:ext>
           </a:extLst>
         </p:spPr>
@@ -3190,7 +3190,7 @@
               </a14:hiddenEffects>
             </a:ext>
             <a:ext uri="{FAA26D3D-D897-4be2-8F04-BA451C77F1D7}">
-              <ma14:placeholderFlag xmlns:ma14="http://schemas.microsoft.com/office/mac/drawingml/2011/main" xmlns="" val="1"/>
+              <ma14:placeholderFlag xmlns="" xmlns:ma14="http://schemas.microsoft.com/office/mac/drawingml/2011/main" val="1"/>
             </a:ext>
           </a:extLst>
         </p:spPr>
@@ -3275,7 +3275,7 @@
               </a14:hiddenEffects>
             </a:ext>
             <a:ext uri="{FAA26D3D-D897-4be2-8F04-BA451C77F1D7}">
-              <ma14:placeholderFlag xmlns:ma14="http://schemas.microsoft.com/office/mac/drawingml/2011/main" xmlns="" val="1"/>
+              <ma14:placeholderFlag xmlns="" xmlns:ma14="http://schemas.microsoft.com/office/mac/drawingml/2011/main" val="1"/>
             </a:ext>
           </a:extLst>
         </p:spPr>
@@ -3360,7 +3360,7 @@
               </a14:hiddenEffects>
             </a:ext>
             <a:ext uri="{FAA26D3D-D897-4be2-8F04-BA451C77F1D7}">
-              <ma14:placeholderFlag xmlns:ma14="http://schemas.microsoft.com/office/mac/drawingml/2011/main" xmlns="" val="1"/>
+              <ma14:placeholderFlag xmlns="" xmlns:ma14="http://schemas.microsoft.com/office/mac/drawingml/2011/main" val="1"/>
             </a:ext>
           </a:extLst>
         </p:spPr>
@@ -3445,7 +3445,7 @@
               </a14:hiddenEffects>
             </a:ext>
             <a:ext uri="{FAA26D3D-D897-4be2-8F04-BA451C77F1D7}">
-              <ma14:placeholderFlag xmlns:ma14="http://schemas.microsoft.com/office/mac/drawingml/2011/main" xmlns="" val="1"/>
+              <ma14:placeholderFlag xmlns="" xmlns:ma14="http://schemas.microsoft.com/office/mac/drawingml/2011/main" val="1"/>
             </a:ext>
           </a:extLst>
         </p:spPr>
@@ -3530,7 +3530,7 @@
               </a14:hiddenEffects>
             </a:ext>
             <a:ext uri="{FAA26D3D-D897-4be2-8F04-BA451C77F1D7}">
-              <ma14:placeholderFlag xmlns:ma14="http://schemas.microsoft.com/office/mac/drawingml/2011/main" xmlns="" val="1"/>
+              <ma14:placeholderFlag xmlns="" xmlns:ma14="http://schemas.microsoft.com/office/mac/drawingml/2011/main" val="1"/>
             </a:ext>
           </a:extLst>
         </p:spPr>
@@ -3615,7 +3615,7 @@
               </a14:hiddenEffects>
             </a:ext>
             <a:ext uri="{FAA26D3D-D897-4be2-8F04-BA451C77F1D7}">
-              <ma14:placeholderFlag xmlns:ma14="http://schemas.microsoft.com/office/mac/drawingml/2011/main" xmlns="" val="1"/>
+              <ma14:placeholderFlag xmlns="" xmlns:ma14="http://schemas.microsoft.com/office/mac/drawingml/2011/main" val="1"/>
             </a:ext>
           </a:extLst>
         </p:spPr>
@@ -3774,7 +3774,7 @@
           <a:p>
             <a:fld id="{6D2DC8F3-C415-6641-9620-75163596B5B4}" type="datetimeFigureOut">
               <a:rPr lang="en-US" smtClean="0"/>
-              <a:t>7/16/26</a:t>
+              <a:t>8/31/26</a:t>
             </a:fld>
             <a:endParaRPr lang="en-US"/>
           </a:p>
@@ -3942,7 +3942,7 @@
           <a:p>
             <a:fld id="{6D2DC8F3-C415-6641-9620-75163596B5B4}" type="datetimeFigureOut">
               <a:rPr lang="en-US" smtClean="0"/>
-              <a:t>7/16/26</a:t>
+              <a:t>8/31/26</a:t>
             </a:fld>
             <a:endParaRPr lang="en-US"/>
           </a:p>
@@ -4120,7 +4120,7 @@
           <a:p>
             <a:fld id="{6D2DC8F3-C415-6641-9620-75163596B5B4}" type="datetimeFigureOut">
               <a:rPr lang="en-US" smtClean="0"/>
-              <a:t>7/16/26</a:t>
+              <a:t>8/31/26</a:t>
             </a:fld>
             <a:endParaRPr lang="en-US"/>
           </a:p>
@@ -4288,7 +4288,7 @@
           <a:p>
             <a:fld id="{6D2DC8F3-C415-6641-9620-75163596B5B4}" type="datetimeFigureOut">
               <a:rPr lang="en-US" smtClean="0"/>
-              <a:t>7/16/26</a:t>
+              <a:t>8/31/26</a:t>
             </a:fld>
             <a:endParaRPr lang="en-US"/>
           </a:p>
@@ -4533,7 +4533,7 @@
           <a:p>
             <a:fld id="{6D2DC8F3-C415-6641-9620-75163596B5B4}" type="datetimeFigureOut">
               <a:rPr lang="en-US" smtClean="0"/>
-              <a:t>7/16/26</a:t>
+              <a:t>8/31/26</a:t>
             </a:fld>
             <a:endParaRPr lang="en-US"/>
           </a:p>
@@ -4762,7 +4762,7 @@
           <a:p>
             <a:fld id="{6D2DC8F3-C415-6641-9620-75163596B5B4}" type="datetimeFigureOut">
               <a:rPr lang="en-US" smtClean="0"/>
-              <a:t>7/16/26</a:t>
+              <a:t>8/31/26</a:t>
             </a:fld>
             <a:endParaRPr lang="en-US"/>
           </a:p>
@@ -5126,7 +5126,7 @@
           <a:p>
             <a:fld id="{6D2DC8F3-C415-6641-9620-75163596B5B4}" type="datetimeFigureOut">
               <a:rPr lang="en-US" smtClean="0"/>
-              <a:t>7/16/26</a:t>
+              <a:t>8/31/26</a:t>
             </a:fld>
             <a:endParaRPr lang="en-US"/>
           </a:p>
@@ -5243,7 +5243,7 @@
           <a:p>
             <a:fld id="{6D2DC8F3-C415-6641-9620-75163596B5B4}" type="datetimeFigureOut">
               <a:rPr lang="en-US" smtClean="0"/>
-              <a:t>7/16/26</a:t>
+              <a:t>8/31/26</a:t>
             </a:fld>
             <a:endParaRPr lang="en-US"/>
           </a:p>
@@ -5338,7 +5338,7 @@
           <a:p>
             <a:fld id="{6D2DC8F3-C415-6641-9620-75163596B5B4}" type="datetimeFigureOut">
               <a:rPr lang="en-US" smtClean="0"/>
-              <a:t>7/16/26</a:t>
+              <a:t>8/31/26</a:t>
             </a:fld>
             <a:endParaRPr lang="en-US"/>
           </a:p>
@@ -5613,7 +5613,7 @@
           <a:p>
             <a:fld id="{6D2DC8F3-C415-6641-9620-75163596B5B4}" type="datetimeFigureOut">
               <a:rPr lang="en-US" smtClean="0"/>
-              <a:t>7/16/26</a:t>
+              <a:t>8/31/26</a:t>
             </a:fld>
             <a:endParaRPr lang="en-US"/>
           </a:p>
@@ -5865,7 +5865,7 @@
           <a:p>
             <a:fld id="{6D2DC8F3-C415-6641-9620-75163596B5B4}" type="datetimeFigureOut">
               <a:rPr lang="en-US" smtClean="0"/>
-              <a:t>7/16/26</a:t>
+              <a:t>8/31/26</a:t>
             </a:fld>
             <a:endParaRPr lang="en-US"/>
           </a:p>
@@ -6076,7 +6076,7 @@
           <a:p>
             <a:fld id="{6D2DC8F3-C415-6641-9620-75163596B5B4}" type="datetimeFigureOut">
               <a:rPr lang="en-US" smtClean="0"/>
-              <a:t>7/16/26</a:t>
+              <a:t>8/31/26</a:t>
             </a:fld>
             <a:endParaRPr lang="en-US"/>
           </a:p>
@@ -12377,7 +12377,7 @@
             </a:r>
             <a:r>
               <a:rPr lang="en-AU" altLang="en-US" sz="1800" dirty="0"/>
-              <a:t> &lt;- matrix(scan(”Whale.</a:t>
+              <a:t> &lt;- matrix(scan("Whale.</a:t>
             </a:r>
             <a:r>
               <a:rPr lang="en-AU" altLang="en-US" sz="1800" dirty="0" err="1"/>
@@ -19010,7 +19010,7 @@
               </a14:hiddenEffects>
             </a:ext>
             <a:ext uri="{FAA26D3D-D897-4be2-8F04-BA451C77F1D7}">
-              <ma14:placeholderFlag xmlns:ma14="http://schemas.microsoft.com/office/mac/drawingml/2011/main" xmlns="" val="1"/>
+              <ma14:placeholderFlag xmlns="" xmlns:ma14="http://schemas.microsoft.com/office/mac/drawingml/2011/main" val="1"/>
             </a:ext>
           </a:extLst>
         </p:spPr>
@@ -19912,7 +19912,7 @@
               </a14:hiddenEffects>
             </a:ext>
             <a:ext uri="{FAA26D3D-D897-4be2-8F04-BA451C77F1D7}">
-              <ma14:placeholderFlag xmlns:ma14="http://schemas.microsoft.com/office/mac/drawingml/2011/main" xmlns="" val="1"/>
+              <ma14:placeholderFlag xmlns="" xmlns:ma14="http://schemas.microsoft.com/office/mac/drawingml/2011/main" val="1"/>
             </a:ext>
           </a:extLst>
         </p:spPr>
@@ -21387,7 +21387,7 @@
             </a:r>
             <a:r>
               <a:rPr lang="en-AU" altLang="en-US" sz="1800" dirty="0"/>
-              <a:t> &lt;- matrix(scan(”Whale.</a:t>
+              <a:t> &lt;- matrix(scan("Whale.</a:t>
             </a:r>
             <a:r>
               <a:rPr lang="en-AU" altLang="en-US" sz="1800" dirty="0" err="1"/>

--- a/Day4_Likelihood_BayesI/FW536_Day4_Morning_maximum likelihod_accessible.pptx
+++ b/Day4_Likelihood_BayesI/FW536_Day4_Morning_maximum likelihod_accessible.pptx
@@ -8366,7 +8366,7 @@
               <a:rPr lang="en-AU" altLang="en-US" sz="2000" dirty="0">
                 <a:latin typeface="Arial" charset="0"/>
               </a:rPr>
-              <a:t>Like &lt;- Probs^30*(1-Probs)^20</a:t>
+              <a:t>Like &lt;- Prob^30*(1-Prob)^20</a:t>
             </a:r>
           </a:p>
           <a:p>
@@ -8618,31 +8618,31 @@
               <a:rPr lang="en-AU" altLang="en-US" sz="2000" dirty="0">
                 <a:latin typeface="Arial" charset="0"/>
               </a:rPr>
-              <a:t>print(</a:t>
+              <a:t>print(Prob[Ibest])</a:t>
             </a:r>
             <a:r>
               <a:rPr lang="en-AU" altLang="en-US" sz="2000" dirty="0" err="1">
                 <a:latin typeface="Arial" charset="0"/>
               </a:rPr>
-              <a:t>Probs</a:t>
+              <a:t/>
             </a:r>
             <a:r>
               <a:rPr lang="en-AU" altLang="en-US" sz="2000" dirty="0">
                 <a:latin typeface="Arial" charset="0"/>
               </a:rPr>
-              <a:t>[</a:t>
+              <a:t/>
             </a:r>
             <a:r>
               <a:rPr lang="en-AU" altLang="en-US" sz="2000" dirty="0" err="1">
                 <a:latin typeface="Arial" charset="0"/>
               </a:rPr>
-              <a:t>Ibest</a:t>
+              <a:t/>
             </a:r>
             <a:r>
               <a:rPr lang="en-AU" altLang="en-US" sz="2000" dirty="0">
                 <a:latin typeface="Arial" charset="0"/>
               </a:rPr>
-              <a:t>])</a:t>
+              <a:t/>
             </a:r>
           </a:p>
         </p:txBody>

--- a/Day4_Likelihood_BayesI/FW536_Day4_Morning_maximum likelihod_accessible.pptx
+++ b/Day4_Likelihood_BayesI/FW536_Day4_Morning_maximum likelihod_accessible.pptx
@@ -18164,7 +18164,7 @@
                   <a:srgbClr val="000000"/>
                 </a:solidFill>
               </a:rPr>
-              <a:t>	longer blow times)?</a:t>
+              <a:t>	higher blow rate)?</a:t>
             </a:r>
           </a:p>
           <a:p>
@@ -18192,7 +18192,7 @@
                   <a:srgbClr val="000000"/>
                 </a:solidFill>
               </a:rPr>
-              <a:t>      length of blow?</a:t>
+              <a:t>      blow rate?</a:t>
             </a:r>
           </a:p>
           <a:p>
